--- a/docs/Foundry_Local_Sovereign_Demo_Slides.pptx
+++ b/docs/Foundry_Local_Sovereign_Demo_Slides.pptx
@@ -7,6 +7,9 @@
   <p:sldIdLst>
     <p:sldId id="256" r:id="rId7"/>
     <p:sldId id="257" r:id="rId8"/>
+    <p:sldId id="258" r:id="rId9"/>
+    <p:sldId id="259" r:id="rId10"/>
+    <p:sldId id="260" r:id="rId11"/>
   </p:sldIdLst>
   <p:sldSz cx="12191695" cy="6858000" type="screen4x3"/>
   <p:notesSz cx="6858000" cy="9144000"/>
@@ -3157,8 +3160,8 @@
         </p:nvSpPr>
         <p:spPr>
           <a:xfrm>
-            <a:off x="548640" y="320040"/>
-            <a:ext cx="10972800" cy="365760"/>
+            <a:off x="548640" y="292608"/>
+            <a:ext cx="10972800" cy="320040"/>
           </a:xfrm>
           <a:prstGeom prst="rect">
             <a:avLst/>
@@ -3196,8 +3199,8 @@
         </p:nvSpPr>
         <p:spPr>
           <a:xfrm>
-            <a:off x="548640" y="640080"/>
-            <a:ext cx="11064240" cy="914400"/>
+            <a:off x="548640" y="603504"/>
+            <a:ext cx="11064240" cy="731520"/>
           </a:xfrm>
           <a:prstGeom prst="rect">
             <a:avLst/>
@@ -3222,7 +3225,7 @@
                 </a:solidFill>
                 <a:latin typeface="Segoe UI"/>
               </a:rPr>
-              <a:t>Same model, same data, same UI — </a:t>
+              <a:t>Take the model out of Azure — </a:t>
             </a:r>
             <a:r>
               <a:rPr sz="3000" b="1">
@@ -3231,21 +3234,67 @@
                 </a:solidFill>
                 <a:latin typeface="Segoe UI"/>
               </a:rPr>
-              <a:t>from Azure to the edge</a:t>
-            </a:r>
-          </a:p>
-        </p:txBody>
-      </p:sp>
-      <p:sp>
-        <p:nvSpPr>
-          <p:cNvPr id="5" name="TextBox 4"/>
+              <a:t>run it whole at the edge</a:t>
+            </a:r>
+          </a:p>
+        </p:txBody>
+      </p:sp>
+      <p:sp>
+        <p:nvSpPr>
+          <p:cNvPr id="5" name="Rounded Rectangle 4"/>
+          <p:cNvSpPr/>
+          <p:nvPr/>
+        </p:nvSpPr>
+        <p:spPr>
+          <a:xfrm>
+            <a:off x="548640" y="1371600"/>
+            <a:ext cx="11091672" cy="868680"/>
+          </a:xfrm>
+          <a:prstGeom prst="roundRect">
+            <a:avLst/>
+          </a:prstGeom>
+          <a:solidFill>
+            <a:srgbClr val="3A2266"/>
+          </a:solidFill>
+          <a:ln w="19050">
+            <a:solidFill>
+              <a:srgbClr val="7B4FC7"/>
+            </a:solidFill>
+          </a:ln>
+          <a:effectLst/>
+        </p:spPr>
+        <p:style>
+          <a:lnRef idx="1">
+            <a:schemeClr val="accent1"/>
+          </a:lnRef>
+          <a:fillRef idx="3">
+            <a:schemeClr val="accent1"/>
+          </a:fillRef>
+          <a:effectRef idx="2">
+            <a:schemeClr val="accent1"/>
+          </a:effectRef>
+          <a:fontRef idx="minor">
+            <a:schemeClr val="lt1"/>
+          </a:fontRef>
+        </p:style>
+        <p:txBody>
+          <a:bodyPr rtlCol="0" anchor="ctr"/>
+          <a:lstStyle/>
+          <a:p>
+            <a:pPr algn="ctr"/>
+          </a:p>
+        </p:txBody>
+      </p:sp>
+      <p:sp>
+        <p:nvSpPr>
+          <p:cNvPr id="6" name="TextBox 5"/>
           <p:cNvSpPr txBox="1"/>
           <p:nvPr/>
         </p:nvSpPr>
         <p:spPr>
           <a:xfrm>
-            <a:off x="548640" y="1417320"/>
-            <a:ext cx="11064240" cy="457200"/>
+            <a:off x="777240" y="1463040"/>
+            <a:ext cx="10607040" cy="731520"/>
           </a:xfrm>
           <a:prstGeom prst="rect">
             <a:avLst/>
@@ -3253,7 +3302,7 @@
           <a:noFill/>
         </p:spPr>
         <p:txBody>
-          <a:bodyPr wrap="square" anchor="t" lIns="25400" rIns="25400" tIns="25400" bIns="25400">
+          <a:bodyPr wrap="square" anchor="ctr" lIns="25400" rIns="25400" tIns="25400" bIns="25400">
             <a:spAutoFit/>
           </a:bodyPr>
           <a:lstStyle/>
@@ -3264,33 +3313,710 @@
               </a:spcAft>
             </a:pPr>
             <a:r>
+              <a:rPr sz="1400" b="1">
+                <a:solidFill>
+                  <a:srgbClr val="38E0C4"/>
+                </a:solidFill>
+                <a:latin typeface="Segoe UI"/>
+              </a:rPr>
+              <a:t>The scenario:  </a:t>
+            </a:r>
+            <a:r>
               <a:rPr sz="1400" b="0">
                 <a:solidFill>
-                  <a:srgbClr val="C8BDE6"/>
+                  <a:srgbClr val="FFFFFF"/>
                 </a:solidFill>
                 <a:latin typeface="Segoe UI"/>
               </a:rPr>
-              <a:t>A regulated bank's rate-forecasting model migrated out of Azure and run entirely on Azure Local — sovereign, low-latency, no cloud egress.</a:t>
-            </a:r>
-          </a:p>
-        </p:txBody>
-      </p:sp>
-      <p:sp>
-        <p:nvSpPr>
-          <p:cNvPr id="6" name="Rounded Rectangle 5"/>
+              <a:t>A regulated bank runs a rate-forecasting model in Azure, against data in Azure. New sovereignty rules say the model, the data and the UI must run on-premises — with no cloud dependency at runtime.</a:t>
+            </a:r>
+          </a:p>
+        </p:txBody>
+      </p:sp>
+      <p:sp>
+        <p:nvSpPr>
+          <p:cNvPr id="7" name="Rounded Rectangle 6"/>
           <p:cNvSpPr/>
           <p:nvPr/>
         </p:nvSpPr>
         <p:spPr>
           <a:xfrm>
-            <a:off x="548640" y="2148840"/>
-            <a:ext cx="3566160" cy="1828800"/>
+            <a:off x="548640" y="2514600"/>
+            <a:ext cx="5449824" cy="1874519"/>
           </a:xfrm>
           <a:prstGeom prst="roundRect">
             <a:avLst/>
           </a:prstGeom>
           <a:solidFill>
             <a:srgbClr val="3A2266"/>
+          </a:solidFill>
+          <a:ln w="19050">
+            <a:solidFill>
+              <a:srgbClr val="FFB454"/>
+            </a:solidFill>
+          </a:ln>
+          <a:effectLst/>
+        </p:spPr>
+        <p:style>
+          <a:lnRef idx="1">
+            <a:schemeClr val="accent1"/>
+          </a:lnRef>
+          <a:fillRef idx="3">
+            <a:schemeClr val="accent1"/>
+          </a:fillRef>
+          <a:effectRef idx="2">
+            <a:schemeClr val="accent1"/>
+          </a:effectRef>
+          <a:fontRef idx="minor">
+            <a:schemeClr val="lt1"/>
+          </a:fontRef>
+        </p:style>
+        <p:txBody>
+          <a:bodyPr rtlCol="0" anchor="ctr"/>
+          <a:lstStyle/>
+          <a:p>
+            <a:pPr algn="ctr"/>
+          </a:p>
+        </p:txBody>
+      </p:sp>
+      <p:sp>
+        <p:nvSpPr>
+          <p:cNvPr id="8" name="TextBox 7"/>
+          <p:cNvSpPr txBox="1"/>
+          <p:nvPr/>
+        </p:nvSpPr>
+        <p:spPr>
+          <a:xfrm>
+            <a:off x="777240" y="2642616"/>
+            <a:ext cx="4992624" cy="365760"/>
+          </a:xfrm>
+          <a:prstGeom prst="rect">
+            <a:avLst/>
+          </a:prstGeom>
+          <a:noFill/>
+        </p:spPr>
+        <p:txBody>
+          <a:bodyPr wrap="square" anchor="t" lIns="25400" rIns="25400" tIns="25400" bIns="25400">
+            <a:spAutoFit/>
+          </a:bodyPr>
+          <a:lstStyle/>
+          <a:p>
+            <a:pPr algn="l">
+              <a:spcAft>
+                <a:spcPts val="400"/>
+              </a:spcAft>
+            </a:pPr>
+            <a:r>
+              <a:rPr sz="1250" b="1">
+                <a:solidFill>
+                  <a:srgbClr val="FFB454"/>
+                </a:solidFill>
+                <a:latin typeface="Segoe UI"/>
+              </a:rPr>
+              <a:t>THE CHALLENGE</a:t>
+            </a:r>
+          </a:p>
+        </p:txBody>
+      </p:sp>
+      <p:sp>
+        <p:nvSpPr>
+          <p:cNvPr id="9" name="Rounded Rectangle 8"/>
+          <p:cNvSpPr/>
+          <p:nvPr/>
+        </p:nvSpPr>
+        <p:spPr>
+          <a:xfrm>
+            <a:off x="777240" y="3118104"/>
+            <a:ext cx="118872" cy="118872"/>
+          </a:xfrm>
+          <a:prstGeom prst="roundRect">
+            <a:avLst/>
+          </a:prstGeom>
+          <a:solidFill>
+            <a:srgbClr val="FFB454"/>
+          </a:solidFill>
+          <a:ln>
+            <a:noFill/>
+          </a:ln>
+          <a:effectLst/>
+        </p:spPr>
+        <p:style>
+          <a:lnRef idx="1">
+            <a:schemeClr val="accent1"/>
+          </a:lnRef>
+          <a:fillRef idx="3">
+            <a:schemeClr val="accent1"/>
+          </a:fillRef>
+          <a:effectRef idx="2">
+            <a:schemeClr val="accent1"/>
+          </a:effectRef>
+          <a:fontRef idx="minor">
+            <a:schemeClr val="lt1"/>
+          </a:fontRef>
+        </p:style>
+        <p:txBody>
+          <a:bodyPr rtlCol="0" anchor="ctr"/>
+          <a:lstStyle/>
+          <a:p>
+            <a:pPr algn="ctr"/>
+          </a:p>
+        </p:txBody>
+      </p:sp>
+      <p:sp>
+        <p:nvSpPr>
+          <p:cNvPr id="10" name="TextBox 9"/>
+          <p:cNvSpPr txBox="1"/>
+          <p:nvPr/>
+        </p:nvSpPr>
+        <p:spPr>
+          <a:xfrm>
+            <a:off x="987552" y="3026664"/>
+            <a:ext cx="4809744" cy="457200"/>
+          </a:xfrm>
+          <a:prstGeom prst="rect">
+            <a:avLst/>
+          </a:prstGeom>
+          <a:noFill/>
+        </p:spPr>
+        <p:txBody>
+          <a:bodyPr wrap="square" anchor="t" lIns="25400" rIns="25400" tIns="25400" bIns="25400">
+            <a:spAutoFit/>
+          </a:bodyPr>
+          <a:lstStyle/>
+          <a:p>
+            <a:pPr algn="l">
+              <a:spcAft>
+                <a:spcPts val="400"/>
+              </a:spcAft>
+            </a:pPr>
+            <a:r>
+              <a:rPr sz="1250" b="0">
+                <a:solidFill>
+                  <a:srgbClr val="FFFFFF"/>
+                </a:solidFill>
+                <a:latin typeface="Segoe UI"/>
+              </a:rPr>
+              <a:t>Data residency &amp; regulation — inference cannot leave the premises.</a:t>
+            </a:r>
+          </a:p>
+        </p:txBody>
+      </p:sp>
+      <p:sp>
+        <p:nvSpPr>
+          <p:cNvPr id="11" name="Rounded Rectangle 10"/>
+          <p:cNvSpPr/>
+          <p:nvPr/>
+        </p:nvSpPr>
+        <p:spPr>
+          <a:xfrm>
+            <a:off x="777240" y="3538728"/>
+            <a:ext cx="118872" cy="118872"/>
+          </a:xfrm>
+          <a:prstGeom prst="roundRect">
+            <a:avLst/>
+          </a:prstGeom>
+          <a:solidFill>
+            <a:srgbClr val="FFB454"/>
+          </a:solidFill>
+          <a:ln>
+            <a:noFill/>
+          </a:ln>
+          <a:effectLst/>
+        </p:spPr>
+        <p:style>
+          <a:lnRef idx="1">
+            <a:schemeClr val="accent1"/>
+          </a:lnRef>
+          <a:fillRef idx="3">
+            <a:schemeClr val="accent1"/>
+          </a:fillRef>
+          <a:effectRef idx="2">
+            <a:schemeClr val="accent1"/>
+          </a:effectRef>
+          <a:fontRef idx="minor">
+            <a:schemeClr val="lt1"/>
+          </a:fontRef>
+        </p:style>
+        <p:txBody>
+          <a:bodyPr rtlCol="0" anchor="ctr"/>
+          <a:lstStyle/>
+          <a:p>
+            <a:pPr algn="ctr"/>
+          </a:p>
+        </p:txBody>
+      </p:sp>
+      <p:sp>
+        <p:nvSpPr>
+          <p:cNvPr id="12" name="TextBox 11"/>
+          <p:cNvSpPr txBox="1"/>
+          <p:nvPr/>
+        </p:nvSpPr>
+        <p:spPr>
+          <a:xfrm>
+            <a:off x="987552" y="3447288"/>
+            <a:ext cx="4809744" cy="457200"/>
+          </a:xfrm>
+          <a:prstGeom prst="rect">
+            <a:avLst/>
+          </a:prstGeom>
+          <a:noFill/>
+        </p:spPr>
+        <p:txBody>
+          <a:bodyPr wrap="square" anchor="t" lIns="25400" rIns="25400" tIns="25400" bIns="25400">
+            <a:spAutoFit/>
+          </a:bodyPr>
+          <a:lstStyle/>
+          <a:p>
+            <a:pPr algn="l">
+              <a:spcAft>
+                <a:spcPts val="400"/>
+              </a:spcAft>
+            </a:pPr>
+            <a:r>
+              <a:rPr sz="1250" b="0">
+                <a:solidFill>
+                  <a:srgbClr val="FFFFFF"/>
+                </a:solidFill>
+                <a:latin typeface="Segoe UI"/>
+              </a:rPr>
+              <a:t>Low latency at branch / on-site, even when disconnected.</a:t>
+            </a:r>
+          </a:p>
+        </p:txBody>
+      </p:sp>
+      <p:sp>
+        <p:nvSpPr>
+          <p:cNvPr id="13" name="Rounded Rectangle 12"/>
+          <p:cNvSpPr/>
+          <p:nvPr/>
+        </p:nvSpPr>
+        <p:spPr>
+          <a:xfrm>
+            <a:off x="777240" y="3959352"/>
+            <a:ext cx="118872" cy="118872"/>
+          </a:xfrm>
+          <a:prstGeom prst="roundRect">
+            <a:avLst/>
+          </a:prstGeom>
+          <a:solidFill>
+            <a:srgbClr val="FFB454"/>
+          </a:solidFill>
+          <a:ln>
+            <a:noFill/>
+          </a:ln>
+          <a:effectLst/>
+        </p:spPr>
+        <p:style>
+          <a:lnRef idx="1">
+            <a:schemeClr val="accent1"/>
+          </a:lnRef>
+          <a:fillRef idx="3">
+            <a:schemeClr val="accent1"/>
+          </a:fillRef>
+          <a:effectRef idx="2">
+            <a:schemeClr val="accent1"/>
+          </a:effectRef>
+          <a:fontRef idx="minor">
+            <a:schemeClr val="lt1"/>
+          </a:fontRef>
+        </p:style>
+        <p:txBody>
+          <a:bodyPr rtlCol="0" anchor="ctr"/>
+          <a:lstStyle/>
+          <a:p>
+            <a:pPr algn="ctr"/>
+          </a:p>
+        </p:txBody>
+      </p:sp>
+      <p:sp>
+        <p:nvSpPr>
+          <p:cNvPr id="14" name="TextBox 13"/>
+          <p:cNvSpPr txBox="1"/>
+          <p:nvPr/>
+        </p:nvSpPr>
+        <p:spPr>
+          <a:xfrm>
+            <a:off x="987552" y="3867912"/>
+            <a:ext cx="4809744" cy="457200"/>
+          </a:xfrm>
+          <a:prstGeom prst="rect">
+            <a:avLst/>
+          </a:prstGeom>
+          <a:noFill/>
+        </p:spPr>
+        <p:txBody>
+          <a:bodyPr wrap="square" anchor="t" lIns="25400" rIns="25400" tIns="25400" bIns="25400">
+            <a:spAutoFit/>
+          </a:bodyPr>
+          <a:lstStyle/>
+          <a:p>
+            <a:pPr algn="l">
+              <a:spcAft>
+                <a:spcPts val="400"/>
+              </a:spcAft>
+            </a:pPr>
+            <a:r>
+              <a:rPr sz="1250" b="0">
+                <a:solidFill>
+                  <a:srgbClr val="FFFFFF"/>
+                </a:solidFill>
+                <a:latin typeface="Segoe UI"/>
+              </a:rPr>
+              <a:t>Don't rebuild the app — keep the same model, data and UI.</a:t>
+            </a:r>
+          </a:p>
+        </p:txBody>
+      </p:sp>
+      <p:sp>
+        <p:nvSpPr>
+          <p:cNvPr id="15" name="Rounded Rectangle 14"/>
+          <p:cNvSpPr/>
+          <p:nvPr/>
+        </p:nvSpPr>
+        <p:spPr>
+          <a:xfrm>
+            <a:off x="6190488" y="2514600"/>
+            <a:ext cx="5449824" cy="1874519"/>
+          </a:xfrm>
+          <a:prstGeom prst="roundRect">
+            <a:avLst/>
+          </a:prstGeom>
+          <a:solidFill>
+            <a:srgbClr val="3A2266"/>
+          </a:solidFill>
+          <a:ln w="19050">
+            <a:solidFill>
+              <a:srgbClr val="38E0C4"/>
+            </a:solidFill>
+          </a:ln>
+          <a:effectLst/>
+        </p:spPr>
+        <p:style>
+          <a:lnRef idx="1">
+            <a:schemeClr val="accent1"/>
+          </a:lnRef>
+          <a:fillRef idx="3">
+            <a:schemeClr val="accent1"/>
+          </a:fillRef>
+          <a:effectRef idx="2">
+            <a:schemeClr val="accent1"/>
+          </a:effectRef>
+          <a:fontRef idx="minor">
+            <a:schemeClr val="lt1"/>
+          </a:fontRef>
+        </p:style>
+        <p:txBody>
+          <a:bodyPr rtlCol="0" anchor="ctr"/>
+          <a:lstStyle/>
+          <a:p>
+            <a:pPr algn="ctr"/>
+          </a:p>
+        </p:txBody>
+      </p:sp>
+      <p:sp>
+        <p:nvSpPr>
+          <p:cNvPr id="16" name="TextBox 15"/>
+          <p:cNvSpPr txBox="1"/>
+          <p:nvPr/>
+        </p:nvSpPr>
+        <p:spPr>
+          <a:xfrm>
+            <a:off x="6419088" y="2642616"/>
+            <a:ext cx="4992624" cy="365760"/>
+          </a:xfrm>
+          <a:prstGeom prst="rect">
+            <a:avLst/>
+          </a:prstGeom>
+          <a:noFill/>
+        </p:spPr>
+        <p:txBody>
+          <a:bodyPr wrap="square" anchor="t" lIns="25400" rIns="25400" tIns="25400" bIns="25400">
+            <a:spAutoFit/>
+          </a:bodyPr>
+          <a:lstStyle/>
+          <a:p>
+            <a:pPr algn="l">
+              <a:spcAft>
+                <a:spcPts val="400"/>
+              </a:spcAft>
+            </a:pPr>
+            <a:r>
+              <a:rPr sz="1250" b="1">
+                <a:solidFill>
+                  <a:srgbClr val="38E0C4"/>
+                </a:solidFill>
+                <a:latin typeface="Segoe UI"/>
+              </a:rPr>
+              <a:t>THE OUTCOME</a:t>
+            </a:r>
+          </a:p>
+        </p:txBody>
+      </p:sp>
+      <p:sp>
+        <p:nvSpPr>
+          <p:cNvPr id="17" name="Rounded Rectangle 16"/>
+          <p:cNvSpPr/>
+          <p:nvPr/>
+        </p:nvSpPr>
+        <p:spPr>
+          <a:xfrm>
+            <a:off x="6419088" y="3118104"/>
+            <a:ext cx="118872" cy="118872"/>
+          </a:xfrm>
+          <a:prstGeom prst="roundRect">
+            <a:avLst/>
+          </a:prstGeom>
+          <a:solidFill>
+            <a:srgbClr val="38E0C4"/>
+          </a:solidFill>
+          <a:ln>
+            <a:noFill/>
+          </a:ln>
+          <a:effectLst/>
+        </p:spPr>
+        <p:style>
+          <a:lnRef idx="1">
+            <a:schemeClr val="accent1"/>
+          </a:lnRef>
+          <a:fillRef idx="3">
+            <a:schemeClr val="accent1"/>
+          </a:fillRef>
+          <a:effectRef idx="2">
+            <a:schemeClr val="accent1"/>
+          </a:effectRef>
+          <a:fontRef idx="minor">
+            <a:schemeClr val="lt1"/>
+          </a:fontRef>
+        </p:style>
+        <p:txBody>
+          <a:bodyPr rtlCol="0" anchor="ctr"/>
+          <a:lstStyle/>
+          <a:p>
+            <a:pPr algn="ctr"/>
+          </a:p>
+        </p:txBody>
+      </p:sp>
+      <p:sp>
+        <p:nvSpPr>
+          <p:cNvPr id="18" name="TextBox 17"/>
+          <p:cNvSpPr txBox="1"/>
+          <p:nvPr/>
+        </p:nvSpPr>
+        <p:spPr>
+          <a:xfrm>
+            <a:off x="6629400" y="3026664"/>
+            <a:ext cx="4809744" cy="457200"/>
+          </a:xfrm>
+          <a:prstGeom prst="rect">
+            <a:avLst/>
+          </a:prstGeom>
+          <a:noFill/>
+        </p:spPr>
+        <p:txBody>
+          <a:bodyPr wrap="square" anchor="t" lIns="25400" rIns="25400" tIns="25400" bIns="25400">
+            <a:spAutoFit/>
+          </a:bodyPr>
+          <a:lstStyle/>
+          <a:p>
+            <a:pPr algn="l">
+              <a:spcAft>
+                <a:spcPts val="400"/>
+              </a:spcAft>
+            </a:pPr>
+            <a:r>
+              <a:rPr sz="1250" b="0">
+                <a:solidFill>
+                  <a:srgbClr val="FFFFFF"/>
+                </a:solidFill>
+                <a:latin typeface="Segoe UI"/>
+              </a:rPr>
+              <a:t>Same ONNX model + same Next.js UI, now on Azure Local.</a:t>
+            </a:r>
+          </a:p>
+        </p:txBody>
+      </p:sp>
+      <p:sp>
+        <p:nvSpPr>
+          <p:cNvPr id="19" name="Rounded Rectangle 18"/>
+          <p:cNvSpPr/>
+          <p:nvPr/>
+        </p:nvSpPr>
+        <p:spPr>
+          <a:xfrm>
+            <a:off x="6419088" y="3538728"/>
+            <a:ext cx="118872" cy="118872"/>
+          </a:xfrm>
+          <a:prstGeom prst="roundRect">
+            <a:avLst/>
+          </a:prstGeom>
+          <a:solidFill>
+            <a:srgbClr val="38E0C4"/>
+          </a:solidFill>
+          <a:ln>
+            <a:noFill/>
+          </a:ln>
+          <a:effectLst/>
+        </p:spPr>
+        <p:style>
+          <a:lnRef idx="1">
+            <a:schemeClr val="accent1"/>
+          </a:lnRef>
+          <a:fillRef idx="3">
+            <a:schemeClr val="accent1"/>
+          </a:fillRef>
+          <a:effectRef idx="2">
+            <a:schemeClr val="accent1"/>
+          </a:effectRef>
+          <a:fontRef idx="minor">
+            <a:schemeClr val="lt1"/>
+          </a:fontRef>
+        </p:style>
+        <p:txBody>
+          <a:bodyPr rtlCol="0" anchor="ctr"/>
+          <a:lstStyle/>
+          <a:p>
+            <a:pPr algn="ctr"/>
+          </a:p>
+        </p:txBody>
+      </p:sp>
+      <p:sp>
+        <p:nvSpPr>
+          <p:cNvPr id="20" name="TextBox 19"/>
+          <p:cNvSpPr txBox="1"/>
+          <p:nvPr/>
+        </p:nvSpPr>
+        <p:spPr>
+          <a:xfrm>
+            <a:off x="6629400" y="3447288"/>
+            <a:ext cx="4809744" cy="457200"/>
+          </a:xfrm>
+          <a:prstGeom prst="rect">
+            <a:avLst/>
+          </a:prstGeom>
+          <a:noFill/>
+        </p:spPr>
+        <p:txBody>
+          <a:bodyPr wrap="square" anchor="t" lIns="25400" rIns="25400" tIns="25400" bIns="25400">
+            <a:spAutoFit/>
+          </a:bodyPr>
+          <a:lstStyle/>
+          <a:p>
+            <a:pPr algn="l">
+              <a:spcAft>
+                <a:spcPts val="400"/>
+              </a:spcAft>
+            </a:pPr>
+            <a:r>
+              <a:rPr sz="1250" b="0">
+                <a:solidFill>
+                  <a:srgbClr val="FFFFFF"/>
+                </a:solidFill>
+                <a:latin typeface="Segoe UI"/>
+              </a:rPr>
+              <a:t>Forecasts are byte-identical to the cloud — a true migration.</a:t>
+            </a:r>
+          </a:p>
+        </p:txBody>
+      </p:sp>
+      <p:sp>
+        <p:nvSpPr>
+          <p:cNvPr id="21" name="Rounded Rectangle 20"/>
+          <p:cNvSpPr/>
+          <p:nvPr/>
+        </p:nvSpPr>
+        <p:spPr>
+          <a:xfrm>
+            <a:off x="6419088" y="3959352"/>
+            <a:ext cx="118872" cy="118872"/>
+          </a:xfrm>
+          <a:prstGeom prst="roundRect">
+            <a:avLst/>
+          </a:prstGeom>
+          <a:solidFill>
+            <a:srgbClr val="38E0C4"/>
+          </a:solidFill>
+          <a:ln>
+            <a:noFill/>
+          </a:ln>
+          <a:effectLst/>
+        </p:spPr>
+        <p:style>
+          <a:lnRef idx="1">
+            <a:schemeClr val="accent1"/>
+          </a:lnRef>
+          <a:fillRef idx="3">
+            <a:schemeClr val="accent1"/>
+          </a:fillRef>
+          <a:effectRef idx="2">
+            <a:schemeClr val="accent1"/>
+          </a:effectRef>
+          <a:fontRef idx="minor">
+            <a:schemeClr val="lt1"/>
+          </a:fontRef>
+        </p:style>
+        <p:txBody>
+          <a:bodyPr rtlCol="0" anchor="ctr"/>
+          <a:lstStyle/>
+          <a:p>
+            <a:pPr algn="ctr"/>
+          </a:p>
+        </p:txBody>
+      </p:sp>
+      <p:sp>
+        <p:nvSpPr>
+          <p:cNvPr id="22" name="TextBox 21"/>
+          <p:cNvSpPr txBox="1"/>
+          <p:nvPr/>
+        </p:nvSpPr>
+        <p:spPr>
+          <a:xfrm>
+            <a:off x="6629400" y="3867912"/>
+            <a:ext cx="4809744" cy="457200"/>
+          </a:xfrm>
+          <a:prstGeom prst="rect">
+            <a:avLst/>
+          </a:prstGeom>
+          <a:noFill/>
+        </p:spPr>
+        <p:txBody>
+          <a:bodyPr wrap="square" anchor="t" lIns="25400" rIns="25400" tIns="25400" bIns="25400">
+            <a:spAutoFit/>
+          </a:bodyPr>
+          <a:lstStyle/>
+          <a:p>
+            <a:pPr algn="l">
+              <a:spcAft>
+                <a:spcPts val="400"/>
+              </a:spcAft>
+            </a:pPr>
+            <a:r>
+              <a:rPr sz="1250" b="0">
+                <a:solidFill>
+                  <a:srgbClr val="FFFFFF"/>
+                </a:solidFill>
+                <a:latin typeface="Segoe UI"/>
+              </a:rPr>
+              <a:t>Plus a generative AI analyst (Phi-4) — all running sovereign.</a:t>
+            </a:r>
+          </a:p>
+        </p:txBody>
+      </p:sp>
+      <p:sp>
+        <p:nvSpPr>
+          <p:cNvPr id="23" name="Rounded Rectangle 22"/>
+          <p:cNvSpPr/>
+          <p:nvPr/>
+        </p:nvSpPr>
+        <p:spPr>
+          <a:xfrm>
+            <a:off x="548640" y="4617720"/>
+            <a:ext cx="2697480" cy="1554480"/>
+          </a:xfrm>
+          <a:prstGeom prst="roundRect">
+            <a:avLst/>
+          </a:prstGeom>
+          <a:solidFill>
+            <a:srgbClr val="472A7E"/>
           </a:solidFill>
           <a:ln w="12700">
             <a:solidFill>
@@ -3323,14 +4049,58 @@
       </p:sp>
       <p:sp>
         <p:nvSpPr>
-          <p:cNvPr id="7" name="TextBox 6"/>
+          <p:cNvPr id="24" name="Rectangle 23"/>
+          <p:cNvSpPr/>
+          <p:nvPr/>
+        </p:nvSpPr>
+        <p:spPr>
+          <a:xfrm>
+            <a:off x="548640" y="4617720"/>
+            <a:ext cx="109728" cy="1554480"/>
+          </a:xfrm>
+          <a:prstGeom prst="rect">
+            <a:avLst/>
+          </a:prstGeom>
+          <a:solidFill>
+            <a:srgbClr val="38E0C4"/>
+          </a:solidFill>
+          <a:ln>
+            <a:noFill/>
+          </a:ln>
+          <a:effectLst/>
+        </p:spPr>
+        <p:style>
+          <a:lnRef idx="1">
+            <a:schemeClr val="accent1"/>
+          </a:lnRef>
+          <a:fillRef idx="3">
+            <a:schemeClr val="accent1"/>
+          </a:fillRef>
+          <a:effectRef idx="2">
+            <a:schemeClr val="accent1"/>
+          </a:effectRef>
+          <a:fontRef idx="minor">
+            <a:schemeClr val="lt1"/>
+          </a:fontRef>
+        </p:style>
+        <p:txBody>
+          <a:bodyPr rtlCol="0" anchor="ctr"/>
+          <a:lstStyle/>
+          <a:p>
+            <a:pPr algn="ctr"/>
+          </a:p>
+        </p:txBody>
+      </p:sp>
+      <p:sp>
+        <p:nvSpPr>
+          <p:cNvPr id="25" name="TextBox 24"/>
           <p:cNvSpPr txBox="1"/>
           <p:nvPr/>
         </p:nvSpPr>
         <p:spPr>
           <a:xfrm>
-            <a:off x="777240" y="2313432"/>
-            <a:ext cx="3108960" cy="365760"/>
+            <a:off x="804672" y="4764024"/>
+            <a:ext cx="2331720" cy="365760"/>
           </a:xfrm>
           <a:prstGeom prst="rect">
             <a:avLst/>
@@ -3349,27 +4119,27 @@
               </a:spcAft>
             </a:pPr>
             <a:r>
-              <a:rPr sz="1200" b="1">
+              <a:rPr sz="1400" b="1">
                 <a:solidFill>
                   <a:srgbClr val="38E0C4"/>
                 </a:solidFill>
                 <a:latin typeface="Segoe UI"/>
               </a:rPr>
-              <a:t>THE USE CASE</a:t>
-            </a:r>
-          </a:p>
-        </p:txBody>
-      </p:sp>
-      <p:sp>
-        <p:nvSpPr>
-          <p:cNvPr id="8" name="TextBox 7"/>
+              <a:t>Sovereignty</a:t>
+            </a:r>
+          </a:p>
+        </p:txBody>
+      </p:sp>
+      <p:sp>
+        <p:nvSpPr>
+          <p:cNvPr id="26" name="TextBox 25"/>
           <p:cNvSpPr txBox="1"/>
           <p:nvPr/>
         </p:nvSpPr>
         <p:spPr>
           <a:xfrm>
-            <a:off x="777240" y="2697480"/>
-            <a:ext cx="3108960" cy="1188720"/>
+            <a:off x="804672" y="5166360"/>
+            <a:ext cx="2286000" cy="914400"/>
           </a:xfrm>
           <a:prstGeom prst="rect">
             <a:avLst/>
@@ -3383,56 +4153,41 @@
           <a:lstStyle/>
           <a:p>
             <a:pPr algn="l">
+              <a:lnSpc>
+                <a:spcPct val="105000"/>
+              </a:lnSpc>
               <a:spcAft>
-                <a:spcPts val="200"/>
+                <a:spcPts val="400"/>
               </a:spcAft>
             </a:pPr>
             <a:r>
-              <a:rPr sz="1250" b="0">
-                <a:solidFill>
-                  <a:srgbClr val="FFFFFF"/>
+              <a:rPr sz="1150" b="0">
+                <a:solidFill>
+                  <a:srgbClr val="C8BDE6"/>
                 </a:solidFill>
                 <a:latin typeface="Segoe UI"/>
               </a:rPr>
-              <a:t>A bank runs a predictive model in Azure against data in Azure. Regulation now demands it run </a:t>
-            </a:r>
-            <a:r>
-              <a:rPr sz="1250" b="1">
-                <a:solidFill>
-                  <a:srgbClr val="38E0C4"/>
-                </a:solidFill>
-                <a:latin typeface="Segoe UI"/>
-              </a:rPr>
-              <a:t>at the edge</a:t>
-            </a:r>
-            <a:r>
-              <a:rPr sz="1250" b="0">
-                <a:solidFill>
-                  <a:srgbClr val="FFFFFF"/>
-                </a:solidFill>
-                <a:latin typeface="Segoe UI"/>
-              </a:rPr>
-              <a:t> — same model, same data, same UI — on Azure Local.</a:t>
-            </a:r>
-          </a:p>
-        </p:txBody>
-      </p:sp>
-      <p:sp>
-        <p:nvSpPr>
-          <p:cNvPr id="9" name="Rounded Rectangle 8"/>
+              <a:t>Model, data &amp; UI on-prem. No cloud egress at runtime; air-gap capable.</a:t>
+            </a:r>
+          </a:p>
+        </p:txBody>
+      </p:sp>
+      <p:sp>
+        <p:nvSpPr>
+          <p:cNvPr id="27" name="Rounded Rectangle 26"/>
           <p:cNvSpPr/>
           <p:nvPr/>
         </p:nvSpPr>
         <p:spPr>
           <a:xfrm>
-            <a:off x="4343400" y="2148840"/>
-            <a:ext cx="7315200" cy="1828800"/>
+            <a:off x="3355848" y="4617720"/>
+            <a:ext cx="2697480" cy="1554480"/>
           </a:xfrm>
           <a:prstGeom prst="roundRect">
             <a:avLst/>
           </a:prstGeom>
           <a:solidFill>
-            <a:srgbClr val="3A2266"/>
+            <a:srgbClr val="472A7E"/>
           </a:solidFill>
           <a:ln w="12700">
             <a:solidFill>
@@ -3465,55 +4220,16 @@
       </p:sp>
       <p:sp>
         <p:nvSpPr>
-          <p:cNvPr id="10" name="TextBox 9"/>
-          <p:cNvSpPr txBox="1"/>
-          <p:nvPr/>
-        </p:nvSpPr>
-        <p:spPr>
-          <a:xfrm>
-            <a:off x="4572000" y="2313432"/>
-            <a:ext cx="6858000" cy="365760"/>
+          <p:cNvPr id="28" name="Rectangle 27"/>
+          <p:cNvSpPr/>
+          <p:nvPr/>
+        </p:nvSpPr>
+        <p:spPr>
+          <a:xfrm>
+            <a:off x="3355848" y="4617720"/>
+            <a:ext cx="109728" cy="1554480"/>
           </a:xfrm>
           <a:prstGeom prst="rect">
-            <a:avLst/>
-          </a:prstGeom>
-          <a:noFill/>
-        </p:spPr>
-        <p:txBody>
-          <a:bodyPr wrap="square" anchor="t" lIns="25400" rIns="25400" tIns="25400" bIns="25400">
-            <a:spAutoFit/>
-          </a:bodyPr>
-          <a:lstStyle/>
-          <a:p>
-            <a:pPr algn="l">
-              <a:spcAft>
-                <a:spcPts val="400"/>
-              </a:spcAft>
-            </a:pPr>
-            <a:r>
-              <a:rPr sz="1200" b="1">
-                <a:solidFill>
-                  <a:srgbClr val="38E0C4"/>
-                </a:solidFill>
-                <a:latin typeface="Segoe UI"/>
-              </a:rPr>
-              <a:t>WHY IT MATTERS</a:t>
-            </a:r>
-          </a:p>
-        </p:txBody>
-      </p:sp>
-      <p:sp>
-        <p:nvSpPr>
-          <p:cNvPr id="11" name="Rounded Rectangle 10"/>
-          <p:cNvSpPr/>
-          <p:nvPr/>
-        </p:nvSpPr>
-        <p:spPr>
-          <a:xfrm>
-            <a:off x="4572000" y="2807208"/>
-            <a:ext cx="128016" cy="128016"/>
-          </a:xfrm>
-          <a:prstGeom prst="roundRect">
             <a:avLst/>
           </a:prstGeom>
           <a:solidFill>
@@ -3548,14 +4264,14 @@
       </p:sp>
       <p:sp>
         <p:nvSpPr>
-          <p:cNvPr id="12" name="TextBox 11"/>
+          <p:cNvPr id="29" name="TextBox 28"/>
           <p:cNvSpPr txBox="1"/>
           <p:nvPr/>
         </p:nvSpPr>
         <p:spPr>
           <a:xfrm>
-            <a:off x="4800600" y="2706624"/>
-            <a:ext cx="6583680" cy="365760"/>
+            <a:off x="3611880" y="4764024"/>
+            <a:ext cx="2331720" cy="365760"/>
           </a:xfrm>
           <a:prstGeom prst="rect">
             <a:avLst/>
@@ -3574,38 +4290,117 @@
               </a:spcAft>
             </a:pPr>
             <a:r>
-              <a:rPr sz="1250" b="1">
-                <a:solidFill>
-                  <a:srgbClr val="FFFFFF"/>
+              <a:rPr sz="1400" b="1">
+                <a:solidFill>
+                  <a:srgbClr val="38E0C4"/>
                 </a:solidFill>
                 <a:latin typeface="Segoe UI"/>
               </a:rPr>
-              <a:t>Data sovereignty — </a:t>
-            </a:r>
-            <a:r>
-              <a:rPr sz="1250" b="0">
+              <a:t>Paved road</a:t>
+            </a:r>
+          </a:p>
+        </p:txBody>
+      </p:sp>
+      <p:sp>
+        <p:nvSpPr>
+          <p:cNvPr id="30" name="TextBox 29"/>
+          <p:cNvSpPr txBox="1"/>
+          <p:nvPr/>
+        </p:nvSpPr>
+        <p:spPr>
+          <a:xfrm>
+            <a:off x="3611880" y="5166360"/>
+            <a:ext cx="2286000" cy="914400"/>
+          </a:xfrm>
+          <a:prstGeom prst="rect">
+            <a:avLst/>
+          </a:prstGeom>
+          <a:noFill/>
+        </p:spPr>
+        <p:txBody>
+          <a:bodyPr wrap="square" anchor="t" lIns="25400" rIns="25400" tIns="25400" bIns="25400">
+            <a:spAutoFit/>
+          </a:bodyPr>
+          <a:lstStyle/>
+          <a:p>
+            <a:pPr algn="l">
+              <a:lnSpc>
+                <a:spcPct val="105000"/>
+              </a:lnSpc>
+              <a:spcAft>
+                <a:spcPts val="400"/>
+              </a:spcAft>
+            </a:pPr>
+            <a:r>
+              <a:rPr sz="1150" b="0">
                 <a:solidFill>
                   <a:srgbClr val="C8BDE6"/>
                 </a:solidFill>
                 <a:latin typeface="Segoe UI"/>
               </a:rPr>
-              <a:t>Inference + UI run on-prem; no cloud egress at runtime.</a:t>
-            </a:r>
-          </a:p>
-        </p:txBody>
-      </p:sp>
-      <p:sp>
-        <p:nvSpPr>
-          <p:cNvPr id="13" name="Rounded Rectangle 12"/>
+              <a:t>From a validated ONNX model: package - push - deploy - manage.</a:t>
+            </a:r>
+          </a:p>
+        </p:txBody>
+      </p:sp>
+      <p:sp>
+        <p:nvSpPr>
+          <p:cNvPr id="31" name="Rounded Rectangle 30"/>
           <p:cNvSpPr/>
           <p:nvPr/>
         </p:nvSpPr>
         <p:spPr>
           <a:xfrm>
-            <a:off x="4572000" y="3099816"/>
-            <a:ext cx="128016" cy="128016"/>
+            <a:off x="6163056" y="4617720"/>
+            <a:ext cx="2697480" cy="1554480"/>
           </a:xfrm>
           <a:prstGeom prst="roundRect">
+            <a:avLst/>
+          </a:prstGeom>
+          <a:solidFill>
+            <a:srgbClr val="472A7E"/>
+          </a:solidFill>
+          <a:ln w="12700">
+            <a:solidFill>
+              <a:srgbClr val="6B4AA8"/>
+            </a:solidFill>
+          </a:ln>
+          <a:effectLst/>
+        </p:spPr>
+        <p:style>
+          <a:lnRef idx="1">
+            <a:schemeClr val="accent1"/>
+          </a:lnRef>
+          <a:fillRef idx="3">
+            <a:schemeClr val="accent1"/>
+          </a:fillRef>
+          <a:effectRef idx="2">
+            <a:schemeClr val="accent1"/>
+          </a:effectRef>
+          <a:fontRef idx="minor">
+            <a:schemeClr val="lt1"/>
+          </a:fontRef>
+        </p:style>
+        <p:txBody>
+          <a:bodyPr rtlCol="0" anchor="ctr"/>
+          <a:lstStyle/>
+          <a:p>
+            <a:pPr algn="ctr"/>
+          </a:p>
+        </p:txBody>
+      </p:sp>
+      <p:sp>
+        <p:nvSpPr>
+          <p:cNvPr id="32" name="Rectangle 31"/>
+          <p:cNvSpPr/>
+          <p:nvPr/>
+        </p:nvSpPr>
+        <p:spPr>
+          <a:xfrm>
+            <a:off x="6163056" y="4617720"/>
+            <a:ext cx="109728" cy="1554480"/>
+          </a:xfrm>
+          <a:prstGeom prst="rect">
             <a:avLst/>
           </a:prstGeom>
           <a:solidFill>
@@ -3640,14 +4435,14 @@
       </p:sp>
       <p:sp>
         <p:nvSpPr>
-          <p:cNvPr id="14" name="TextBox 13"/>
+          <p:cNvPr id="33" name="TextBox 32"/>
           <p:cNvSpPr txBox="1"/>
           <p:nvPr/>
         </p:nvSpPr>
         <p:spPr>
           <a:xfrm>
-            <a:off x="4800600" y="2999232"/>
-            <a:ext cx="6583680" cy="365760"/>
+            <a:off x="6419088" y="4764024"/>
+            <a:ext cx="2331720" cy="365760"/>
           </a:xfrm>
           <a:prstGeom prst="rect">
             <a:avLst/>
@@ -3666,38 +4461,117 @@
               </a:spcAft>
             </a:pPr>
             <a:r>
-              <a:rPr sz="1250" b="1">
-                <a:solidFill>
-                  <a:srgbClr val="FFFFFF"/>
+              <a:rPr sz="1400" b="1">
+                <a:solidFill>
+                  <a:srgbClr val="38E0C4"/>
                 </a:solidFill>
                 <a:latin typeface="Segoe UI"/>
               </a:rPr>
-              <a:t>Operational lifecycle — </a:t>
-            </a:r>
-            <a:r>
-              <a:rPr sz="1250" b="0">
+              <a:t>One control plane</a:t>
+            </a:r>
+          </a:p>
+        </p:txBody>
+      </p:sp>
+      <p:sp>
+        <p:nvSpPr>
+          <p:cNvPr id="34" name="TextBox 33"/>
+          <p:cNvSpPr txBox="1"/>
+          <p:nvPr/>
+        </p:nvSpPr>
+        <p:spPr>
+          <a:xfrm>
+            <a:off x="6419088" y="5166360"/>
+            <a:ext cx="2286000" cy="914400"/>
+          </a:xfrm>
+          <a:prstGeom prst="rect">
+            <a:avLst/>
+          </a:prstGeom>
+          <a:noFill/>
+        </p:spPr>
+        <p:txBody>
+          <a:bodyPr wrap="square" anchor="t" lIns="25400" rIns="25400" tIns="25400" bIns="25400">
+            <a:spAutoFit/>
+          </a:bodyPr>
+          <a:lstStyle/>
+          <a:p>
+            <a:pPr algn="l">
+              <a:lnSpc>
+                <a:spcPct val="105000"/>
+              </a:lnSpc>
+              <a:spcAft>
+                <a:spcPts val="400"/>
+              </a:spcAft>
+            </a:pPr>
+            <a:r>
+              <a:rPr sz="1150" b="0">
                 <a:solidFill>
                   <a:srgbClr val="C8BDE6"/>
                 </a:solidFill>
                 <a:latin typeface="Segoe UI"/>
               </a:rPr>
-              <a:t>Paved road from validated ONNX: package - push - deploy.</a:t>
-            </a:r>
-          </a:p>
-        </p:txBody>
-      </p:sp>
-      <p:sp>
-        <p:nvSpPr>
-          <p:cNvPr id="15" name="Rounded Rectangle 14"/>
+              <a:t>AKS Arc + Foundry Local, governed from Azure via Arc.</a:t>
+            </a:r>
+          </a:p>
+        </p:txBody>
+      </p:sp>
+      <p:sp>
+        <p:nvSpPr>
+          <p:cNvPr id="35" name="Rounded Rectangle 34"/>
           <p:cNvSpPr/>
           <p:nvPr/>
         </p:nvSpPr>
         <p:spPr>
           <a:xfrm>
-            <a:off x="4572000" y="3392424"/>
-            <a:ext cx="128016" cy="128016"/>
+            <a:off x="8970264" y="4617720"/>
+            <a:ext cx="2697480" cy="1554480"/>
           </a:xfrm>
           <a:prstGeom prst="roundRect">
+            <a:avLst/>
+          </a:prstGeom>
+          <a:solidFill>
+            <a:srgbClr val="472A7E"/>
+          </a:solidFill>
+          <a:ln w="12700">
+            <a:solidFill>
+              <a:srgbClr val="6B4AA8"/>
+            </a:solidFill>
+          </a:ln>
+          <a:effectLst/>
+        </p:spPr>
+        <p:style>
+          <a:lnRef idx="1">
+            <a:schemeClr val="accent1"/>
+          </a:lnRef>
+          <a:fillRef idx="3">
+            <a:schemeClr val="accent1"/>
+          </a:fillRef>
+          <a:effectRef idx="2">
+            <a:schemeClr val="accent1"/>
+          </a:effectRef>
+          <a:fontRef idx="minor">
+            <a:schemeClr val="lt1"/>
+          </a:fontRef>
+        </p:style>
+        <p:txBody>
+          <a:bodyPr rtlCol="0" anchor="ctr"/>
+          <a:lstStyle/>
+          <a:p>
+            <a:pPr algn="ctr"/>
+          </a:p>
+        </p:txBody>
+      </p:sp>
+      <p:sp>
+        <p:nvSpPr>
+          <p:cNvPr id="36" name="Rectangle 35"/>
+          <p:cNvSpPr/>
+          <p:nvPr/>
+        </p:nvSpPr>
+        <p:spPr>
+          <a:xfrm>
+            <a:off x="8970264" y="4617720"/>
+            <a:ext cx="109728" cy="1554480"/>
+          </a:xfrm>
+          <a:prstGeom prst="rect">
             <a:avLst/>
           </a:prstGeom>
           <a:solidFill>
@@ -3732,14 +4606,14 @@
       </p:sp>
       <p:sp>
         <p:nvSpPr>
-          <p:cNvPr id="16" name="TextBox 15"/>
+          <p:cNvPr id="37" name="TextBox 36"/>
           <p:cNvSpPr txBox="1"/>
           <p:nvPr/>
         </p:nvSpPr>
         <p:spPr>
           <a:xfrm>
-            <a:off x="4800600" y="3291840"/>
-            <a:ext cx="6583680" cy="365760"/>
+            <a:off x="9226296" y="4764024"/>
+            <a:ext cx="2331720" cy="365760"/>
           </a:xfrm>
           <a:prstGeom prst="rect">
             <a:avLst/>
@@ -3758,80 +4632,69 @@
               </a:spcAft>
             </a:pPr>
             <a:r>
-              <a:rPr sz="1250" b="1">
-                <a:solidFill>
-                  <a:srgbClr val="FFFFFF"/>
+              <a:rPr sz="1400" b="1">
+                <a:solidFill>
+                  <a:srgbClr val="38E0C4"/>
                 </a:solidFill>
                 <a:latin typeface="Segoe UI"/>
               </a:rPr>
-              <a:t>One Azure control plane — </a:t>
-            </a:r>
-            <a:r>
-              <a:rPr sz="1250" b="0">
+              <a:t>Same experience</a:t>
+            </a:r>
+          </a:p>
+        </p:txBody>
+      </p:sp>
+      <p:sp>
+        <p:nvSpPr>
+          <p:cNvPr id="38" name="TextBox 37"/>
+          <p:cNvSpPr txBox="1"/>
+          <p:nvPr/>
+        </p:nvSpPr>
+        <p:spPr>
+          <a:xfrm>
+            <a:off x="9226296" y="5166360"/>
+            <a:ext cx="2286000" cy="914400"/>
+          </a:xfrm>
+          <a:prstGeom prst="rect">
+            <a:avLst/>
+          </a:prstGeom>
+          <a:noFill/>
+        </p:spPr>
+        <p:txBody>
+          <a:bodyPr wrap="square" anchor="t" lIns="25400" rIns="25400" tIns="25400" bIns="25400">
+            <a:spAutoFit/>
+          </a:bodyPr>
+          <a:lstStyle/>
+          <a:p>
+            <a:pPr algn="l">
+              <a:lnSpc>
+                <a:spcPct val="105000"/>
+              </a:lnSpc>
+              <a:spcAft>
+                <a:spcPts val="400"/>
+              </a:spcAft>
+            </a:pPr>
+            <a:r>
+              <a:rPr sz="1150" b="0">
                 <a:solidFill>
                   <a:srgbClr val="C8BDE6"/>
                 </a:solidFill>
                 <a:latin typeface="Segoe UI"/>
               </a:rPr>
-              <a:t>AKS Arc + Foundry Local managed from Azure via Arc.</a:t>
-            </a:r>
-          </a:p>
-        </p:txBody>
-      </p:sp>
-      <p:sp>
-        <p:nvSpPr>
-          <p:cNvPr id="17" name="Rounded Rectangle 16"/>
-          <p:cNvSpPr/>
-          <p:nvPr/>
-        </p:nvSpPr>
-        <p:spPr>
-          <a:xfrm>
-            <a:off x="4572000" y="3685032"/>
-            <a:ext cx="128016" cy="128016"/>
-          </a:xfrm>
-          <a:prstGeom prst="roundRect">
-            <a:avLst/>
-          </a:prstGeom>
-          <a:solidFill>
-            <a:srgbClr val="38E0C4"/>
-          </a:solidFill>
-          <a:ln>
-            <a:noFill/>
-          </a:ln>
-          <a:effectLst/>
-        </p:spPr>
-        <p:style>
-          <a:lnRef idx="1">
-            <a:schemeClr val="accent1"/>
-          </a:lnRef>
-          <a:fillRef idx="3">
-            <a:schemeClr val="accent1"/>
-          </a:fillRef>
-          <a:effectRef idx="2">
-            <a:schemeClr val="accent1"/>
-          </a:effectRef>
-          <a:fontRef idx="minor">
-            <a:schemeClr val="lt1"/>
-          </a:fontRef>
-        </p:style>
-        <p:txBody>
-          <a:bodyPr rtlCol="0" anchor="ctr"/>
-          <a:lstStyle/>
-          <a:p>
-            <a:pPr algn="ctr"/>
-          </a:p>
-        </p:txBody>
-      </p:sp>
-      <p:sp>
-        <p:nvSpPr>
-          <p:cNvPr id="18" name="TextBox 17"/>
+              <a:t>Identical UI and results — migration, not a rewrite.</a:t>
+            </a:r>
+          </a:p>
+        </p:txBody>
+      </p:sp>
+      <p:sp>
+        <p:nvSpPr>
+          <p:cNvPr id="39" name="TextBox 38"/>
           <p:cNvSpPr txBox="1"/>
           <p:nvPr/>
         </p:nvSpPr>
         <p:spPr>
           <a:xfrm>
-            <a:off x="4800600" y="3584448"/>
-            <a:ext cx="6583680" cy="365760"/>
+            <a:off x="548640" y="6510528"/>
+            <a:ext cx="11064240" cy="274320"/>
           </a:xfrm>
           <a:prstGeom prst="rect">
             <a:avLst/>
@@ -3850,912 +4713,13 @@
               </a:spcAft>
             </a:pPr>
             <a:r>
-              <a:rPr sz="1250" b="1">
-                <a:solidFill>
-                  <a:srgbClr val="FFFFFF"/>
+              <a:rPr sz="1050" b="0">
+                <a:solidFill>
+                  <a:srgbClr val="C8BDE6"/>
                 </a:solidFill>
                 <a:latin typeface="Segoe UI"/>
               </a:rPr>
-              <a:t>Air-gap capable — </a:t>
-            </a:r>
-            <a:r>
-              <a:rPr sz="1250" b="0">
-                <a:solidFill>
-                  <a:srgbClr val="C8BDE6"/>
-                </a:solidFill>
-                <a:latin typeface="Segoe UI"/>
-              </a:rPr>
-              <a:t>Once images/artifacts are cached, the edge runs offline.</a:t>
-            </a:r>
-          </a:p>
-        </p:txBody>
-      </p:sp>
-      <p:sp>
-        <p:nvSpPr>
-          <p:cNvPr id="19" name="TextBox 18"/>
-          <p:cNvSpPr txBox="1"/>
-          <p:nvPr/>
-        </p:nvSpPr>
-        <p:spPr>
-          <a:xfrm>
-            <a:off x="548640" y="4297680"/>
-            <a:ext cx="10972800" cy="320040"/>
-          </a:xfrm>
-          <a:prstGeom prst="rect">
-            <a:avLst/>
-          </a:prstGeom>
-          <a:noFill/>
-        </p:spPr>
-        <p:txBody>
-          <a:bodyPr wrap="square" anchor="t" lIns="25400" rIns="25400" tIns="25400" bIns="25400">
-            <a:spAutoFit/>
-          </a:bodyPr>
-          <a:lstStyle/>
-          <a:p>
-            <a:pPr algn="l">
-              <a:spcAft>
-                <a:spcPts val="400"/>
-              </a:spcAft>
-            </a:pPr>
-            <a:r>
-              <a:rPr sz="1200" b="1">
-                <a:solidFill>
-                  <a:srgbClr val="38E0C4"/>
-                </a:solidFill>
-                <a:latin typeface="Segoe UI"/>
-              </a:rPr>
-              <a:t>ARCHITECTURE — CLOUD BASELINE  →  SOVEREIGN EDGE</a:t>
-            </a:r>
-          </a:p>
-        </p:txBody>
-      </p:sp>
-      <p:sp>
-        <p:nvSpPr>
-          <p:cNvPr id="20" name="Rounded Rectangle 19"/>
-          <p:cNvSpPr/>
-          <p:nvPr/>
-        </p:nvSpPr>
-        <p:spPr>
-          <a:xfrm>
-            <a:off x="548640" y="4709160"/>
-            <a:ext cx="4846320" cy="1828800"/>
-          </a:xfrm>
-          <a:prstGeom prst="roundRect">
-            <a:avLst/>
-          </a:prstGeom>
-          <a:solidFill>
-            <a:srgbClr val="472A7E"/>
-          </a:solidFill>
-          <a:ln w="19050">
-            <a:solidFill>
-              <a:srgbClr val="FFB454"/>
-            </a:solidFill>
-          </a:ln>
-          <a:effectLst/>
-        </p:spPr>
-        <p:style>
-          <a:lnRef idx="1">
-            <a:schemeClr val="accent1"/>
-          </a:lnRef>
-          <a:fillRef idx="3">
-            <a:schemeClr val="accent1"/>
-          </a:fillRef>
-          <a:effectRef idx="2">
-            <a:schemeClr val="accent1"/>
-          </a:effectRef>
-          <a:fontRef idx="minor">
-            <a:schemeClr val="lt1"/>
-          </a:fontRef>
-        </p:style>
-        <p:txBody>
-          <a:bodyPr rtlCol="0" anchor="ctr"/>
-          <a:lstStyle/>
-          <a:p>
-            <a:pPr algn="ctr"/>
-          </a:p>
-        </p:txBody>
-      </p:sp>
-      <p:sp>
-        <p:nvSpPr>
-          <p:cNvPr id="21" name="TextBox 20"/>
-          <p:cNvSpPr txBox="1"/>
-          <p:nvPr/>
-        </p:nvSpPr>
-        <p:spPr>
-          <a:xfrm>
-            <a:off x="731520" y="4818888"/>
-            <a:ext cx="4572000" cy="320040"/>
-          </a:xfrm>
-          <a:prstGeom prst="rect">
-            <a:avLst/>
-          </a:prstGeom>
-          <a:noFill/>
-        </p:spPr>
-        <p:txBody>
-          <a:bodyPr wrap="square" anchor="t" lIns="25400" rIns="25400" tIns="25400" bIns="25400">
-            <a:spAutoFit/>
-          </a:bodyPr>
-          <a:lstStyle/>
-          <a:p>
-            <a:pPr algn="l">
-              <a:spcAft>
-                <a:spcPts val="400"/>
-              </a:spcAft>
-            </a:pPr>
-            <a:r>
-              <a:rPr sz="1200" b="1">
-                <a:solidFill>
-                  <a:srgbClr val="FFB454"/>
-                </a:solidFill>
-                <a:latin typeface="Segoe UI"/>
-              </a:rPr>
-              <a:t>AZURE (PUBLIC CLOUD)</a:t>
-            </a:r>
-            <a:r>
-              <a:rPr sz="1100" b="0">
-                <a:solidFill>
-                  <a:srgbClr val="C8BDE6"/>
-                </a:solidFill>
-                <a:latin typeface="Segoe UI"/>
-              </a:rPr>
-              <a:t>   — Act 1 'before'</a:t>
-            </a:r>
-          </a:p>
-        </p:txBody>
-      </p:sp>
-      <p:sp>
-        <p:nvSpPr>
-          <p:cNvPr id="22" name="Rounded Rectangle 21"/>
-          <p:cNvSpPr/>
-          <p:nvPr/>
-        </p:nvSpPr>
-        <p:spPr>
-          <a:xfrm>
-            <a:off x="777240" y="5276088"/>
-            <a:ext cx="2103120" cy="310896"/>
-          </a:xfrm>
-          <a:prstGeom prst="roundRect">
-            <a:avLst/>
-          </a:prstGeom>
-          <a:solidFill>
-            <a:srgbClr val="FFB454"/>
-          </a:solidFill>
-          <a:ln>
-            <a:noFill/>
-          </a:ln>
-          <a:effectLst/>
-        </p:spPr>
-        <p:style>
-          <a:lnRef idx="1">
-            <a:schemeClr val="accent1"/>
-          </a:lnRef>
-          <a:fillRef idx="3">
-            <a:schemeClr val="accent1"/>
-          </a:fillRef>
-          <a:effectRef idx="2">
-            <a:schemeClr val="accent1"/>
-          </a:effectRef>
-          <a:fontRef idx="minor">
-            <a:schemeClr val="lt1"/>
-          </a:fontRef>
-        </p:style>
-        <p:txBody>
-          <a:bodyPr rtlCol="0" anchor="ctr" wrap="square"/>
-          <a:lstStyle/>
-          <a:p>
-            <a:pPr algn="ctr"/>
-            <a:r>
-              <a:rPr sz="1050" b="1">
-                <a:solidFill>
-                  <a:srgbClr val="2A124E"/>
-                </a:solidFill>
-                <a:latin typeface="Segoe UI"/>
-              </a:rPr>
-              <a:t>Container Apps</a:t>
-            </a:r>
-          </a:p>
-        </p:txBody>
-      </p:sp>
-      <p:sp>
-        <p:nvSpPr>
-          <p:cNvPr id="23" name="Rounded Rectangle 22"/>
-          <p:cNvSpPr/>
-          <p:nvPr/>
-        </p:nvSpPr>
-        <p:spPr>
-          <a:xfrm>
-            <a:off x="3017520" y="5276088"/>
-            <a:ext cx="2148840" cy="310896"/>
-          </a:xfrm>
-          <a:prstGeom prst="roundRect">
-            <a:avLst/>
-          </a:prstGeom>
-          <a:solidFill>
-            <a:srgbClr val="B9A3E3"/>
-          </a:solidFill>
-          <a:ln>
-            <a:noFill/>
-          </a:ln>
-          <a:effectLst/>
-        </p:spPr>
-        <p:style>
-          <a:lnRef idx="1">
-            <a:schemeClr val="accent1"/>
-          </a:lnRef>
-          <a:fillRef idx="3">
-            <a:schemeClr val="accent1"/>
-          </a:fillRef>
-          <a:effectRef idx="2">
-            <a:schemeClr val="accent1"/>
-          </a:effectRef>
-          <a:fontRef idx="minor">
-            <a:schemeClr val="lt1"/>
-          </a:fontRef>
-        </p:style>
-        <p:txBody>
-          <a:bodyPr rtlCol="0" anchor="ctr" wrap="square"/>
-          <a:lstStyle/>
-          <a:p>
-            <a:pPr algn="ctr"/>
-            <a:r>
-              <a:rPr sz="1050" b="1">
-                <a:solidFill>
-                  <a:srgbClr val="2A124E"/>
-                </a:solidFill>
-                <a:latin typeface="Segoe UI"/>
-              </a:rPr>
-              <a:t>ONNX rate model (FastAPI)</a:t>
-            </a:r>
-          </a:p>
-        </p:txBody>
-      </p:sp>
-      <p:sp>
-        <p:nvSpPr>
-          <p:cNvPr id="24" name="Rounded Rectangle 23"/>
-          <p:cNvSpPr/>
-          <p:nvPr/>
-        </p:nvSpPr>
-        <p:spPr>
-          <a:xfrm>
-            <a:off x="777240" y="5696712"/>
-            <a:ext cx="2103120" cy="310896"/>
-          </a:xfrm>
-          <a:prstGeom prst="roundRect">
-            <a:avLst/>
-          </a:prstGeom>
-          <a:solidFill>
-            <a:srgbClr val="B9A3E3"/>
-          </a:solidFill>
-          <a:ln>
-            <a:noFill/>
-          </a:ln>
-          <a:effectLst/>
-        </p:spPr>
-        <p:style>
-          <a:lnRef idx="1">
-            <a:schemeClr val="accent1"/>
-          </a:lnRef>
-          <a:fillRef idx="3">
-            <a:schemeClr val="accent1"/>
-          </a:fillRef>
-          <a:effectRef idx="2">
-            <a:schemeClr val="accent1"/>
-          </a:effectRef>
-          <a:fontRef idx="minor">
-            <a:schemeClr val="lt1"/>
-          </a:fontRef>
-        </p:style>
-        <p:txBody>
-          <a:bodyPr rtlCol="0" anchor="ctr" wrap="square"/>
-          <a:lstStyle/>
-          <a:p>
-            <a:pPr algn="ctr"/>
-            <a:r>
-              <a:rPr sz="1050" b="1">
-                <a:solidFill>
-                  <a:srgbClr val="2A124E"/>
-                </a:solidFill>
-                <a:latin typeface="Segoe UI"/>
-              </a:rPr>
-              <a:t>Next.js dashboard</a:t>
-            </a:r>
-          </a:p>
-        </p:txBody>
-      </p:sp>
-      <p:sp>
-        <p:nvSpPr>
-          <p:cNvPr id="25" name="Rounded Rectangle 24"/>
-          <p:cNvSpPr/>
-          <p:nvPr/>
-        </p:nvSpPr>
-        <p:spPr>
-          <a:xfrm>
-            <a:off x="3017520" y="5696712"/>
-            <a:ext cx="2148840" cy="310896"/>
-          </a:xfrm>
-          <a:prstGeom prst="roundRect">
-            <a:avLst/>
-          </a:prstGeom>
-          <a:solidFill>
-            <a:srgbClr val="B9A3E3"/>
-          </a:solidFill>
-          <a:ln>
-            <a:noFill/>
-          </a:ln>
-          <a:effectLst/>
-        </p:spPr>
-        <p:style>
-          <a:lnRef idx="1">
-            <a:schemeClr val="accent1"/>
-          </a:lnRef>
-          <a:fillRef idx="3">
-            <a:schemeClr val="accent1"/>
-          </a:fillRef>
-          <a:effectRef idx="2">
-            <a:schemeClr val="accent1"/>
-          </a:effectRef>
-          <a:fontRef idx="minor">
-            <a:schemeClr val="lt1"/>
-          </a:fontRef>
-        </p:style>
-        <p:txBody>
-          <a:bodyPr rtlCol="0" anchor="ctr" wrap="square"/>
-          <a:lstStyle/>
-          <a:p>
-            <a:pPr algn="ctr"/>
-            <a:r>
-              <a:rPr sz="1050" b="1">
-                <a:solidFill>
-                  <a:srgbClr val="2A124E"/>
-                </a:solidFill>
-                <a:latin typeface="Segoe UI"/>
-              </a:rPr>
-              <a:t>Container Registry (ACR)</a:t>
-            </a:r>
-          </a:p>
-        </p:txBody>
-      </p:sp>
-      <p:sp>
-        <p:nvSpPr>
-          <p:cNvPr id="26" name="TextBox 25"/>
-          <p:cNvSpPr txBox="1"/>
-          <p:nvPr/>
-        </p:nvSpPr>
-        <p:spPr>
-          <a:xfrm>
-            <a:off x="777240" y="6126480"/>
-            <a:ext cx="4480560" cy="320040"/>
-          </a:xfrm>
-          <a:prstGeom prst="rect">
-            <a:avLst/>
-          </a:prstGeom>
-          <a:noFill/>
-        </p:spPr>
-        <p:txBody>
-          <a:bodyPr wrap="square" anchor="t" lIns="25400" rIns="25400" tIns="25400" bIns="25400">
-            <a:spAutoFit/>
-          </a:bodyPr>
-          <a:lstStyle/>
-          <a:p>
-            <a:pPr algn="l">
-              <a:spcAft>
-                <a:spcPts val="400"/>
-              </a:spcAft>
-            </a:pPr>
-            <a:r>
-              <a:rPr sz="1100" b="1">
-                <a:solidFill>
-                  <a:srgbClr val="C8BDE6"/>
-                </a:solidFill>
-                <a:latin typeface="Segoe UI"/>
-              </a:rPr>
-              <a:t>location = cloud  •  ~37 ms</a:t>
-            </a:r>
-          </a:p>
-        </p:txBody>
-      </p:sp>
-      <p:sp>
-        <p:nvSpPr>
-          <p:cNvPr id="27" name="Right Arrow 26"/>
-          <p:cNvSpPr/>
-          <p:nvPr/>
-        </p:nvSpPr>
-        <p:spPr>
-          <a:xfrm>
-            <a:off x="5532120" y="5422392"/>
-            <a:ext cx="1051560" cy="457200"/>
-          </a:xfrm>
-          <a:prstGeom prst="rightArrow">
-            <a:avLst/>
-          </a:prstGeom>
-          <a:solidFill>
-            <a:srgbClr val="38E0C4"/>
-          </a:solidFill>
-          <a:ln>
-            <a:noFill/>
-          </a:ln>
-          <a:effectLst/>
-        </p:spPr>
-        <p:style>
-          <a:lnRef idx="1">
-            <a:schemeClr val="accent1"/>
-          </a:lnRef>
-          <a:fillRef idx="3">
-            <a:schemeClr val="accent1"/>
-          </a:fillRef>
-          <a:effectRef idx="2">
-            <a:schemeClr val="accent1"/>
-          </a:effectRef>
-          <a:fontRef idx="minor">
-            <a:schemeClr val="lt1"/>
-          </a:fontRef>
-        </p:style>
-        <p:txBody>
-          <a:bodyPr rtlCol="0" anchor="ctr"/>
-          <a:lstStyle/>
-          <a:p>
-            <a:pPr algn="ctr"/>
-          </a:p>
-        </p:txBody>
-      </p:sp>
-      <p:sp>
-        <p:nvSpPr>
-          <p:cNvPr id="28" name="TextBox 27"/>
-          <p:cNvSpPr txBox="1"/>
-          <p:nvPr/>
-        </p:nvSpPr>
-        <p:spPr>
-          <a:xfrm>
-            <a:off x="5440680" y="4983480"/>
-            <a:ext cx="1280160" cy="365760"/>
-          </a:xfrm>
-          <a:prstGeom prst="rect">
-            <a:avLst/>
-          </a:prstGeom>
-          <a:noFill/>
-        </p:spPr>
-        <p:txBody>
-          <a:bodyPr wrap="square" anchor="t" lIns="25400" rIns="25400" tIns="25400" bIns="25400">
-            <a:spAutoFit/>
-          </a:bodyPr>
-          <a:lstStyle/>
-          <a:p>
-            <a:pPr algn="ctr">
-              <a:spcAft>
-                <a:spcPts val="400"/>
-              </a:spcAft>
-            </a:pPr>
-            <a:r>
-              <a:rPr sz="1100" b="1">
-                <a:solidFill>
-                  <a:srgbClr val="38E0C4"/>
-                </a:solidFill>
-                <a:latin typeface="Segoe UI"/>
-              </a:rPr>
-              <a:t>migrate</a:t>
-            </a:r>
-          </a:p>
-        </p:txBody>
-      </p:sp>
-      <p:sp>
-        <p:nvSpPr>
-          <p:cNvPr id="29" name="TextBox 28"/>
-          <p:cNvSpPr txBox="1"/>
-          <p:nvPr/>
-        </p:nvSpPr>
-        <p:spPr>
-          <a:xfrm>
-            <a:off x="5349240" y="5879592"/>
-            <a:ext cx="1417320" cy="365760"/>
-          </a:xfrm>
-          <a:prstGeom prst="rect">
-            <a:avLst/>
-          </a:prstGeom>
-          <a:noFill/>
-        </p:spPr>
-        <p:txBody>
-          <a:bodyPr wrap="square" anchor="t" lIns="25400" rIns="25400" tIns="25400" bIns="25400">
-            <a:spAutoFit/>
-          </a:bodyPr>
-          <a:lstStyle/>
-          <a:p>
-            <a:pPr algn="ctr">
-              <a:spcAft>
-                <a:spcPts val="400"/>
-              </a:spcAft>
-            </a:pPr>
-            <a:r>
-              <a:rPr sz="950" b="0">
-                <a:solidFill>
-                  <a:srgbClr val="C8BDE6"/>
-                </a:solidFill>
-                <a:latin typeface="Segoe UI"/>
-              </a:rPr>
-              <a:t>ORAS + ACR</a:t>
-            </a:r>
-          </a:p>
-        </p:txBody>
-      </p:sp>
-      <p:sp>
-        <p:nvSpPr>
-          <p:cNvPr id="30" name="Rounded Rectangle 29"/>
-          <p:cNvSpPr/>
-          <p:nvPr/>
-        </p:nvSpPr>
-        <p:spPr>
-          <a:xfrm>
-            <a:off x="6766560" y="4709160"/>
-            <a:ext cx="4846320" cy="1828800"/>
-          </a:xfrm>
-          <a:prstGeom prst="roundRect">
-            <a:avLst/>
-          </a:prstGeom>
-          <a:solidFill>
-            <a:srgbClr val="472A7E"/>
-          </a:solidFill>
-          <a:ln w="19050">
-            <a:solidFill>
-              <a:srgbClr val="38E0C4"/>
-            </a:solidFill>
-          </a:ln>
-          <a:effectLst/>
-        </p:spPr>
-        <p:style>
-          <a:lnRef idx="1">
-            <a:schemeClr val="accent1"/>
-          </a:lnRef>
-          <a:fillRef idx="3">
-            <a:schemeClr val="accent1"/>
-          </a:fillRef>
-          <a:effectRef idx="2">
-            <a:schemeClr val="accent1"/>
-          </a:effectRef>
-          <a:fontRef idx="minor">
-            <a:schemeClr val="lt1"/>
-          </a:fontRef>
-        </p:style>
-        <p:txBody>
-          <a:bodyPr rtlCol="0" anchor="ctr"/>
-          <a:lstStyle/>
-          <a:p>
-            <a:pPr algn="ctr"/>
-          </a:p>
-        </p:txBody>
-      </p:sp>
-      <p:sp>
-        <p:nvSpPr>
-          <p:cNvPr id="31" name="TextBox 30"/>
-          <p:cNvSpPr txBox="1"/>
-          <p:nvPr/>
-        </p:nvSpPr>
-        <p:spPr>
-          <a:xfrm>
-            <a:off x="6949440" y="4818888"/>
-            <a:ext cx="4572000" cy="320040"/>
-          </a:xfrm>
-          <a:prstGeom prst="rect">
-            <a:avLst/>
-          </a:prstGeom>
-          <a:noFill/>
-        </p:spPr>
-        <p:txBody>
-          <a:bodyPr wrap="square" anchor="t" lIns="25400" rIns="25400" tIns="25400" bIns="25400">
-            <a:spAutoFit/>
-          </a:bodyPr>
-          <a:lstStyle/>
-          <a:p>
-            <a:pPr algn="l">
-              <a:spcAft>
-                <a:spcPts val="400"/>
-              </a:spcAft>
-            </a:pPr>
-            <a:r>
-              <a:rPr sz="1200" b="1">
-                <a:solidFill>
-                  <a:srgbClr val="38E0C4"/>
-                </a:solidFill>
-                <a:latin typeface="Segoe UI"/>
-              </a:rPr>
-              <a:t>AZURE LOCAL — AKS Arc (fl-banking-portland)</a:t>
-            </a:r>
-          </a:p>
-        </p:txBody>
-      </p:sp>
-      <p:sp>
-        <p:nvSpPr>
-          <p:cNvPr id="32" name="Rounded Rectangle 31"/>
-          <p:cNvSpPr/>
-          <p:nvPr/>
-        </p:nvSpPr>
-        <p:spPr>
-          <a:xfrm>
-            <a:off x="6995160" y="5276088"/>
-            <a:ext cx="2103120" cy="310896"/>
-          </a:xfrm>
-          <a:prstGeom prst="roundRect">
-            <a:avLst/>
-          </a:prstGeom>
-          <a:solidFill>
-            <a:srgbClr val="38E0C4"/>
-          </a:solidFill>
-          <a:ln>
-            <a:noFill/>
-          </a:ln>
-          <a:effectLst/>
-        </p:spPr>
-        <p:style>
-          <a:lnRef idx="1">
-            <a:schemeClr val="accent1"/>
-          </a:lnRef>
-          <a:fillRef idx="3">
-            <a:schemeClr val="accent1"/>
-          </a:fillRef>
-          <a:effectRef idx="2">
-            <a:schemeClr val="accent1"/>
-          </a:effectRef>
-          <a:fontRef idx="minor">
-            <a:schemeClr val="lt1"/>
-          </a:fontRef>
-        </p:style>
-        <p:txBody>
-          <a:bodyPr rtlCol="0" anchor="ctr" wrap="square"/>
-          <a:lstStyle/>
-          <a:p>
-            <a:pPr algn="ctr"/>
-            <a:r>
-              <a:rPr sz="1050" b="1">
-                <a:solidFill>
-                  <a:srgbClr val="2A124E"/>
-                </a:solidFill>
-                <a:latin typeface="Segoe UI"/>
-              </a:rPr>
-              <a:t>Foundry Local operator</a:t>
-            </a:r>
-          </a:p>
-        </p:txBody>
-      </p:sp>
-      <p:sp>
-        <p:nvSpPr>
-          <p:cNvPr id="33" name="Rounded Rectangle 32"/>
-          <p:cNvSpPr/>
-          <p:nvPr/>
-        </p:nvSpPr>
-        <p:spPr>
-          <a:xfrm>
-            <a:off x="9235440" y="5276088"/>
-            <a:ext cx="2148840" cy="310896"/>
-          </a:xfrm>
-          <a:prstGeom prst="roundRect">
-            <a:avLst/>
-          </a:prstGeom>
-          <a:solidFill>
-            <a:srgbClr val="B9A3E3"/>
-          </a:solidFill>
-          <a:ln>
-            <a:noFill/>
-          </a:ln>
-          <a:effectLst/>
-        </p:spPr>
-        <p:style>
-          <a:lnRef idx="1">
-            <a:schemeClr val="accent1"/>
-          </a:lnRef>
-          <a:fillRef idx="3">
-            <a:schemeClr val="accent1"/>
-          </a:fillRef>
-          <a:effectRef idx="2">
-            <a:schemeClr val="accent1"/>
-          </a:effectRef>
-          <a:fontRef idx="minor">
-            <a:schemeClr val="lt1"/>
-          </a:fontRef>
-        </p:style>
-        <p:txBody>
-          <a:bodyPr rtlCol="0" anchor="ctr" wrap="square"/>
-          <a:lstStyle/>
-          <a:p>
-            <a:pPr algn="ctr"/>
-            <a:r>
-              <a:rPr sz="1050" b="1">
-                <a:solidFill>
-                  <a:srgbClr val="2A124E"/>
-                </a:solidFill>
-                <a:latin typeface="Segoe UI"/>
-              </a:rPr>
-              <a:t>ONNX rate model (predictive)</a:t>
-            </a:r>
-          </a:p>
-        </p:txBody>
-      </p:sp>
-      <p:sp>
-        <p:nvSpPr>
-          <p:cNvPr id="34" name="Rounded Rectangle 33"/>
-          <p:cNvSpPr/>
-          <p:nvPr/>
-        </p:nvSpPr>
-        <p:spPr>
-          <a:xfrm>
-            <a:off x="6995160" y="5696712"/>
-            <a:ext cx="2103120" cy="310896"/>
-          </a:xfrm>
-          <a:prstGeom prst="roundRect">
-            <a:avLst/>
-          </a:prstGeom>
-          <a:solidFill>
-            <a:srgbClr val="B9A3E3"/>
-          </a:solidFill>
-          <a:ln>
-            <a:noFill/>
-          </a:ln>
-          <a:effectLst/>
-        </p:spPr>
-        <p:style>
-          <a:lnRef idx="1">
-            <a:schemeClr val="accent1"/>
-          </a:lnRef>
-          <a:fillRef idx="3">
-            <a:schemeClr val="accent1"/>
-          </a:fillRef>
-          <a:effectRef idx="2">
-            <a:schemeClr val="accent1"/>
-          </a:effectRef>
-          <a:fontRef idx="minor">
-            <a:schemeClr val="lt1"/>
-          </a:fontRef>
-        </p:style>
-        <p:txBody>
-          <a:bodyPr rtlCol="0" anchor="ctr" wrap="square"/>
-          <a:lstStyle/>
-          <a:p>
-            <a:pPr algn="ctr"/>
-            <a:r>
-              <a:rPr sz="1050" b="1">
-                <a:solidFill>
-                  <a:srgbClr val="2A124E"/>
-                </a:solidFill>
-                <a:latin typeface="Segoe UI"/>
-              </a:rPr>
-              <a:t>Phi-4 (generative)</a:t>
-            </a:r>
-          </a:p>
-        </p:txBody>
-      </p:sp>
-      <p:sp>
-        <p:nvSpPr>
-          <p:cNvPr id="35" name="Rounded Rectangle 34"/>
-          <p:cNvSpPr/>
-          <p:nvPr/>
-        </p:nvSpPr>
-        <p:spPr>
-          <a:xfrm>
-            <a:off x="9235440" y="5696712"/>
-            <a:ext cx="2148840" cy="310896"/>
-          </a:xfrm>
-          <a:prstGeom prst="roundRect">
-            <a:avLst/>
-          </a:prstGeom>
-          <a:solidFill>
-            <a:srgbClr val="B9A3E3"/>
-          </a:solidFill>
-          <a:ln>
-            <a:noFill/>
-          </a:ln>
-          <a:effectLst/>
-        </p:spPr>
-        <p:style>
-          <a:lnRef idx="1">
-            <a:schemeClr val="accent1"/>
-          </a:lnRef>
-          <a:fillRef idx="3">
-            <a:schemeClr val="accent1"/>
-          </a:fillRef>
-          <a:effectRef idx="2">
-            <a:schemeClr val="accent1"/>
-          </a:effectRef>
-          <a:fontRef idx="minor">
-            <a:schemeClr val="lt1"/>
-          </a:fontRef>
-        </p:style>
-        <p:txBody>
-          <a:bodyPr rtlCol="0" anchor="ctr" wrap="square"/>
-          <a:lstStyle/>
-          <a:p>
-            <a:pPr algn="ctr"/>
-            <a:r>
-              <a:rPr sz="1050" b="1">
-                <a:solidFill>
-                  <a:srgbClr val="2A124E"/>
-                </a:solidFill>
-                <a:latin typeface="Segoe UI"/>
-              </a:rPr>
-              <a:t>Next.js dashboard (in-cluster)</a:t>
-            </a:r>
-          </a:p>
-        </p:txBody>
-      </p:sp>
-      <p:sp>
-        <p:nvSpPr>
-          <p:cNvPr id="36" name="TextBox 35"/>
-          <p:cNvSpPr txBox="1"/>
-          <p:nvPr/>
-        </p:nvSpPr>
-        <p:spPr>
-          <a:xfrm>
-            <a:off x="6995160" y="6126480"/>
-            <a:ext cx="4480560" cy="320040"/>
-          </a:xfrm>
-          <a:prstGeom prst="rect">
-            <a:avLst/>
-          </a:prstGeom>
-          <a:noFill/>
-        </p:spPr>
-        <p:txBody>
-          <a:bodyPr wrap="square" anchor="t" lIns="25400" rIns="25400" tIns="25400" bIns="25400">
-            <a:spAutoFit/>
-          </a:bodyPr>
-          <a:lstStyle/>
-          <a:p>
-            <a:pPr algn="l">
-              <a:spcAft>
-                <a:spcPts val="400"/>
-              </a:spcAft>
-            </a:pPr>
-            <a:r>
-              <a:rPr sz="1100" b="1">
-                <a:solidFill>
-                  <a:srgbClr val="C8BDE6"/>
-                </a:solidFill>
-                <a:latin typeface="Segoe UI"/>
-              </a:rPr>
-              <a:t>location = edge  •  ~42 ms  •  </a:t>
-            </a:r>
-            <a:r>
-              <a:rPr sz="1100" b="1">
-                <a:solidFill>
-                  <a:srgbClr val="38E0C4"/>
-                </a:solidFill>
-                <a:latin typeface="Segoe UI"/>
-              </a:rPr>
-              <a:t>identical forecast</a:t>
-            </a:r>
-          </a:p>
-        </p:txBody>
-      </p:sp>
-      <p:sp>
-        <p:nvSpPr>
-          <p:cNvPr id="37" name="TextBox 36"/>
-          <p:cNvSpPr txBox="1"/>
-          <p:nvPr/>
-        </p:nvSpPr>
-        <p:spPr>
-          <a:xfrm>
-            <a:off x="548640" y="6510528"/>
-            <a:ext cx="10972800" cy="274320"/>
-          </a:xfrm>
-          <a:prstGeom prst="rect">
-            <a:avLst/>
-          </a:prstGeom>
-          <a:noFill/>
-        </p:spPr>
-        <p:txBody>
-          <a:bodyPr wrap="square" anchor="t" lIns="25400" rIns="25400" tIns="25400" bIns="25400">
-            <a:spAutoFit/>
-          </a:bodyPr>
-          <a:lstStyle/>
-          <a:p>
-            <a:pPr algn="l">
-              <a:spcAft>
-                <a:spcPts val="400"/>
-              </a:spcAft>
-            </a:pPr>
-            <a:r>
-              <a:rPr sz="1050" b="0">
-                <a:solidFill>
-                  <a:srgbClr val="C8BDE6"/>
-                </a:solidFill>
-                <a:latin typeface="Segoe UI"/>
-              </a:rPr>
-              <a:t>Managed centrally from Azure via Arc.  ACR is the only cloud touchpoint at deploy time — once cached, the edge is sovereign.</a:t>
+              <a:t>BYO predictive ONNX model + curated catalog Phi-4  •  cluster fl-banking-portland  •  RG sovereign-ai-daz</a:t>
             </a:r>
           </a:p>
         </p:txBody>
@@ -4846,8 +4810,8 @@
         </p:nvSpPr>
         <p:spPr>
           <a:xfrm>
-            <a:off x="548640" y="320040"/>
-            <a:ext cx="10972800" cy="365760"/>
+            <a:off x="548640" y="292608"/>
+            <a:ext cx="10972800" cy="320040"/>
           </a:xfrm>
           <a:prstGeom prst="rect">
             <a:avLst/>
@@ -4872,7 +4836,7 @@
                 </a:solidFill>
                 <a:latin typeface="Segoe UI"/>
               </a:rPr>
-              <a:t>THE DEMO IN THREE ACTS</a:t>
+              <a:t>THE LIFECYCLE</a:t>
             </a:r>
           </a:p>
         </p:txBody>
@@ -4885,8 +4849,1711 @@
         </p:nvSpPr>
         <p:spPr>
           <a:xfrm>
-            <a:off x="548640" y="640080"/>
-            <a:ext cx="11064240" cy="640080"/>
+            <a:off x="548640" y="603504"/>
+            <a:ext cx="11064240" cy="731520"/>
+          </a:xfrm>
+          <a:prstGeom prst="rect">
+            <a:avLst/>
+          </a:prstGeom>
+          <a:noFill/>
+        </p:spPr>
+        <p:txBody>
+          <a:bodyPr wrap="square" anchor="t" lIns="25400" rIns="25400" tIns="25400" bIns="25400">
+            <a:spAutoFit/>
+          </a:bodyPr>
+          <a:lstStyle/>
+          <a:p>
+            <a:pPr algn="l">
+              <a:spcAft>
+                <a:spcPts val="400"/>
+              </a:spcAft>
+            </a:pPr>
+            <a:r>
+              <a:rPr sz="2800" b="1">
+                <a:solidFill>
+                  <a:srgbClr val="FFFFFF"/>
+                </a:solidFill>
+                <a:latin typeface="Segoe UI"/>
+              </a:rPr>
+              <a:t>From </a:t>
+            </a:r>
+            <a:r>
+              <a:rPr sz="2800" b="1">
+                <a:solidFill>
+                  <a:srgbClr val="FFB454"/>
+                </a:solidFill>
+                <a:latin typeface="Segoe UI"/>
+              </a:rPr>
+              <a:t>Azure </a:t>
+            </a:r>
+            <a:r>
+              <a:rPr sz="2800" b="1">
+                <a:solidFill>
+                  <a:srgbClr val="FFFFFF"/>
+                </a:solidFill>
+                <a:latin typeface="Segoe UI"/>
+              </a:rPr>
+              <a:t>to the </a:t>
+            </a:r>
+            <a:r>
+              <a:rPr sz="2800" b="1">
+                <a:solidFill>
+                  <a:srgbClr val="38E0C4"/>
+                </a:solidFill>
+                <a:latin typeface="Segoe UI"/>
+              </a:rPr>
+              <a:t>sovereign edge</a:t>
+            </a:r>
+            <a:r>
+              <a:rPr sz="2800" b="1">
+                <a:solidFill>
+                  <a:srgbClr val="FFFFFF"/>
+                </a:solidFill>
+                <a:latin typeface="Segoe UI"/>
+              </a:rPr>
+              <a:t>  — one model, five steps</a:t>
+            </a:r>
+          </a:p>
+        </p:txBody>
+      </p:sp>
+      <p:sp>
+        <p:nvSpPr>
+          <p:cNvPr id="5" name="Rounded Rectangle 4"/>
+          <p:cNvSpPr/>
+          <p:nvPr/>
+        </p:nvSpPr>
+        <p:spPr>
+          <a:xfrm>
+            <a:off x="548640" y="1828800"/>
+            <a:ext cx="4069080" cy="2743200"/>
+          </a:xfrm>
+          <a:prstGeom prst="roundRect">
+            <a:avLst/>
+          </a:prstGeom>
+          <a:noFill/>
+          <a:ln w="15875">
+            <a:solidFill>
+              <a:srgbClr val="FFB454"/>
+            </a:solidFill>
+          </a:ln>
+          <a:effectLst/>
+        </p:spPr>
+        <p:style>
+          <a:lnRef idx="1">
+            <a:schemeClr val="accent1"/>
+          </a:lnRef>
+          <a:fillRef idx="3">
+            <a:schemeClr val="accent1"/>
+          </a:fillRef>
+          <a:effectRef idx="2">
+            <a:schemeClr val="accent1"/>
+          </a:effectRef>
+          <a:fontRef idx="minor">
+            <a:schemeClr val="lt1"/>
+          </a:fontRef>
+        </p:style>
+        <p:txBody>
+          <a:bodyPr rtlCol="0" anchor="ctr"/>
+          <a:lstStyle/>
+          <a:p>
+            <a:pPr algn="ctr"/>
+          </a:p>
+        </p:txBody>
+      </p:sp>
+      <p:sp>
+        <p:nvSpPr>
+          <p:cNvPr id="6" name="TextBox 5"/>
+          <p:cNvSpPr txBox="1"/>
+          <p:nvPr/>
+        </p:nvSpPr>
+        <p:spPr>
+          <a:xfrm>
+            <a:off x="640080" y="1856232"/>
+            <a:ext cx="3840480" cy="274320"/>
+          </a:xfrm>
+          <a:prstGeom prst="rect">
+            <a:avLst/>
+          </a:prstGeom>
+          <a:noFill/>
+        </p:spPr>
+        <p:txBody>
+          <a:bodyPr wrap="square" anchor="t" lIns="25400" rIns="25400" tIns="25400" bIns="25400">
+            <a:spAutoFit/>
+          </a:bodyPr>
+          <a:lstStyle/>
+          <a:p>
+            <a:pPr algn="l">
+              <a:spcAft>
+                <a:spcPts val="400"/>
+              </a:spcAft>
+            </a:pPr>
+            <a:r>
+              <a:rPr sz="1100" b="1">
+                <a:solidFill>
+                  <a:srgbClr val="FFB454"/>
+                </a:solidFill>
+                <a:latin typeface="Segoe UI"/>
+              </a:rPr>
+              <a:t>AZURE  (build + publish)</a:t>
+            </a:r>
+          </a:p>
+        </p:txBody>
+      </p:sp>
+      <p:sp>
+        <p:nvSpPr>
+          <p:cNvPr id="7" name="Rounded Rectangle 6"/>
+          <p:cNvSpPr/>
+          <p:nvPr/>
+        </p:nvSpPr>
+        <p:spPr>
+          <a:xfrm>
+            <a:off x="4846320" y="1828800"/>
+            <a:ext cx="2468880" cy="2743200"/>
+          </a:xfrm>
+          <a:prstGeom prst="roundRect">
+            <a:avLst/>
+          </a:prstGeom>
+          <a:noFill/>
+          <a:ln w="15875">
+            <a:solidFill>
+              <a:srgbClr val="B9A3E3"/>
+            </a:solidFill>
+          </a:ln>
+          <a:effectLst/>
+        </p:spPr>
+        <p:style>
+          <a:lnRef idx="1">
+            <a:schemeClr val="accent1"/>
+          </a:lnRef>
+          <a:fillRef idx="3">
+            <a:schemeClr val="accent1"/>
+          </a:fillRef>
+          <a:effectRef idx="2">
+            <a:schemeClr val="accent1"/>
+          </a:effectRef>
+          <a:fontRef idx="minor">
+            <a:schemeClr val="lt1"/>
+          </a:fontRef>
+        </p:style>
+        <p:txBody>
+          <a:bodyPr rtlCol="0" anchor="ctr"/>
+          <a:lstStyle/>
+          <a:p>
+            <a:pPr algn="ctr"/>
+          </a:p>
+        </p:txBody>
+      </p:sp>
+      <p:sp>
+        <p:nvSpPr>
+          <p:cNvPr id="8" name="TextBox 7"/>
+          <p:cNvSpPr txBox="1"/>
+          <p:nvPr/>
+        </p:nvSpPr>
+        <p:spPr>
+          <a:xfrm>
+            <a:off x="4937760" y="1856232"/>
+            <a:ext cx="2286000" cy="274320"/>
+          </a:xfrm>
+          <a:prstGeom prst="rect">
+            <a:avLst/>
+          </a:prstGeom>
+          <a:noFill/>
+        </p:spPr>
+        <p:txBody>
+          <a:bodyPr wrap="square" anchor="t" lIns="25400" rIns="25400" tIns="25400" bIns="25400">
+            <a:spAutoFit/>
+          </a:bodyPr>
+          <a:lstStyle/>
+          <a:p>
+            <a:pPr algn="l">
+              <a:spcAft>
+                <a:spcPts val="400"/>
+              </a:spcAft>
+            </a:pPr>
+            <a:r>
+              <a:rPr sz="1100" b="1">
+                <a:solidFill>
+                  <a:srgbClr val="B9A3E3"/>
+                </a:solidFill>
+                <a:latin typeface="Segoe UI"/>
+              </a:rPr>
+              <a:t>CLOUD TOUCHPOINT</a:t>
+            </a:r>
+          </a:p>
+        </p:txBody>
+      </p:sp>
+      <p:sp>
+        <p:nvSpPr>
+          <p:cNvPr id="9" name="Rounded Rectangle 8"/>
+          <p:cNvSpPr/>
+          <p:nvPr/>
+        </p:nvSpPr>
+        <p:spPr>
+          <a:xfrm>
+            <a:off x="7571231" y="1828800"/>
+            <a:ext cx="4069080" cy="2743200"/>
+          </a:xfrm>
+          <a:prstGeom prst="roundRect">
+            <a:avLst/>
+          </a:prstGeom>
+          <a:noFill/>
+          <a:ln w="15875">
+            <a:solidFill>
+              <a:srgbClr val="38E0C4"/>
+            </a:solidFill>
+          </a:ln>
+          <a:effectLst/>
+        </p:spPr>
+        <p:style>
+          <a:lnRef idx="1">
+            <a:schemeClr val="accent1"/>
+          </a:lnRef>
+          <a:fillRef idx="3">
+            <a:schemeClr val="accent1"/>
+          </a:fillRef>
+          <a:effectRef idx="2">
+            <a:schemeClr val="accent1"/>
+          </a:effectRef>
+          <a:fontRef idx="minor">
+            <a:schemeClr val="lt1"/>
+          </a:fontRef>
+        </p:style>
+        <p:txBody>
+          <a:bodyPr rtlCol="0" anchor="ctr"/>
+          <a:lstStyle/>
+          <a:p>
+            <a:pPr algn="ctr"/>
+          </a:p>
+        </p:txBody>
+      </p:sp>
+      <p:sp>
+        <p:nvSpPr>
+          <p:cNvPr id="10" name="TextBox 9"/>
+          <p:cNvSpPr txBox="1"/>
+          <p:nvPr/>
+        </p:nvSpPr>
+        <p:spPr>
+          <a:xfrm>
+            <a:off x="7662672" y="1856232"/>
+            <a:ext cx="3840480" cy="274320"/>
+          </a:xfrm>
+          <a:prstGeom prst="rect">
+            <a:avLst/>
+          </a:prstGeom>
+          <a:noFill/>
+        </p:spPr>
+        <p:txBody>
+          <a:bodyPr wrap="square" anchor="t" lIns="25400" rIns="25400" tIns="25400" bIns="25400">
+            <a:spAutoFit/>
+          </a:bodyPr>
+          <a:lstStyle/>
+          <a:p>
+            <a:pPr algn="l">
+              <a:spcAft>
+                <a:spcPts val="400"/>
+              </a:spcAft>
+            </a:pPr>
+            <a:r>
+              <a:rPr sz="1100" b="1">
+                <a:solidFill>
+                  <a:srgbClr val="38E0C4"/>
+                </a:solidFill>
+                <a:latin typeface="Segoe UI"/>
+              </a:rPr>
+              <a:t>AZURE LOCAL  (run sovereign)</a:t>
+            </a:r>
+          </a:p>
+        </p:txBody>
+      </p:sp>
+      <p:sp>
+        <p:nvSpPr>
+          <p:cNvPr id="11" name="Rounded Rectangle 10"/>
+          <p:cNvSpPr/>
+          <p:nvPr/>
+        </p:nvSpPr>
+        <p:spPr>
+          <a:xfrm>
+            <a:off x="713232" y="2286000"/>
+            <a:ext cx="1783080" cy="1371600"/>
+          </a:xfrm>
+          <a:prstGeom prst="roundRect">
+            <a:avLst/>
+          </a:prstGeom>
+          <a:solidFill>
+            <a:srgbClr val="472A7E"/>
+          </a:solidFill>
+          <a:ln w="22225">
+            <a:solidFill>
+              <a:srgbClr val="FFB454"/>
+            </a:solidFill>
+          </a:ln>
+          <a:effectLst/>
+        </p:spPr>
+        <p:style>
+          <a:lnRef idx="1">
+            <a:schemeClr val="accent1"/>
+          </a:lnRef>
+          <a:fillRef idx="3">
+            <a:schemeClr val="accent1"/>
+          </a:fillRef>
+          <a:effectRef idx="2">
+            <a:schemeClr val="accent1"/>
+          </a:effectRef>
+          <a:fontRef idx="minor">
+            <a:schemeClr val="lt1"/>
+          </a:fontRef>
+        </p:style>
+        <p:txBody>
+          <a:bodyPr rtlCol="0" anchor="ctr"/>
+          <a:lstStyle/>
+          <a:p>
+            <a:pPr algn="ctr"/>
+          </a:p>
+        </p:txBody>
+      </p:sp>
+      <p:sp>
+        <p:nvSpPr>
+          <p:cNvPr id="12" name="Rectangle 11"/>
+          <p:cNvSpPr/>
+          <p:nvPr/>
+        </p:nvSpPr>
+        <p:spPr>
+          <a:xfrm>
+            <a:off x="713232" y="2286000"/>
+            <a:ext cx="1783080" cy="91440"/>
+          </a:xfrm>
+          <a:prstGeom prst="rect">
+            <a:avLst/>
+          </a:prstGeom>
+          <a:solidFill>
+            <a:srgbClr val="FFB454"/>
+          </a:solidFill>
+          <a:ln>
+            <a:noFill/>
+          </a:ln>
+          <a:effectLst/>
+        </p:spPr>
+        <p:style>
+          <a:lnRef idx="1">
+            <a:schemeClr val="accent1"/>
+          </a:lnRef>
+          <a:fillRef idx="3">
+            <a:schemeClr val="accent1"/>
+          </a:fillRef>
+          <a:effectRef idx="2">
+            <a:schemeClr val="accent1"/>
+          </a:effectRef>
+          <a:fontRef idx="minor">
+            <a:schemeClr val="lt1"/>
+          </a:fontRef>
+        </p:style>
+        <p:txBody>
+          <a:bodyPr rtlCol="0" anchor="ctr"/>
+          <a:lstStyle/>
+          <a:p>
+            <a:pPr algn="ctr"/>
+          </a:p>
+        </p:txBody>
+      </p:sp>
+      <p:sp>
+        <p:nvSpPr>
+          <p:cNvPr id="13" name="TextBox 12"/>
+          <p:cNvSpPr txBox="1"/>
+          <p:nvPr/>
+        </p:nvSpPr>
+        <p:spPr>
+          <a:xfrm>
+            <a:off x="822960" y="2468880"/>
+            <a:ext cx="1563624" cy="457200"/>
+          </a:xfrm>
+          <a:prstGeom prst="rect">
+            <a:avLst/>
+          </a:prstGeom>
+          <a:noFill/>
+        </p:spPr>
+        <p:txBody>
+          <a:bodyPr wrap="square" anchor="t" lIns="25400" rIns="25400" tIns="25400" bIns="25400">
+            <a:spAutoFit/>
+          </a:bodyPr>
+          <a:lstStyle/>
+          <a:p>
+            <a:pPr algn="ctr">
+              <a:spcAft>
+                <a:spcPts val="400"/>
+              </a:spcAft>
+            </a:pPr>
+            <a:r>
+              <a:rPr sz="1250" b="1">
+                <a:solidFill>
+                  <a:srgbClr val="FFFFFF"/>
+                </a:solidFill>
+                <a:latin typeface="Segoe UI"/>
+              </a:rPr>
+              <a:t>1  Develop in Azure</a:t>
+            </a:r>
+          </a:p>
+        </p:txBody>
+      </p:sp>
+      <p:sp>
+        <p:nvSpPr>
+          <p:cNvPr id="14" name="TextBox 13"/>
+          <p:cNvSpPr txBox="1"/>
+          <p:nvPr/>
+        </p:nvSpPr>
+        <p:spPr>
+          <a:xfrm>
+            <a:off x="804672" y="2999232"/>
+            <a:ext cx="1600200" cy="594360"/>
+          </a:xfrm>
+          <a:prstGeom prst="rect">
+            <a:avLst/>
+          </a:prstGeom>
+          <a:noFill/>
+        </p:spPr>
+        <p:txBody>
+          <a:bodyPr wrap="square" anchor="t" lIns="25400" rIns="25400" tIns="25400" bIns="25400">
+            <a:spAutoFit/>
+          </a:bodyPr>
+          <a:lstStyle/>
+          <a:p>
+            <a:pPr algn="ctr">
+              <a:lnSpc>
+                <a:spcPct val="100000"/>
+              </a:lnSpc>
+              <a:spcAft>
+                <a:spcPts val="100"/>
+              </a:spcAft>
+            </a:pPr>
+            <a:r>
+              <a:rPr sz="1000" b="0">
+                <a:solidFill>
+                  <a:srgbClr val="C8BDE6"/>
+                </a:solidFill>
+                <a:latin typeface="Segoe UI"/>
+              </a:rPr>
+              <a:t>Trained model running</a:t>
+            </a:r>
+          </a:p>
+          <a:p>
+            <a:pPr algn="ctr">
+              <a:lnSpc>
+                <a:spcPct val="100000"/>
+              </a:lnSpc>
+              <a:spcAft>
+                <a:spcPts val="100"/>
+              </a:spcAft>
+            </a:pPr>
+            <a:r>
+              <a:rPr sz="1000" b="0">
+                <a:solidFill>
+                  <a:srgbClr val="C8BDE6"/>
+                </a:solidFill>
+                <a:latin typeface="Segoe UI"/>
+              </a:rPr>
+              <a:t>in Azure today</a:t>
+            </a:r>
+          </a:p>
+        </p:txBody>
+      </p:sp>
+      <p:sp>
+        <p:nvSpPr>
+          <p:cNvPr id="15" name="Rounded Rectangle 14"/>
+          <p:cNvSpPr/>
+          <p:nvPr/>
+        </p:nvSpPr>
+        <p:spPr>
+          <a:xfrm>
+            <a:off x="2679192" y="2286000"/>
+            <a:ext cx="1783080" cy="1371600"/>
+          </a:xfrm>
+          <a:prstGeom prst="roundRect">
+            <a:avLst/>
+          </a:prstGeom>
+          <a:solidFill>
+            <a:srgbClr val="472A7E"/>
+          </a:solidFill>
+          <a:ln w="22225">
+            <a:solidFill>
+              <a:srgbClr val="FFB454"/>
+            </a:solidFill>
+          </a:ln>
+          <a:effectLst/>
+        </p:spPr>
+        <p:style>
+          <a:lnRef idx="1">
+            <a:schemeClr val="accent1"/>
+          </a:lnRef>
+          <a:fillRef idx="3">
+            <a:schemeClr val="accent1"/>
+          </a:fillRef>
+          <a:effectRef idx="2">
+            <a:schemeClr val="accent1"/>
+          </a:effectRef>
+          <a:fontRef idx="minor">
+            <a:schemeClr val="lt1"/>
+          </a:fontRef>
+        </p:style>
+        <p:txBody>
+          <a:bodyPr rtlCol="0" anchor="ctr"/>
+          <a:lstStyle/>
+          <a:p>
+            <a:pPr algn="ctr"/>
+          </a:p>
+        </p:txBody>
+      </p:sp>
+      <p:sp>
+        <p:nvSpPr>
+          <p:cNvPr id="16" name="Rectangle 15"/>
+          <p:cNvSpPr/>
+          <p:nvPr/>
+        </p:nvSpPr>
+        <p:spPr>
+          <a:xfrm>
+            <a:off x="2679192" y="2286000"/>
+            <a:ext cx="1783080" cy="91440"/>
+          </a:xfrm>
+          <a:prstGeom prst="rect">
+            <a:avLst/>
+          </a:prstGeom>
+          <a:solidFill>
+            <a:srgbClr val="FFB454"/>
+          </a:solidFill>
+          <a:ln>
+            <a:noFill/>
+          </a:ln>
+          <a:effectLst/>
+        </p:spPr>
+        <p:style>
+          <a:lnRef idx="1">
+            <a:schemeClr val="accent1"/>
+          </a:lnRef>
+          <a:fillRef idx="3">
+            <a:schemeClr val="accent1"/>
+          </a:fillRef>
+          <a:effectRef idx="2">
+            <a:schemeClr val="accent1"/>
+          </a:effectRef>
+          <a:fontRef idx="minor">
+            <a:schemeClr val="lt1"/>
+          </a:fontRef>
+        </p:style>
+        <p:txBody>
+          <a:bodyPr rtlCol="0" anchor="ctr"/>
+          <a:lstStyle/>
+          <a:p>
+            <a:pPr algn="ctr"/>
+          </a:p>
+        </p:txBody>
+      </p:sp>
+      <p:sp>
+        <p:nvSpPr>
+          <p:cNvPr id="17" name="TextBox 16"/>
+          <p:cNvSpPr txBox="1"/>
+          <p:nvPr/>
+        </p:nvSpPr>
+        <p:spPr>
+          <a:xfrm>
+            <a:off x="2788920" y="2468880"/>
+            <a:ext cx="1563624" cy="457200"/>
+          </a:xfrm>
+          <a:prstGeom prst="rect">
+            <a:avLst/>
+          </a:prstGeom>
+          <a:noFill/>
+        </p:spPr>
+        <p:txBody>
+          <a:bodyPr wrap="square" anchor="t" lIns="25400" rIns="25400" tIns="25400" bIns="25400">
+            <a:spAutoFit/>
+          </a:bodyPr>
+          <a:lstStyle/>
+          <a:p>
+            <a:pPr algn="ctr">
+              <a:spcAft>
+                <a:spcPts val="400"/>
+              </a:spcAft>
+            </a:pPr>
+            <a:r>
+              <a:rPr sz="1250" b="1">
+                <a:solidFill>
+                  <a:srgbClr val="FFFFFF"/>
+                </a:solidFill>
+                <a:latin typeface="Segoe UI"/>
+              </a:rPr>
+              <a:t>2  Export to ONNX</a:t>
+            </a:r>
+          </a:p>
+        </p:txBody>
+      </p:sp>
+      <p:sp>
+        <p:nvSpPr>
+          <p:cNvPr id="18" name="TextBox 17"/>
+          <p:cNvSpPr txBox="1"/>
+          <p:nvPr/>
+        </p:nvSpPr>
+        <p:spPr>
+          <a:xfrm>
+            <a:off x="2770632" y="2999232"/>
+            <a:ext cx="1600200" cy="594360"/>
+          </a:xfrm>
+          <a:prstGeom prst="rect">
+            <a:avLst/>
+          </a:prstGeom>
+          <a:noFill/>
+        </p:spPr>
+        <p:txBody>
+          <a:bodyPr wrap="square" anchor="t" lIns="25400" rIns="25400" tIns="25400" bIns="25400">
+            <a:spAutoFit/>
+          </a:bodyPr>
+          <a:lstStyle/>
+          <a:p>
+            <a:pPr algn="ctr">
+              <a:lnSpc>
+                <a:spcPct val="100000"/>
+              </a:lnSpc>
+              <a:spcAft>
+                <a:spcPts val="100"/>
+              </a:spcAft>
+            </a:pPr>
+            <a:r>
+              <a:rPr sz="1000" b="0">
+                <a:solidFill>
+                  <a:srgbClr val="C8BDE6"/>
+                </a:solidFill>
+                <a:latin typeface="Segoe UI"/>
+              </a:rPr>
+              <a:t>skl2onnx / torch.onnx</a:t>
+            </a:r>
+          </a:p>
+          <a:p>
+            <a:pPr algn="ctr">
+              <a:lnSpc>
+                <a:spcPct val="100000"/>
+              </a:lnSpc>
+              <a:spcAft>
+                <a:spcPts val="100"/>
+              </a:spcAft>
+            </a:pPr>
+            <a:r>
+              <a:rPr sz="1000" b="0">
+                <a:solidFill>
+                  <a:srgbClr val="C8BDE6"/>
+                </a:solidFill>
+                <a:latin typeface="Segoe UI"/>
+              </a:rPr>
+              <a:t>(customer-owned step)</a:t>
+            </a:r>
+          </a:p>
+        </p:txBody>
+      </p:sp>
+      <p:sp>
+        <p:nvSpPr>
+          <p:cNvPr id="19" name="Rounded Rectangle 18"/>
+          <p:cNvSpPr/>
+          <p:nvPr/>
+        </p:nvSpPr>
+        <p:spPr>
+          <a:xfrm>
+            <a:off x="4983480" y="2286000"/>
+            <a:ext cx="1783080" cy="1371600"/>
+          </a:xfrm>
+          <a:prstGeom prst="roundRect">
+            <a:avLst/>
+          </a:prstGeom>
+          <a:solidFill>
+            <a:srgbClr val="472A7E"/>
+          </a:solidFill>
+          <a:ln w="22225">
+            <a:solidFill>
+              <a:srgbClr val="B9A3E3"/>
+            </a:solidFill>
+          </a:ln>
+          <a:effectLst/>
+        </p:spPr>
+        <p:style>
+          <a:lnRef idx="1">
+            <a:schemeClr val="accent1"/>
+          </a:lnRef>
+          <a:fillRef idx="3">
+            <a:schemeClr val="accent1"/>
+          </a:fillRef>
+          <a:effectRef idx="2">
+            <a:schemeClr val="accent1"/>
+          </a:effectRef>
+          <a:fontRef idx="minor">
+            <a:schemeClr val="lt1"/>
+          </a:fontRef>
+        </p:style>
+        <p:txBody>
+          <a:bodyPr rtlCol="0" anchor="ctr"/>
+          <a:lstStyle/>
+          <a:p>
+            <a:pPr algn="ctr"/>
+          </a:p>
+        </p:txBody>
+      </p:sp>
+      <p:sp>
+        <p:nvSpPr>
+          <p:cNvPr id="20" name="Rectangle 19"/>
+          <p:cNvSpPr/>
+          <p:nvPr/>
+        </p:nvSpPr>
+        <p:spPr>
+          <a:xfrm>
+            <a:off x="4983480" y="2286000"/>
+            <a:ext cx="1783080" cy="91440"/>
+          </a:xfrm>
+          <a:prstGeom prst="rect">
+            <a:avLst/>
+          </a:prstGeom>
+          <a:solidFill>
+            <a:srgbClr val="B9A3E3"/>
+          </a:solidFill>
+          <a:ln>
+            <a:noFill/>
+          </a:ln>
+          <a:effectLst/>
+        </p:spPr>
+        <p:style>
+          <a:lnRef idx="1">
+            <a:schemeClr val="accent1"/>
+          </a:lnRef>
+          <a:fillRef idx="3">
+            <a:schemeClr val="accent1"/>
+          </a:fillRef>
+          <a:effectRef idx="2">
+            <a:schemeClr val="accent1"/>
+          </a:effectRef>
+          <a:fontRef idx="minor">
+            <a:schemeClr val="lt1"/>
+          </a:fontRef>
+        </p:style>
+        <p:txBody>
+          <a:bodyPr rtlCol="0" anchor="ctr"/>
+          <a:lstStyle/>
+          <a:p>
+            <a:pPr algn="ctr"/>
+          </a:p>
+        </p:txBody>
+      </p:sp>
+      <p:sp>
+        <p:nvSpPr>
+          <p:cNvPr id="21" name="TextBox 20"/>
+          <p:cNvSpPr txBox="1"/>
+          <p:nvPr/>
+        </p:nvSpPr>
+        <p:spPr>
+          <a:xfrm>
+            <a:off x="5093208" y="2468880"/>
+            <a:ext cx="1563624" cy="457200"/>
+          </a:xfrm>
+          <a:prstGeom prst="rect">
+            <a:avLst/>
+          </a:prstGeom>
+          <a:noFill/>
+        </p:spPr>
+        <p:txBody>
+          <a:bodyPr wrap="square" anchor="t" lIns="25400" rIns="25400" tIns="25400" bIns="25400">
+            <a:spAutoFit/>
+          </a:bodyPr>
+          <a:lstStyle/>
+          <a:p>
+            <a:pPr algn="ctr">
+              <a:spcAft>
+                <a:spcPts val="400"/>
+              </a:spcAft>
+            </a:pPr>
+            <a:r>
+              <a:rPr sz="1250" b="1">
+                <a:solidFill>
+                  <a:srgbClr val="FFFFFF"/>
+                </a:solidFill>
+                <a:latin typeface="Segoe UI"/>
+              </a:rPr>
+              <a:t>3  Package + push</a:t>
+            </a:r>
+          </a:p>
+        </p:txBody>
+      </p:sp>
+      <p:sp>
+        <p:nvSpPr>
+          <p:cNvPr id="22" name="TextBox 21"/>
+          <p:cNvSpPr txBox="1"/>
+          <p:nvPr/>
+        </p:nvSpPr>
+        <p:spPr>
+          <a:xfrm>
+            <a:off x="5074920" y="2999232"/>
+            <a:ext cx="1600200" cy="594360"/>
+          </a:xfrm>
+          <a:prstGeom prst="rect">
+            <a:avLst/>
+          </a:prstGeom>
+          <a:noFill/>
+        </p:spPr>
+        <p:txBody>
+          <a:bodyPr wrap="square" anchor="t" lIns="25400" rIns="25400" tIns="25400" bIns="25400">
+            <a:spAutoFit/>
+          </a:bodyPr>
+          <a:lstStyle/>
+          <a:p>
+            <a:pPr algn="ctr">
+              <a:lnSpc>
+                <a:spcPct val="100000"/>
+              </a:lnSpc>
+              <a:spcAft>
+                <a:spcPts val="100"/>
+              </a:spcAft>
+            </a:pPr>
+            <a:r>
+              <a:rPr sz="1000" b="0">
+                <a:solidFill>
+                  <a:srgbClr val="C8BDE6"/>
+                </a:solidFill>
+                <a:latin typeface="Segoe UI"/>
+              </a:rPr>
+              <a:t>ORAS  -&gt;  ACR</a:t>
+            </a:r>
+          </a:p>
+          <a:p>
+            <a:pPr algn="ctr">
+              <a:lnSpc>
+                <a:spcPct val="100000"/>
+              </a:lnSpc>
+              <a:spcAft>
+                <a:spcPts val="100"/>
+              </a:spcAft>
+            </a:pPr>
+            <a:r>
+              <a:rPr sz="1000" b="0">
+                <a:solidFill>
+                  <a:srgbClr val="C8BDE6"/>
+                </a:solidFill>
+                <a:latin typeface="Segoe UI"/>
+              </a:rPr>
+              <a:t>OCI model artifact</a:t>
+            </a:r>
+          </a:p>
+        </p:txBody>
+      </p:sp>
+      <p:sp>
+        <p:nvSpPr>
+          <p:cNvPr id="23" name="Rounded Rectangle 22"/>
+          <p:cNvSpPr/>
+          <p:nvPr/>
+        </p:nvSpPr>
+        <p:spPr>
+          <a:xfrm>
+            <a:off x="7735824" y="2286000"/>
+            <a:ext cx="1783080" cy="1371600"/>
+          </a:xfrm>
+          <a:prstGeom prst="roundRect">
+            <a:avLst/>
+          </a:prstGeom>
+          <a:solidFill>
+            <a:srgbClr val="472A7E"/>
+          </a:solidFill>
+          <a:ln w="22225">
+            <a:solidFill>
+              <a:srgbClr val="38E0C4"/>
+            </a:solidFill>
+          </a:ln>
+          <a:effectLst/>
+        </p:spPr>
+        <p:style>
+          <a:lnRef idx="1">
+            <a:schemeClr val="accent1"/>
+          </a:lnRef>
+          <a:fillRef idx="3">
+            <a:schemeClr val="accent1"/>
+          </a:fillRef>
+          <a:effectRef idx="2">
+            <a:schemeClr val="accent1"/>
+          </a:effectRef>
+          <a:fontRef idx="minor">
+            <a:schemeClr val="lt1"/>
+          </a:fontRef>
+        </p:style>
+        <p:txBody>
+          <a:bodyPr rtlCol="0" anchor="ctr"/>
+          <a:lstStyle/>
+          <a:p>
+            <a:pPr algn="ctr"/>
+          </a:p>
+        </p:txBody>
+      </p:sp>
+      <p:sp>
+        <p:nvSpPr>
+          <p:cNvPr id="24" name="Rectangle 23"/>
+          <p:cNvSpPr/>
+          <p:nvPr/>
+        </p:nvSpPr>
+        <p:spPr>
+          <a:xfrm>
+            <a:off x="7735824" y="2286000"/>
+            <a:ext cx="1783080" cy="91440"/>
+          </a:xfrm>
+          <a:prstGeom prst="rect">
+            <a:avLst/>
+          </a:prstGeom>
+          <a:solidFill>
+            <a:srgbClr val="38E0C4"/>
+          </a:solidFill>
+          <a:ln>
+            <a:noFill/>
+          </a:ln>
+          <a:effectLst/>
+        </p:spPr>
+        <p:style>
+          <a:lnRef idx="1">
+            <a:schemeClr val="accent1"/>
+          </a:lnRef>
+          <a:fillRef idx="3">
+            <a:schemeClr val="accent1"/>
+          </a:fillRef>
+          <a:effectRef idx="2">
+            <a:schemeClr val="accent1"/>
+          </a:effectRef>
+          <a:fontRef idx="minor">
+            <a:schemeClr val="lt1"/>
+          </a:fontRef>
+        </p:style>
+        <p:txBody>
+          <a:bodyPr rtlCol="0" anchor="ctr"/>
+          <a:lstStyle/>
+          <a:p>
+            <a:pPr algn="ctr"/>
+          </a:p>
+        </p:txBody>
+      </p:sp>
+      <p:sp>
+        <p:nvSpPr>
+          <p:cNvPr id="25" name="TextBox 24"/>
+          <p:cNvSpPr txBox="1"/>
+          <p:nvPr/>
+        </p:nvSpPr>
+        <p:spPr>
+          <a:xfrm>
+            <a:off x="7845552" y="2468880"/>
+            <a:ext cx="1563624" cy="457200"/>
+          </a:xfrm>
+          <a:prstGeom prst="rect">
+            <a:avLst/>
+          </a:prstGeom>
+          <a:noFill/>
+        </p:spPr>
+        <p:txBody>
+          <a:bodyPr wrap="square" anchor="t" lIns="25400" rIns="25400" tIns="25400" bIns="25400">
+            <a:spAutoFit/>
+          </a:bodyPr>
+          <a:lstStyle/>
+          <a:p>
+            <a:pPr algn="ctr">
+              <a:spcAft>
+                <a:spcPts val="400"/>
+              </a:spcAft>
+            </a:pPr>
+            <a:r>
+              <a:rPr sz="1250" b="1">
+                <a:solidFill>
+                  <a:srgbClr val="FFFFFF"/>
+                </a:solidFill>
+                <a:latin typeface="Segoe UI"/>
+              </a:rPr>
+              <a:t>4  Deploy</a:t>
+            </a:r>
+          </a:p>
+        </p:txBody>
+      </p:sp>
+      <p:sp>
+        <p:nvSpPr>
+          <p:cNvPr id="26" name="TextBox 25"/>
+          <p:cNvSpPr txBox="1"/>
+          <p:nvPr/>
+        </p:nvSpPr>
+        <p:spPr>
+          <a:xfrm>
+            <a:off x="7827264" y="2999232"/>
+            <a:ext cx="1600200" cy="594360"/>
+          </a:xfrm>
+          <a:prstGeom prst="rect">
+            <a:avLst/>
+          </a:prstGeom>
+          <a:noFill/>
+        </p:spPr>
+        <p:txBody>
+          <a:bodyPr wrap="square" anchor="t" lIns="25400" rIns="25400" tIns="25400" bIns="25400">
+            <a:spAutoFit/>
+          </a:bodyPr>
+          <a:lstStyle/>
+          <a:p>
+            <a:pPr algn="ctr">
+              <a:lnSpc>
+                <a:spcPct val="100000"/>
+              </a:lnSpc>
+              <a:spcAft>
+                <a:spcPts val="100"/>
+              </a:spcAft>
+            </a:pPr>
+            <a:r>
+              <a:rPr sz="1000" b="0">
+                <a:solidFill>
+                  <a:srgbClr val="C8BDE6"/>
+                </a:solidFill>
+                <a:latin typeface="Segoe UI"/>
+              </a:rPr>
+              <a:t>ModelDeployment on</a:t>
+            </a:r>
+          </a:p>
+          <a:p>
+            <a:pPr algn="ctr">
+              <a:lnSpc>
+                <a:spcPct val="100000"/>
+              </a:lnSpc>
+              <a:spcAft>
+                <a:spcPts val="100"/>
+              </a:spcAft>
+            </a:pPr>
+            <a:r>
+              <a:rPr sz="1000" b="0">
+                <a:solidFill>
+                  <a:srgbClr val="C8BDE6"/>
+                </a:solidFill>
+                <a:latin typeface="Segoe UI"/>
+              </a:rPr>
+              <a:t>Foundry Local (AKS Arc)</a:t>
+            </a:r>
+          </a:p>
+        </p:txBody>
+      </p:sp>
+      <p:sp>
+        <p:nvSpPr>
+          <p:cNvPr id="27" name="Rounded Rectangle 26"/>
+          <p:cNvSpPr/>
+          <p:nvPr/>
+        </p:nvSpPr>
+        <p:spPr>
+          <a:xfrm>
+            <a:off x="9710928" y="2286000"/>
+            <a:ext cx="1783080" cy="1371600"/>
+          </a:xfrm>
+          <a:prstGeom prst="roundRect">
+            <a:avLst/>
+          </a:prstGeom>
+          <a:solidFill>
+            <a:srgbClr val="472A7E"/>
+          </a:solidFill>
+          <a:ln w="22225">
+            <a:solidFill>
+              <a:srgbClr val="38E0C4"/>
+            </a:solidFill>
+          </a:ln>
+          <a:effectLst/>
+        </p:spPr>
+        <p:style>
+          <a:lnRef idx="1">
+            <a:schemeClr val="accent1"/>
+          </a:lnRef>
+          <a:fillRef idx="3">
+            <a:schemeClr val="accent1"/>
+          </a:fillRef>
+          <a:effectRef idx="2">
+            <a:schemeClr val="accent1"/>
+          </a:effectRef>
+          <a:fontRef idx="minor">
+            <a:schemeClr val="lt1"/>
+          </a:fontRef>
+        </p:style>
+        <p:txBody>
+          <a:bodyPr rtlCol="0" anchor="ctr"/>
+          <a:lstStyle/>
+          <a:p>
+            <a:pPr algn="ctr"/>
+          </a:p>
+        </p:txBody>
+      </p:sp>
+      <p:sp>
+        <p:nvSpPr>
+          <p:cNvPr id="28" name="Rectangle 27"/>
+          <p:cNvSpPr/>
+          <p:nvPr/>
+        </p:nvSpPr>
+        <p:spPr>
+          <a:xfrm>
+            <a:off x="9710928" y="2286000"/>
+            <a:ext cx="1783080" cy="91440"/>
+          </a:xfrm>
+          <a:prstGeom prst="rect">
+            <a:avLst/>
+          </a:prstGeom>
+          <a:solidFill>
+            <a:srgbClr val="38E0C4"/>
+          </a:solidFill>
+          <a:ln>
+            <a:noFill/>
+          </a:ln>
+          <a:effectLst/>
+        </p:spPr>
+        <p:style>
+          <a:lnRef idx="1">
+            <a:schemeClr val="accent1"/>
+          </a:lnRef>
+          <a:fillRef idx="3">
+            <a:schemeClr val="accent1"/>
+          </a:fillRef>
+          <a:effectRef idx="2">
+            <a:schemeClr val="accent1"/>
+          </a:effectRef>
+          <a:fontRef idx="minor">
+            <a:schemeClr val="lt1"/>
+          </a:fontRef>
+        </p:style>
+        <p:txBody>
+          <a:bodyPr rtlCol="0" anchor="ctr"/>
+          <a:lstStyle/>
+          <a:p>
+            <a:pPr algn="ctr"/>
+          </a:p>
+        </p:txBody>
+      </p:sp>
+      <p:sp>
+        <p:nvSpPr>
+          <p:cNvPr id="29" name="TextBox 28"/>
+          <p:cNvSpPr txBox="1"/>
+          <p:nvPr/>
+        </p:nvSpPr>
+        <p:spPr>
+          <a:xfrm>
+            <a:off x="9820656" y="2468880"/>
+            <a:ext cx="1563624" cy="457200"/>
+          </a:xfrm>
+          <a:prstGeom prst="rect">
+            <a:avLst/>
+          </a:prstGeom>
+          <a:noFill/>
+        </p:spPr>
+        <p:txBody>
+          <a:bodyPr wrap="square" anchor="t" lIns="25400" rIns="25400" tIns="25400" bIns="25400">
+            <a:spAutoFit/>
+          </a:bodyPr>
+          <a:lstStyle/>
+          <a:p>
+            <a:pPr algn="ctr">
+              <a:spcAft>
+                <a:spcPts val="400"/>
+              </a:spcAft>
+            </a:pPr>
+            <a:r>
+              <a:rPr sz="1250" b="1">
+                <a:solidFill>
+                  <a:srgbClr val="FFFFFF"/>
+                </a:solidFill>
+                <a:latin typeface="Segoe UI"/>
+              </a:rPr>
+              <a:t>5  Run at the edge</a:t>
+            </a:r>
+          </a:p>
+        </p:txBody>
+      </p:sp>
+      <p:sp>
+        <p:nvSpPr>
+          <p:cNvPr id="30" name="TextBox 29"/>
+          <p:cNvSpPr txBox="1"/>
+          <p:nvPr/>
+        </p:nvSpPr>
+        <p:spPr>
+          <a:xfrm>
+            <a:off x="9802368" y="2999232"/>
+            <a:ext cx="1600200" cy="594360"/>
+          </a:xfrm>
+          <a:prstGeom prst="rect">
+            <a:avLst/>
+          </a:prstGeom>
+          <a:noFill/>
+        </p:spPr>
+        <p:txBody>
+          <a:bodyPr wrap="square" anchor="t" lIns="25400" rIns="25400" tIns="25400" bIns="25400">
+            <a:spAutoFit/>
+          </a:bodyPr>
+          <a:lstStyle/>
+          <a:p>
+            <a:pPr algn="ctr">
+              <a:lnSpc>
+                <a:spcPct val="100000"/>
+              </a:lnSpc>
+              <a:spcAft>
+                <a:spcPts val="100"/>
+              </a:spcAft>
+            </a:pPr>
+            <a:r>
+              <a:rPr sz="1000" b="0">
+                <a:solidFill>
+                  <a:srgbClr val="C8BDE6"/>
+                </a:solidFill>
+                <a:latin typeface="Segoe UI"/>
+              </a:rPr>
+              <a:t>Predictive + Phi-4</a:t>
+            </a:r>
+          </a:p>
+          <a:p>
+            <a:pPr algn="ctr">
+              <a:lnSpc>
+                <a:spcPct val="100000"/>
+              </a:lnSpc>
+              <a:spcAft>
+                <a:spcPts val="100"/>
+              </a:spcAft>
+            </a:pPr>
+            <a:r>
+              <a:rPr sz="1000" b="0">
+                <a:solidFill>
+                  <a:srgbClr val="C8BDE6"/>
+                </a:solidFill>
+                <a:latin typeface="Segoe UI"/>
+              </a:rPr>
+              <a:t>identical results</a:t>
+            </a:r>
+          </a:p>
+        </p:txBody>
+      </p:sp>
+      <p:sp>
+        <p:nvSpPr>
+          <p:cNvPr id="31" name="Chevron 30"/>
+          <p:cNvSpPr/>
+          <p:nvPr/>
+        </p:nvSpPr>
+        <p:spPr>
+          <a:xfrm>
+            <a:off x="2359152" y="2807208"/>
+            <a:ext cx="457200" cy="329184"/>
+          </a:xfrm>
+          <a:prstGeom prst="chevron">
+            <a:avLst/>
+          </a:prstGeom>
+          <a:solidFill>
+            <a:srgbClr val="FFB454"/>
+          </a:solidFill>
+          <a:ln>
+            <a:noFill/>
+          </a:ln>
+          <a:effectLst/>
+        </p:spPr>
+        <p:style>
+          <a:lnRef idx="1">
+            <a:schemeClr val="accent1"/>
+          </a:lnRef>
+          <a:fillRef idx="3">
+            <a:schemeClr val="accent1"/>
+          </a:fillRef>
+          <a:effectRef idx="2">
+            <a:schemeClr val="accent1"/>
+          </a:effectRef>
+          <a:fontRef idx="minor">
+            <a:schemeClr val="lt1"/>
+          </a:fontRef>
+        </p:style>
+        <p:txBody>
+          <a:bodyPr rtlCol="0" anchor="ctr"/>
+          <a:lstStyle/>
+          <a:p>
+            <a:pPr algn="ctr"/>
+          </a:p>
+        </p:txBody>
+      </p:sp>
+      <p:sp>
+        <p:nvSpPr>
+          <p:cNvPr id="32" name="Chevron 31"/>
+          <p:cNvSpPr/>
+          <p:nvPr/>
+        </p:nvSpPr>
+        <p:spPr>
+          <a:xfrm>
+            <a:off x="4494276" y="2807208"/>
+            <a:ext cx="457200" cy="329184"/>
+          </a:xfrm>
+          <a:prstGeom prst="chevron">
+            <a:avLst/>
+          </a:prstGeom>
+          <a:solidFill>
+            <a:srgbClr val="B9A3E3"/>
+          </a:solidFill>
+          <a:ln>
+            <a:noFill/>
+          </a:ln>
+          <a:effectLst/>
+        </p:spPr>
+        <p:style>
+          <a:lnRef idx="1">
+            <a:schemeClr val="accent1"/>
+          </a:lnRef>
+          <a:fillRef idx="3">
+            <a:schemeClr val="accent1"/>
+          </a:fillRef>
+          <a:effectRef idx="2">
+            <a:schemeClr val="accent1"/>
+          </a:effectRef>
+          <a:fontRef idx="minor">
+            <a:schemeClr val="lt1"/>
+          </a:fontRef>
+        </p:style>
+        <p:txBody>
+          <a:bodyPr rtlCol="0" anchor="ctr"/>
+          <a:lstStyle/>
+          <a:p>
+            <a:pPr algn="ctr"/>
+          </a:p>
+        </p:txBody>
+      </p:sp>
+      <p:sp>
+        <p:nvSpPr>
+          <p:cNvPr id="33" name="Chevron 32"/>
+          <p:cNvSpPr/>
+          <p:nvPr/>
+        </p:nvSpPr>
+        <p:spPr>
+          <a:xfrm>
+            <a:off x="7022592" y="2807208"/>
+            <a:ext cx="457200" cy="329184"/>
+          </a:xfrm>
+          <a:prstGeom prst="chevron">
+            <a:avLst/>
+          </a:prstGeom>
+          <a:solidFill>
+            <a:srgbClr val="38E0C4"/>
+          </a:solidFill>
+          <a:ln>
+            <a:noFill/>
+          </a:ln>
+          <a:effectLst/>
+        </p:spPr>
+        <p:style>
+          <a:lnRef idx="1">
+            <a:schemeClr val="accent1"/>
+          </a:lnRef>
+          <a:fillRef idx="3">
+            <a:schemeClr val="accent1"/>
+          </a:fillRef>
+          <a:effectRef idx="2">
+            <a:schemeClr val="accent1"/>
+          </a:effectRef>
+          <a:fontRef idx="minor">
+            <a:schemeClr val="lt1"/>
+          </a:fontRef>
+        </p:style>
+        <p:txBody>
+          <a:bodyPr rtlCol="0" anchor="ctr"/>
+          <a:lstStyle/>
+          <a:p>
+            <a:pPr algn="ctr"/>
+          </a:p>
+        </p:txBody>
+      </p:sp>
+      <p:sp>
+        <p:nvSpPr>
+          <p:cNvPr id="34" name="Chevron 33"/>
+          <p:cNvSpPr/>
+          <p:nvPr/>
+        </p:nvSpPr>
+        <p:spPr>
+          <a:xfrm>
+            <a:off x="9386316" y="2807208"/>
+            <a:ext cx="457200" cy="329184"/>
+          </a:xfrm>
+          <a:prstGeom prst="chevron">
+            <a:avLst/>
+          </a:prstGeom>
+          <a:solidFill>
+            <a:srgbClr val="38E0C4"/>
+          </a:solidFill>
+          <a:ln>
+            <a:noFill/>
+          </a:ln>
+          <a:effectLst/>
+        </p:spPr>
+        <p:style>
+          <a:lnRef idx="1">
+            <a:schemeClr val="accent1"/>
+          </a:lnRef>
+          <a:fillRef idx="3">
+            <a:schemeClr val="accent1"/>
+          </a:fillRef>
+          <a:effectRef idx="2">
+            <a:schemeClr val="accent1"/>
+          </a:effectRef>
+          <a:fontRef idx="minor">
+            <a:schemeClr val="lt1"/>
+          </a:fontRef>
+        </p:style>
+        <p:txBody>
+          <a:bodyPr rtlCol="0" anchor="ctr"/>
+          <a:lstStyle/>
+          <a:p>
+            <a:pPr algn="ctr"/>
+          </a:p>
+        </p:txBody>
+      </p:sp>
+      <p:sp>
+        <p:nvSpPr>
+          <p:cNvPr id="35" name="Rounded Rectangle 34"/>
+          <p:cNvSpPr/>
+          <p:nvPr/>
+        </p:nvSpPr>
+        <p:spPr>
+          <a:xfrm>
+            <a:off x="548640" y="5074920"/>
+            <a:ext cx="11091672" cy="960120"/>
+          </a:xfrm>
+          <a:prstGeom prst="roundRect">
+            <a:avLst/>
+          </a:prstGeom>
+          <a:solidFill>
+            <a:srgbClr val="3A2266"/>
+          </a:solidFill>
+          <a:ln w="15875">
+            <a:solidFill>
+              <a:srgbClr val="7B4FC7"/>
+            </a:solidFill>
+          </a:ln>
+          <a:effectLst/>
+        </p:spPr>
+        <p:style>
+          <a:lnRef idx="1">
+            <a:schemeClr val="accent1"/>
+          </a:lnRef>
+          <a:fillRef idx="3">
+            <a:schemeClr val="accent1"/>
+          </a:fillRef>
+          <a:effectRef idx="2">
+            <a:schemeClr val="accent1"/>
+          </a:effectRef>
+          <a:fontRef idx="minor">
+            <a:schemeClr val="lt1"/>
+          </a:fontRef>
+        </p:style>
+        <p:txBody>
+          <a:bodyPr rtlCol="0" anchor="ctr"/>
+          <a:lstStyle/>
+          <a:p>
+            <a:pPr algn="ctr"/>
+          </a:p>
+        </p:txBody>
+      </p:sp>
+      <p:sp>
+        <p:nvSpPr>
+          <p:cNvPr id="36" name="TextBox 35"/>
+          <p:cNvSpPr txBox="1"/>
+          <p:nvPr/>
+        </p:nvSpPr>
+        <p:spPr>
+          <a:xfrm>
+            <a:off x="777240" y="5175504"/>
+            <a:ext cx="10607040" cy="777240"/>
+          </a:xfrm>
+          <a:prstGeom prst="rect">
+            <a:avLst/>
+          </a:prstGeom>
+          <a:noFill/>
+        </p:spPr>
+        <p:txBody>
+          <a:bodyPr wrap="square" anchor="ctr" lIns="25400" rIns="25400" tIns="25400" bIns="25400">
+            <a:spAutoFit/>
+          </a:bodyPr>
+          <a:lstStyle/>
+          <a:p>
+            <a:pPr algn="l">
+              <a:lnSpc>
+                <a:spcPct val="105000"/>
+              </a:lnSpc>
+              <a:spcAft>
+                <a:spcPts val="400"/>
+              </a:spcAft>
+            </a:pPr>
+            <a:r>
+              <a:rPr sz="1350" b="1">
+                <a:solidFill>
+                  <a:srgbClr val="38E0C4"/>
+                </a:solidFill>
+                <a:latin typeface="Segoe UI"/>
+              </a:rPr>
+              <a:t>Microsoft's value starts at ONNX.  </a:t>
+            </a:r>
+            <a:r>
+              <a:rPr sz="1350" b="0">
+                <a:solidFill>
+                  <a:srgbClr val="FFFFFF"/>
+                </a:solidFill>
+                <a:latin typeface="Segoe UI"/>
+              </a:rPr>
+              <a:t>Converting to ONNX is the customer's job; the platform is the paved road from a validated ONNX model to a managed, sovereign edge deployment. ACR is the only cloud touch — once cached, the running state is fully on Azure Local.</a:t>
+            </a:r>
+          </a:p>
+        </p:txBody>
+      </p:sp>
+      <p:sp>
+        <p:nvSpPr>
+          <p:cNvPr id="37" name="TextBox 36"/>
+          <p:cNvSpPr txBox="1"/>
+          <p:nvPr/>
+        </p:nvSpPr>
+        <p:spPr>
+          <a:xfrm>
+            <a:off x="548640" y="6510528"/>
+            <a:ext cx="11064240" cy="274320"/>
+          </a:xfrm>
+          <a:prstGeom prst="rect">
+            <a:avLst/>
+          </a:prstGeom>
+          <a:noFill/>
+        </p:spPr>
+        <p:txBody>
+          <a:bodyPr wrap="square" anchor="t" lIns="25400" rIns="25400" tIns="25400" bIns="25400">
+            <a:spAutoFit/>
+          </a:bodyPr>
+          <a:lstStyle/>
+          <a:p>
+            <a:pPr algn="l">
+              <a:spcAft>
+                <a:spcPts val="400"/>
+              </a:spcAft>
+            </a:pPr>
+            <a:r>
+              <a:rPr sz="1050" b="0">
+                <a:solidFill>
+                  <a:srgbClr val="C8BDE6"/>
+                </a:solidFill>
+                <a:latin typeface="Segoe UI"/>
+              </a:rPr>
+              <a:t>Acts 1-2 use the predictive ONNX model; Act 3 adds the catalog Phi-4 generative model — both served by Foundry Local.</a:t>
+            </a:r>
+          </a:p>
+        </p:txBody>
+      </p:sp>
+    </p:spTree>
+  </p:cSld>
+  <p:clrMapOvr>
+    <a:masterClrMapping/>
+  </p:clrMapOvr>
+</p:sld>
+</file>
+
+<file path=ppt/slides/slide3.xml><?xml version="1.0" encoding="utf-8"?>
+<p:sld xmlns:a="http://schemas.openxmlformats.org/drawingml/2006/main" xmlns:p="http://schemas.openxmlformats.org/presentationml/2006/main" xmlns:r="http://schemas.openxmlformats.org/officeDocument/2006/relationships">
+  <p:cSld>
+    <p:bg>
+      <p:bgPr>
+        <a:solidFill>
+          <a:srgbClr val="2A124E"/>
+        </a:solidFill>
+        <a:effectLst/>
+      </p:bgPr>
+    </p:bg>
+    <p:spTree>
+      <p:nvGrpSpPr>
+        <p:cNvPr id="1" name=""/>
+        <p:cNvGrpSpPr/>
+        <p:nvPr/>
+      </p:nvGrpSpPr>
+      <p:grpSpPr/>
+      <p:sp>
+        <p:nvSpPr>
+          <p:cNvPr id="2" name="Rectangle 1"/>
+          <p:cNvSpPr/>
+          <p:nvPr/>
+        </p:nvSpPr>
+        <p:spPr>
+          <a:xfrm>
+            <a:off x="0" y="0"/>
+            <a:ext cx="12191695" cy="109728"/>
+          </a:xfrm>
+          <a:prstGeom prst="rect">
+            <a:avLst/>
+          </a:prstGeom>
+          <a:gradFill rotWithShape="1">
+            <a:gsLst>
+              <a:gs pos="0">
+                <a:srgbClr val="5B2D91"/>
+              </a:gs>
+              <a:gs pos="100000">
+                <a:srgbClr val="38E0C4"/>
+              </a:gs>
+            </a:gsLst>
+            <a:lin scaled="0" ang="0"/>
+          </a:gradFill>
+          <a:ln>
+            <a:noFill/>
+          </a:ln>
+          <a:effectLst/>
+        </p:spPr>
+        <p:style>
+          <a:lnRef idx="1">
+            <a:schemeClr val="accent1"/>
+          </a:lnRef>
+          <a:fillRef idx="3">
+            <a:schemeClr val="accent1"/>
+          </a:fillRef>
+          <a:effectRef idx="2">
+            <a:schemeClr val="accent1"/>
+          </a:effectRef>
+          <a:fontRef idx="minor">
+            <a:schemeClr val="lt1"/>
+          </a:fontRef>
+        </p:style>
+        <p:txBody>
+          <a:bodyPr rtlCol="0" anchor="ctr"/>
+          <a:lstStyle/>
+          <a:p>
+            <a:pPr algn="ctr"/>
+          </a:p>
+        </p:txBody>
+      </p:sp>
+      <p:sp>
+        <p:nvSpPr>
+          <p:cNvPr id="3" name="TextBox 2"/>
+          <p:cNvSpPr txBox="1"/>
+          <p:nvPr/>
+        </p:nvSpPr>
+        <p:spPr>
+          <a:xfrm>
+            <a:off x="548640" y="292608"/>
+            <a:ext cx="10972800" cy="320040"/>
+          </a:xfrm>
+          <a:prstGeom prst="rect">
+            <a:avLst/>
+          </a:prstGeom>
+          <a:noFill/>
+        </p:spPr>
+        <p:txBody>
+          <a:bodyPr wrap="square" anchor="t" lIns="25400" rIns="25400" tIns="25400" bIns="25400">
+            <a:spAutoFit/>
+          </a:bodyPr>
+          <a:lstStyle/>
+          <a:p>
+            <a:pPr algn="l">
+              <a:spcAft>
+                <a:spcPts val="400"/>
+              </a:spcAft>
+            </a:pPr>
+            <a:r>
+              <a:rPr sz="1200" b="1">
+                <a:solidFill>
+                  <a:srgbClr val="38E0C4"/>
+                </a:solidFill>
+                <a:latin typeface="Segoe UI"/>
+              </a:rPr>
+              <a:t>THE DEMO IN THREE ACTS</a:t>
+            </a:r>
+          </a:p>
+        </p:txBody>
+      </p:sp>
+      <p:sp>
+        <p:nvSpPr>
+          <p:cNvPr id="4" name="TextBox 3"/>
+          <p:cNvSpPr txBox="1"/>
+          <p:nvPr/>
+        </p:nvSpPr>
+        <p:spPr>
+          <a:xfrm>
+            <a:off x="548640" y="603504"/>
+            <a:ext cx="11064240" cy="731520"/>
           </a:xfrm>
           <a:prstGeom prst="rect">
             <a:avLst/>
@@ -5185,7 +6852,7 @@
                 </a:solidFill>
                 <a:latin typeface="Segoe UI"/>
               </a:rPr>
-              <a:t>ONNX rate-forecast model behind FastAPI</a:t>
+              <a:t>ONNX rate model behind FastAPI</a:t>
             </a:r>
           </a:p>
         </p:txBody>
@@ -5701,7 +7368,7 @@
                 </a:solidFill>
                 <a:latin typeface="Segoe UI"/>
               </a:rPr>
-              <a:t>Same .onnx packaged with ORAS → ACR</a:t>
+              <a:t>Same .onnx packaged via ORAS -&gt; ACR</a:t>
             </a:r>
           </a:p>
         </p:txBody>
@@ -5867,7 +7534,7 @@
                 </a:solidFill>
                 <a:latin typeface="Segoe UI"/>
               </a:rPr>
-              <a:t>UI redeployed in-cluster — fully sovereign</a:t>
+              <a:t>UI redeployed in-cluster — sovereign</a:t>
             </a:r>
           </a:p>
         </p:txBody>
@@ -6300,7 +7967,7 @@
                 </a:solidFill>
                 <a:latin typeface="Segoe UI"/>
               </a:rPr>
-              <a:t>'Ask the AI analyst' panel → /api/chat</a:t>
+              <a:t>'Ask the AI analyst' panel -&gt; /api/chat</a:t>
             </a:r>
           </a:p>
         </p:txBody>
@@ -6631,7 +8298,7 @@
                 </a:solidFill>
                 <a:latin typeface="Segoe UI"/>
               </a:rPr>
-              <a:t>Cloud &amp; edge forecasts are byte-identical (1Y 4.42→4.90 at +50 bps).</a:t>
+              <a:t>Cloud &amp; edge forecasts match byte-for-byte (1Y 4.42-&gt;4.90 at +50 bps).</a:t>
             </a:r>
           </a:p>
         </p:txBody>
@@ -6755,7 +8422,7 @@
                 </a:solidFill>
                 <a:latin typeface="Segoe UI"/>
               </a:rPr>
-              <a:t>kubectl get pods -n foundry-local-operator  →  real edge model pods.</a:t>
+              <a:t>kubectl get pods -n foundry-local-operator  -&gt;  real edge model pods.</a:t>
             </a:r>
           </a:p>
         </p:txBody>
@@ -6919,6 +8586,3170 @@
                 <a:latin typeface="Segoe UI"/>
               </a:rPr>
               <a:t>BYO predictive ONNX model + curated catalog Phi-4  •  cluster fl-banking-portland  •  RG sovereign-ai-daz</a:t>
+            </a:r>
+          </a:p>
+        </p:txBody>
+      </p:sp>
+    </p:spTree>
+  </p:cSld>
+  <p:clrMapOvr>
+    <a:masterClrMapping/>
+  </p:clrMapOvr>
+</p:sld>
+</file>
+
+<file path=ppt/slides/slide4.xml><?xml version="1.0" encoding="utf-8"?>
+<p:sld xmlns:a="http://schemas.openxmlformats.org/drawingml/2006/main" xmlns:p="http://schemas.openxmlformats.org/presentationml/2006/main" xmlns:r="http://schemas.openxmlformats.org/officeDocument/2006/relationships">
+  <p:cSld>
+    <p:bg>
+      <p:bgPr>
+        <a:solidFill>
+          <a:srgbClr val="2A124E"/>
+        </a:solidFill>
+        <a:effectLst/>
+      </p:bgPr>
+    </p:bg>
+    <p:spTree>
+      <p:nvGrpSpPr>
+        <p:cNvPr id="1" name=""/>
+        <p:cNvGrpSpPr/>
+        <p:nvPr/>
+      </p:nvGrpSpPr>
+      <p:grpSpPr/>
+      <p:sp>
+        <p:nvSpPr>
+          <p:cNvPr id="2" name="Rectangle 1"/>
+          <p:cNvSpPr/>
+          <p:nvPr/>
+        </p:nvSpPr>
+        <p:spPr>
+          <a:xfrm>
+            <a:off x="0" y="0"/>
+            <a:ext cx="12191695" cy="109728"/>
+          </a:xfrm>
+          <a:prstGeom prst="rect">
+            <a:avLst/>
+          </a:prstGeom>
+          <a:gradFill rotWithShape="1">
+            <a:gsLst>
+              <a:gs pos="0">
+                <a:srgbClr val="5B2D91"/>
+              </a:gs>
+              <a:gs pos="100000">
+                <a:srgbClr val="38E0C4"/>
+              </a:gs>
+            </a:gsLst>
+            <a:lin scaled="0" ang="0"/>
+          </a:gradFill>
+          <a:ln>
+            <a:noFill/>
+          </a:ln>
+          <a:effectLst/>
+        </p:spPr>
+        <p:style>
+          <a:lnRef idx="1">
+            <a:schemeClr val="accent1"/>
+          </a:lnRef>
+          <a:fillRef idx="3">
+            <a:schemeClr val="accent1"/>
+          </a:fillRef>
+          <a:effectRef idx="2">
+            <a:schemeClr val="accent1"/>
+          </a:effectRef>
+          <a:fontRef idx="minor">
+            <a:schemeClr val="lt1"/>
+          </a:fontRef>
+        </p:style>
+        <p:txBody>
+          <a:bodyPr rtlCol="0" anchor="ctr"/>
+          <a:lstStyle/>
+          <a:p>
+            <a:pPr algn="ctr"/>
+          </a:p>
+        </p:txBody>
+      </p:sp>
+      <p:sp>
+        <p:nvSpPr>
+          <p:cNvPr id="3" name="TextBox 2"/>
+          <p:cNvSpPr txBox="1"/>
+          <p:nvPr/>
+        </p:nvSpPr>
+        <p:spPr>
+          <a:xfrm>
+            <a:off x="548640" y="292608"/>
+            <a:ext cx="10972800" cy="320040"/>
+          </a:xfrm>
+          <a:prstGeom prst="rect">
+            <a:avLst/>
+          </a:prstGeom>
+          <a:noFill/>
+        </p:spPr>
+        <p:txBody>
+          <a:bodyPr wrap="square" anchor="t" lIns="25400" rIns="25400" tIns="25400" bIns="25400">
+            <a:spAutoFit/>
+          </a:bodyPr>
+          <a:lstStyle/>
+          <a:p>
+            <a:pPr algn="l">
+              <a:spcAft>
+                <a:spcPts val="400"/>
+              </a:spcAft>
+            </a:pPr>
+            <a:r>
+              <a:rPr sz="1200" b="1">
+                <a:solidFill>
+                  <a:srgbClr val="38E0C4"/>
+                </a:solidFill>
+                <a:latin typeface="Segoe UI"/>
+              </a:rPr>
+              <a:t>FOUNDRY LOCAL  •  BRING-YOUR-OWN MODEL</a:t>
+            </a:r>
+          </a:p>
+        </p:txBody>
+      </p:sp>
+      <p:sp>
+        <p:nvSpPr>
+          <p:cNvPr id="4" name="TextBox 3"/>
+          <p:cNvSpPr txBox="1"/>
+          <p:nvPr/>
+        </p:nvSpPr>
+        <p:spPr>
+          <a:xfrm>
+            <a:off x="548640" y="603504"/>
+            <a:ext cx="11064240" cy="731520"/>
+          </a:xfrm>
+          <a:prstGeom prst="rect">
+            <a:avLst/>
+          </a:prstGeom>
+          <a:noFill/>
+        </p:spPr>
+        <p:txBody>
+          <a:bodyPr wrap="square" anchor="t" lIns="25400" rIns="25400" tIns="25400" bIns="25400">
+            <a:spAutoFit/>
+          </a:bodyPr>
+          <a:lstStyle/>
+          <a:p>
+            <a:pPr algn="l">
+              <a:spcAft>
+                <a:spcPts val="400"/>
+              </a:spcAft>
+            </a:pPr>
+            <a:r>
+              <a:rPr sz="2600" b="1">
+                <a:solidFill>
+                  <a:srgbClr val="FFFFFF"/>
+                </a:solidFill>
+                <a:latin typeface="Segoe UI"/>
+              </a:rPr>
+              <a:t>The config that runs our model at the edge</a:t>
+            </a:r>
+          </a:p>
+        </p:txBody>
+      </p:sp>
+      <p:sp>
+        <p:nvSpPr>
+          <p:cNvPr id="5" name="TextBox 4"/>
+          <p:cNvSpPr txBox="1"/>
+          <p:nvPr/>
+        </p:nvSpPr>
+        <p:spPr>
+          <a:xfrm>
+            <a:off x="548640" y="1207008"/>
+            <a:ext cx="11064240" cy="320040"/>
+          </a:xfrm>
+          <a:prstGeom prst="rect">
+            <a:avLst/>
+          </a:prstGeom>
+          <a:noFill/>
+        </p:spPr>
+        <p:txBody>
+          <a:bodyPr wrap="square" anchor="t" lIns="25400" rIns="25400" tIns="25400" bIns="25400">
+            <a:spAutoFit/>
+          </a:bodyPr>
+          <a:lstStyle/>
+          <a:p>
+            <a:pPr algn="l">
+              <a:spcAft>
+                <a:spcPts val="400"/>
+              </a:spcAft>
+            </a:pPr>
+            <a:r>
+              <a:rPr sz="1200" b="1">
+                <a:solidFill>
+                  <a:srgbClr val="B9A3E3"/>
+                </a:solidFill>
+                <a:latin typeface="Segoe UI"/>
+              </a:rPr>
+              <a:t>Inline custom-model pattern (Microsoft Learn).  </a:t>
+            </a:r>
+            <a:r>
+              <a:rPr sz="1200" b="0">
+                <a:solidFill>
+                  <a:srgbClr val="8CE09A"/>
+                </a:solidFill>
+                <a:latin typeface="Segoe UI"/>
+              </a:rPr>
+              <a:t>kubectl apply -f modeldeployment-rate-forecast.yaml</a:t>
+            </a:r>
+          </a:p>
+        </p:txBody>
+      </p:sp>
+      <p:sp>
+        <p:nvSpPr>
+          <p:cNvPr id="6" name="Rounded Rectangle 5"/>
+          <p:cNvSpPr/>
+          <p:nvPr/>
+        </p:nvSpPr>
+        <p:spPr>
+          <a:xfrm>
+            <a:off x="548640" y="1600200"/>
+            <a:ext cx="6720840" cy="4160520"/>
+          </a:xfrm>
+          <a:prstGeom prst="roundRect">
+            <a:avLst/>
+          </a:prstGeom>
+          <a:solidFill>
+            <a:srgbClr val="1B0E33"/>
+          </a:solidFill>
+          <a:ln w="15875">
+            <a:solidFill>
+              <a:srgbClr val="7B4FC7"/>
+            </a:solidFill>
+          </a:ln>
+          <a:effectLst/>
+        </p:spPr>
+        <p:style>
+          <a:lnRef idx="1">
+            <a:schemeClr val="accent1"/>
+          </a:lnRef>
+          <a:fillRef idx="3">
+            <a:schemeClr val="accent1"/>
+          </a:fillRef>
+          <a:effectRef idx="2">
+            <a:schemeClr val="accent1"/>
+          </a:effectRef>
+          <a:fontRef idx="minor">
+            <a:schemeClr val="lt1"/>
+          </a:fontRef>
+        </p:style>
+        <p:txBody>
+          <a:bodyPr rtlCol="0" anchor="ctr"/>
+          <a:lstStyle/>
+          <a:p>
+            <a:pPr algn="ctr"/>
+          </a:p>
+        </p:txBody>
+      </p:sp>
+      <p:sp>
+        <p:nvSpPr>
+          <p:cNvPr id="7" name="Rounded Rectangle 6"/>
+          <p:cNvSpPr/>
+          <p:nvPr/>
+        </p:nvSpPr>
+        <p:spPr>
+          <a:xfrm>
+            <a:off x="731520" y="1737360"/>
+            <a:ext cx="6355080" cy="3886200"/>
+          </a:xfrm>
+          <a:prstGeom prst="roundRect">
+            <a:avLst/>
+          </a:prstGeom>
+          <a:noFill/>
+          <a:ln>
+            <a:noFill/>
+          </a:ln>
+          <a:effectLst/>
+        </p:spPr>
+        <p:style>
+          <a:lnRef idx="1">
+            <a:schemeClr val="accent1"/>
+          </a:lnRef>
+          <a:fillRef idx="3">
+            <a:schemeClr val="accent1"/>
+          </a:fillRef>
+          <a:effectRef idx="2">
+            <a:schemeClr val="accent1"/>
+          </a:effectRef>
+          <a:fontRef idx="minor">
+            <a:schemeClr val="lt1"/>
+          </a:fontRef>
+        </p:style>
+        <p:txBody>
+          <a:bodyPr rtlCol="0" anchor="ctr" wrap="none"/>
+          <a:lstStyle/>
+          <a:p>
+            <a:pPr algn="l">
+              <a:lnSpc>
+                <a:spcPct val="100000"/>
+              </a:lnSpc>
+              <a:spcAft>
+                <a:spcPts val="200"/>
+              </a:spcAft>
+            </a:pPr>
+            <a:r>
+              <a:rPr sz="1250">
+                <a:solidFill>
+                  <a:srgbClr val="7B4FC7"/>
+                </a:solidFill>
+                <a:latin typeface="Consolas"/>
+              </a:rPr>
+              <a:t>apiVersion:</a:t>
+            </a:r>
+            <a:r>
+              <a:rPr sz="1250">
+                <a:solidFill>
+                  <a:srgbClr val="B9A3E3"/>
+                </a:solidFill>
+                <a:latin typeface="Consolas"/>
+              </a:rPr>
+              <a:t> foundrylocal.azure.com/v1</a:t>
+            </a:r>
+          </a:p>
+          <a:p>
+            <a:pPr algn="l">
+              <a:lnSpc>
+                <a:spcPct val="100000"/>
+              </a:lnSpc>
+              <a:spcAft>
+                <a:spcPts val="200"/>
+              </a:spcAft>
+            </a:pPr>
+            <a:r>
+              <a:rPr sz="1250">
+                <a:solidFill>
+                  <a:srgbClr val="7B4FC7"/>
+                </a:solidFill>
+                <a:latin typeface="Consolas"/>
+              </a:rPr>
+              <a:t>kind:</a:t>
+            </a:r>
+            <a:r>
+              <a:rPr sz="1250">
+                <a:solidFill>
+                  <a:srgbClr val="B9A3E3"/>
+                </a:solidFill>
+                <a:latin typeface="Consolas"/>
+              </a:rPr>
+              <a:t> ModelDeployment</a:t>
+            </a:r>
+          </a:p>
+          <a:p>
+            <a:pPr algn="l">
+              <a:lnSpc>
+                <a:spcPct val="100000"/>
+              </a:lnSpc>
+              <a:spcAft>
+                <a:spcPts val="200"/>
+              </a:spcAft>
+            </a:pPr>
+            <a:r>
+              <a:rPr sz="1250">
+                <a:solidFill>
+                  <a:srgbClr val="7B4FC7"/>
+                </a:solidFill>
+                <a:latin typeface="Consolas"/>
+              </a:rPr>
+              <a:t>metadata:</a:t>
+            </a:r>
+          </a:p>
+          <a:p>
+            <a:pPr algn="l">
+              <a:lnSpc>
+                <a:spcPct val="100000"/>
+              </a:lnSpc>
+              <a:spcAft>
+                <a:spcPts val="200"/>
+              </a:spcAft>
+            </a:pPr>
+            <a:r>
+              <a:rPr sz="1250">
+                <a:solidFill>
+                  <a:srgbClr val="7B4FC7"/>
+                </a:solidFill>
+                <a:latin typeface="Consolas"/>
+              </a:rPr>
+              <a:t>  name:</a:t>
+            </a:r>
+            <a:r>
+              <a:rPr sz="1250">
+                <a:solidFill>
+                  <a:srgbClr val="FFFFFF"/>
+                </a:solidFill>
+                <a:latin typeface="Consolas"/>
+              </a:rPr>
+              <a:t> rate-forecast-byo-cpu</a:t>
+            </a:r>
+          </a:p>
+          <a:p>
+            <a:pPr algn="l">
+              <a:lnSpc>
+                <a:spcPct val="100000"/>
+              </a:lnSpc>
+              <a:spcAft>
+                <a:spcPts val="200"/>
+              </a:spcAft>
+            </a:pPr>
+            <a:r>
+              <a:rPr sz="1250">
+                <a:solidFill>
+                  <a:srgbClr val="7B4FC7"/>
+                </a:solidFill>
+                <a:latin typeface="Consolas"/>
+              </a:rPr>
+              <a:t>  namespace:</a:t>
+            </a:r>
+            <a:r>
+              <a:rPr sz="1250">
+                <a:solidFill>
+                  <a:srgbClr val="FFFFFF"/>
+                </a:solidFill>
+                <a:latin typeface="Consolas"/>
+              </a:rPr>
+              <a:t> foundry-local-operator</a:t>
+            </a:r>
+          </a:p>
+          <a:p>
+            <a:pPr algn="l">
+              <a:lnSpc>
+                <a:spcPct val="100000"/>
+              </a:lnSpc>
+              <a:spcAft>
+                <a:spcPts val="200"/>
+              </a:spcAft>
+            </a:pPr>
+            <a:r>
+              <a:rPr sz="1250">
+                <a:solidFill>
+                  <a:srgbClr val="7B4FC7"/>
+                </a:solidFill>
+                <a:latin typeface="Consolas"/>
+              </a:rPr>
+              <a:t>spec:</a:t>
+            </a:r>
+          </a:p>
+          <a:p>
+            <a:pPr algn="l">
+              <a:lnSpc>
+                <a:spcPct val="100000"/>
+              </a:lnSpc>
+              <a:spcAft>
+                <a:spcPts val="200"/>
+              </a:spcAft>
+            </a:pPr>
+            <a:r>
+              <a:rPr sz="1250">
+                <a:solidFill>
+                  <a:srgbClr val="7B4FC7"/>
+                </a:solidFill>
+                <a:latin typeface="Consolas"/>
+              </a:rPr>
+              <a:t>  workloadType:</a:t>
+            </a:r>
+            <a:r>
+              <a:rPr sz="1250">
+                <a:solidFill>
+                  <a:srgbClr val="38E0C4"/>
+                </a:solidFill>
+                <a:latin typeface="Consolas"/>
+              </a:rPr>
+              <a:t> predictive</a:t>
+            </a:r>
+          </a:p>
+          <a:p>
+            <a:pPr algn="l">
+              <a:lnSpc>
+                <a:spcPct val="100000"/>
+              </a:lnSpc>
+              <a:spcAft>
+                <a:spcPts val="200"/>
+              </a:spcAft>
+            </a:pPr>
+            <a:r>
+              <a:rPr sz="1250">
+                <a:solidFill>
+                  <a:srgbClr val="7B4FC7"/>
+                </a:solidFill>
+                <a:latin typeface="Consolas"/>
+              </a:rPr>
+              <a:t>  compute:</a:t>
+            </a:r>
+            <a:r>
+              <a:rPr sz="1250">
+                <a:solidFill>
+                  <a:srgbClr val="38E0C4"/>
+                </a:solidFill>
+                <a:latin typeface="Consolas"/>
+              </a:rPr>
+              <a:t> cpu</a:t>
+            </a:r>
+          </a:p>
+          <a:p>
+            <a:pPr algn="l">
+              <a:lnSpc>
+                <a:spcPct val="100000"/>
+              </a:lnSpc>
+              <a:spcAft>
+                <a:spcPts val="200"/>
+              </a:spcAft>
+            </a:pPr>
+            <a:r>
+              <a:rPr sz="1250">
+                <a:solidFill>
+                  <a:srgbClr val="7B4FC7"/>
+                </a:solidFill>
+                <a:latin typeface="Consolas"/>
+              </a:rPr>
+              <a:t>  runtime:</a:t>
+            </a:r>
+            <a:r>
+              <a:rPr sz="1250">
+                <a:solidFill>
+                  <a:srgbClr val="38E0C4"/>
+                </a:solidFill>
+                <a:latin typeface="Consolas"/>
+              </a:rPr>
+              <a:t> onnx-genai</a:t>
+            </a:r>
+          </a:p>
+          <a:p>
+            <a:pPr algn="l">
+              <a:lnSpc>
+                <a:spcPct val="100000"/>
+              </a:lnSpc>
+              <a:spcAft>
+                <a:spcPts val="200"/>
+              </a:spcAft>
+            </a:pPr>
+            <a:r>
+              <a:rPr sz="1250">
+                <a:solidFill>
+                  <a:srgbClr val="7B4FC7"/>
+                </a:solidFill>
+                <a:latin typeface="Consolas"/>
+              </a:rPr>
+              <a:t>  model:</a:t>
+            </a:r>
+          </a:p>
+          <a:p>
+            <a:pPr algn="l">
+              <a:lnSpc>
+                <a:spcPct val="100000"/>
+              </a:lnSpc>
+              <a:spcAft>
+                <a:spcPts val="200"/>
+              </a:spcAft>
+            </a:pPr>
+            <a:r>
+              <a:rPr sz="1250">
+                <a:solidFill>
+                  <a:srgbClr val="7B4FC7"/>
+                </a:solidFill>
+                <a:latin typeface="Consolas"/>
+              </a:rPr>
+              <a:t>    custom:</a:t>
+            </a:r>
+          </a:p>
+          <a:p>
+            <a:pPr algn="l">
+              <a:lnSpc>
+                <a:spcPct val="100000"/>
+              </a:lnSpc>
+              <a:spcAft>
+                <a:spcPts val="200"/>
+              </a:spcAft>
+            </a:pPr>
+            <a:r>
+              <a:rPr sz="1250">
+                <a:solidFill>
+                  <a:srgbClr val="7B4FC7"/>
+                </a:solidFill>
+                <a:latin typeface="Consolas"/>
+              </a:rPr>
+              <a:t>      registry:</a:t>
+            </a:r>
+            <a:r>
+              <a:rPr sz="1250">
+                <a:solidFill>
+                  <a:srgbClr val="FFFFFF"/>
+                </a:solidFill>
+                <a:latin typeface="Consolas"/>
+              </a:rPr>
+              <a:t> flbankingacr.azurecr.io</a:t>
+            </a:r>
+          </a:p>
+          <a:p>
+            <a:pPr algn="l">
+              <a:lnSpc>
+                <a:spcPct val="100000"/>
+              </a:lnSpc>
+              <a:spcAft>
+                <a:spcPts val="200"/>
+              </a:spcAft>
+            </a:pPr>
+            <a:r>
+              <a:rPr sz="1250">
+                <a:solidFill>
+                  <a:srgbClr val="7B4FC7"/>
+                </a:solidFill>
+                <a:latin typeface="Consolas"/>
+              </a:rPr>
+              <a:t>      repository:</a:t>
+            </a:r>
+            <a:r>
+              <a:rPr sz="1250">
+                <a:solidFill>
+                  <a:srgbClr val="FFFFFF"/>
+                </a:solidFill>
+                <a:latin typeface="Consolas"/>
+              </a:rPr>
+              <a:t> models/rate-forecast</a:t>
+            </a:r>
+          </a:p>
+          <a:p>
+            <a:pPr algn="l">
+              <a:lnSpc>
+                <a:spcPct val="100000"/>
+              </a:lnSpc>
+              <a:spcAft>
+                <a:spcPts val="200"/>
+              </a:spcAft>
+            </a:pPr>
+            <a:r>
+              <a:rPr sz="1250">
+                <a:solidFill>
+                  <a:srgbClr val="7B4FC7"/>
+                </a:solidFill>
+                <a:latin typeface="Consolas"/>
+              </a:rPr>
+              <a:t>      tag:</a:t>
+            </a:r>
+            <a:r>
+              <a:rPr sz="1250">
+                <a:solidFill>
+                  <a:srgbClr val="FFB454"/>
+                </a:solidFill>
+                <a:latin typeface="Consolas"/>
+              </a:rPr>
+              <a:t> v2</a:t>
+            </a:r>
+          </a:p>
+          <a:p>
+            <a:pPr algn="l">
+              <a:lnSpc>
+                <a:spcPct val="100000"/>
+              </a:lnSpc>
+              <a:spcAft>
+                <a:spcPts val="200"/>
+              </a:spcAft>
+            </a:pPr>
+            <a:r>
+              <a:rPr sz="1250">
+                <a:solidFill>
+                  <a:srgbClr val="7B4FC7"/>
+                </a:solidFill>
+                <a:latin typeface="Consolas"/>
+              </a:rPr>
+              <a:t>      credentials:</a:t>
+            </a:r>
+          </a:p>
+          <a:p>
+            <a:pPr algn="l">
+              <a:lnSpc>
+                <a:spcPct val="100000"/>
+              </a:lnSpc>
+              <a:spcAft>
+                <a:spcPts val="200"/>
+              </a:spcAft>
+            </a:pPr>
+            <a:r>
+              <a:rPr sz="1250">
+                <a:solidFill>
+                  <a:srgbClr val="7B4FC7"/>
+                </a:solidFill>
+                <a:latin typeface="Consolas"/>
+              </a:rPr>
+              <a:t>        secretRef:</a:t>
+            </a:r>
+            <a:r>
+              <a:rPr sz="1250">
+                <a:solidFill>
+                  <a:srgbClr val="FFFFFF"/>
+                </a:solidFill>
+                <a:latin typeface="Consolas"/>
+              </a:rPr>
+              <a:t>  name: registry-credentials</a:t>
+            </a:r>
+          </a:p>
+          <a:p>
+            <a:pPr algn="l">
+              <a:lnSpc>
+                <a:spcPct val="100000"/>
+              </a:lnSpc>
+              <a:spcAft>
+                <a:spcPts val="200"/>
+              </a:spcAft>
+            </a:pPr>
+            <a:r>
+              <a:rPr sz="1250">
+                <a:solidFill>
+                  <a:srgbClr val="7B4FC7"/>
+                </a:solidFill>
+                <a:latin typeface="Consolas"/>
+              </a:rPr>
+              <a:t>  resources:</a:t>
+            </a:r>
+            <a:r>
+              <a:rPr sz="1250">
+                <a:solidFill>
+                  <a:srgbClr val="C8BDE6"/>
+                </a:solidFill>
+                <a:latin typeface="Consolas"/>
+              </a:rPr>
+              <a:t>  requests {cpu:1, 2Gi}  limits {cpu:2, 4Gi}</a:t>
+            </a:r>
+          </a:p>
+          <a:p>
+            <a:pPr algn="l">
+              <a:lnSpc>
+                <a:spcPct val="100000"/>
+              </a:lnSpc>
+              <a:spcAft>
+                <a:spcPts val="200"/>
+              </a:spcAft>
+            </a:pPr>
+            <a:r>
+              <a:rPr sz="1250">
+                <a:solidFill>
+                  <a:srgbClr val="7B4FC7"/>
+                </a:solidFill>
+                <a:latin typeface="Consolas"/>
+              </a:rPr>
+              <a:t>  endpoint:</a:t>
+            </a:r>
+            <a:r>
+              <a:rPr sz="1250">
+                <a:solidFill>
+                  <a:srgbClr val="FFFFFF"/>
+                </a:solidFill>
+                <a:latin typeface="Consolas"/>
+              </a:rPr>
+              <a:t>  enabled: </a:t>
+            </a:r>
+            <a:r>
+              <a:rPr sz="1250">
+                <a:solidFill>
+                  <a:srgbClr val="FFB454"/>
+                </a:solidFill>
+                <a:latin typeface="Consolas"/>
+              </a:rPr>
+              <a:t>false</a:t>
+            </a:r>
+            <a:r>
+              <a:rPr sz="1250">
+                <a:solidFill>
+                  <a:srgbClr val="C8BDE6"/>
+                </a:solidFill>
+                <a:latin typeface="Consolas"/>
+              </a:rPr>
+              <a:t>   # in-cluster only</a:t>
+            </a:r>
+          </a:p>
+        </p:txBody>
+      </p:sp>
+      <p:sp>
+        <p:nvSpPr>
+          <p:cNvPr id="8" name="Rounded Rectangle 7"/>
+          <p:cNvSpPr/>
+          <p:nvPr/>
+        </p:nvSpPr>
+        <p:spPr>
+          <a:xfrm>
+            <a:off x="7498079" y="1627632"/>
+            <a:ext cx="4114800" cy="914400"/>
+          </a:xfrm>
+          <a:prstGeom prst="roundRect">
+            <a:avLst/>
+          </a:prstGeom>
+          <a:solidFill>
+            <a:srgbClr val="3A2266"/>
+          </a:solidFill>
+          <a:ln w="15875">
+            <a:solidFill>
+              <a:srgbClr val="38E0C4"/>
+            </a:solidFill>
+          </a:ln>
+          <a:effectLst/>
+        </p:spPr>
+        <p:style>
+          <a:lnRef idx="1">
+            <a:schemeClr val="accent1"/>
+          </a:lnRef>
+          <a:fillRef idx="3">
+            <a:schemeClr val="accent1"/>
+          </a:fillRef>
+          <a:effectRef idx="2">
+            <a:schemeClr val="accent1"/>
+          </a:effectRef>
+          <a:fontRef idx="minor">
+            <a:schemeClr val="lt1"/>
+          </a:fontRef>
+        </p:style>
+        <p:txBody>
+          <a:bodyPr rtlCol="0" anchor="ctr"/>
+          <a:lstStyle/>
+          <a:p>
+            <a:pPr algn="ctr"/>
+          </a:p>
+        </p:txBody>
+      </p:sp>
+      <p:sp>
+        <p:nvSpPr>
+          <p:cNvPr id="9" name="Rectangle 8"/>
+          <p:cNvSpPr/>
+          <p:nvPr/>
+        </p:nvSpPr>
+        <p:spPr>
+          <a:xfrm>
+            <a:off x="7498079" y="1627632"/>
+            <a:ext cx="91440" cy="914400"/>
+          </a:xfrm>
+          <a:prstGeom prst="rect">
+            <a:avLst/>
+          </a:prstGeom>
+          <a:solidFill>
+            <a:srgbClr val="38E0C4"/>
+          </a:solidFill>
+          <a:ln>
+            <a:noFill/>
+          </a:ln>
+          <a:effectLst/>
+        </p:spPr>
+        <p:style>
+          <a:lnRef idx="1">
+            <a:schemeClr val="accent1"/>
+          </a:lnRef>
+          <a:fillRef idx="3">
+            <a:schemeClr val="accent1"/>
+          </a:fillRef>
+          <a:effectRef idx="2">
+            <a:schemeClr val="accent1"/>
+          </a:effectRef>
+          <a:fontRef idx="minor">
+            <a:schemeClr val="lt1"/>
+          </a:fontRef>
+        </p:style>
+        <p:txBody>
+          <a:bodyPr rtlCol="0" anchor="ctr"/>
+          <a:lstStyle/>
+          <a:p>
+            <a:pPr algn="ctr"/>
+          </a:p>
+        </p:txBody>
+      </p:sp>
+      <p:sp>
+        <p:nvSpPr>
+          <p:cNvPr id="10" name="TextBox 9"/>
+          <p:cNvSpPr txBox="1"/>
+          <p:nvPr/>
+        </p:nvSpPr>
+        <p:spPr>
+          <a:xfrm>
+            <a:off x="7726679" y="1719072"/>
+            <a:ext cx="3749040" cy="320040"/>
+          </a:xfrm>
+          <a:prstGeom prst="rect">
+            <a:avLst/>
+          </a:prstGeom>
+          <a:noFill/>
+        </p:spPr>
+        <p:txBody>
+          <a:bodyPr wrap="square" anchor="t" lIns="25400" rIns="25400" tIns="25400" bIns="25400">
+            <a:spAutoFit/>
+          </a:bodyPr>
+          <a:lstStyle/>
+          <a:p>
+            <a:pPr algn="l">
+              <a:spcAft>
+                <a:spcPts val="400"/>
+              </a:spcAft>
+            </a:pPr>
+            <a:r>
+              <a:rPr sz="1200" b="1">
+                <a:solidFill>
+                  <a:srgbClr val="38E0C4"/>
+                </a:solidFill>
+                <a:latin typeface="Segoe UI"/>
+              </a:rPr>
+              <a:t>workloadType / compute / runtime</a:t>
+            </a:r>
+          </a:p>
+        </p:txBody>
+      </p:sp>
+      <p:sp>
+        <p:nvSpPr>
+          <p:cNvPr id="11" name="TextBox 10"/>
+          <p:cNvSpPr txBox="1"/>
+          <p:nvPr/>
+        </p:nvSpPr>
+        <p:spPr>
+          <a:xfrm>
+            <a:off x="7726679" y="2011680"/>
+            <a:ext cx="3730752" cy="502920"/>
+          </a:xfrm>
+          <a:prstGeom prst="rect">
+            <a:avLst/>
+          </a:prstGeom>
+          <a:noFill/>
+        </p:spPr>
+        <p:txBody>
+          <a:bodyPr wrap="square" anchor="t" lIns="25400" rIns="25400" tIns="25400" bIns="25400">
+            <a:spAutoFit/>
+          </a:bodyPr>
+          <a:lstStyle/>
+          <a:p>
+            <a:pPr algn="l">
+              <a:lnSpc>
+                <a:spcPct val="102000"/>
+              </a:lnSpc>
+              <a:spcAft>
+                <a:spcPts val="400"/>
+              </a:spcAft>
+            </a:pPr>
+            <a:r>
+              <a:rPr sz="1050" b="0">
+                <a:solidFill>
+                  <a:srgbClr val="FFFFFF"/>
+                </a:solidFill>
+                <a:latin typeface="Segoe UI"/>
+              </a:rPr>
+              <a:t>predictive + cpu selects the ONNX predictive serving image. (generative + onnx-genai for Phi-4.)</a:t>
+            </a:r>
+          </a:p>
+        </p:txBody>
+      </p:sp>
+      <p:sp>
+        <p:nvSpPr>
+          <p:cNvPr id="12" name="Rounded Rectangle 11"/>
+          <p:cNvSpPr/>
+          <p:nvPr/>
+        </p:nvSpPr>
+        <p:spPr>
+          <a:xfrm>
+            <a:off x="7498079" y="2633472"/>
+            <a:ext cx="4114800" cy="914400"/>
+          </a:xfrm>
+          <a:prstGeom prst="roundRect">
+            <a:avLst/>
+          </a:prstGeom>
+          <a:solidFill>
+            <a:srgbClr val="3A2266"/>
+          </a:solidFill>
+          <a:ln w="15875">
+            <a:solidFill>
+              <a:srgbClr val="B9A3E3"/>
+            </a:solidFill>
+          </a:ln>
+          <a:effectLst/>
+        </p:spPr>
+        <p:style>
+          <a:lnRef idx="1">
+            <a:schemeClr val="accent1"/>
+          </a:lnRef>
+          <a:fillRef idx="3">
+            <a:schemeClr val="accent1"/>
+          </a:fillRef>
+          <a:effectRef idx="2">
+            <a:schemeClr val="accent1"/>
+          </a:effectRef>
+          <a:fontRef idx="minor">
+            <a:schemeClr val="lt1"/>
+          </a:fontRef>
+        </p:style>
+        <p:txBody>
+          <a:bodyPr rtlCol="0" anchor="ctr"/>
+          <a:lstStyle/>
+          <a:p>
+            <a:pPr algn="ctr"/>
+          </a:p>
+        </p:txBody>
+      </p:sp>
+      <p:sp>
+        <p:nvSpPr>
+          <p:cNvPr id="13" name="Rectangle 12"/>
+          <p:cNvSpPr/>
+          <p:nvPr/>
+        </p:nvSpPr>
+        <p:spPr>
+          <a:xfrm>
+            <a:off x="7498079" y="2633472"/>
+            <a:ext cx="91440" cy="914400"/>
+          </a:xfrm>
+          <a:prstGeom prst="rect">
+            <a:avLst/>
+          </a:prstGeom>
+          <a:solidFill>
+            <a:srgbClr val="B9A3E3"/>
+          </a:solidFill>
+          <a:ln>
+            <a:noFill/>
+          </a:ln>
+          <a:effectLst/>
+        </p:spPr>
+        <p:style>
+          <a:lnRef idx="1">
+            <a:schemeClr val="accent1"/>
+          </a:lnRef>
+          <a:fillRef idx="3">
+            <a:schemeClr val="accent1"/>
+          </a:fillRef>
+          <a:effectRef idx="2">
+            <a:schemeClr val="accent1"/>
+          </a:effectRef>
+          <a:fontRef idx="minor">
+            <a:schemeClr val="lt1"/>
+          </a:fontRef>
+        </p:style>
+        <p:txBody>
+          <a:bodyPr rtlCol="0" anchor="ctr"/>
+          <a:lstStyle/>
+          <a:p>
+            <a:pPr algn="ctr"/>
+          </a:p>
+        </p:txBody>
+      </p:sp>
+      <p:sp>
+        <p:nvSpPr>
+          <p:cNvPr id="14" name="TextBox 13"/>
+          <p:cNvSpPr txBox="1"/>
+          <p:nvPr/>
+        </p:nvSpPr>
+        <p:spPr>
+          <a:xfrm>
+            <a:off x="7726679" y="2724912"/>
+            <a:ext cx="3749040" cy="320040"/>
+          </a:xfrm>
+          <a:prstGeom prst="rect">
+            <a:avLst/>
+          </a:prstGeom>
+          <a:noFill/>
+        </p:spPr>
+        <p:txBody>
+          <a:bodyPr wrap="square" anchor="t" lIns="25400" rIns="25400" tIns="25400" bIns="25400">
+            <a:spAutoFit/>
+          </a:bodyPr>
+          <a:lstStyle/>
+          <a:p>
+            <a:pPr algn="l">
+              <a:spcAft>
+                <a:spcPts val="400"/>
+              </a:spcAft>
+            </a:pPr>
+            <a:r>
+              <a:rPr sz="1200" b="1">
+                <a:solidFill>
+                  <a:srgbClr val="B9A3E3"/>
+                </a:solidFill>
+                <a:latin typeface="Segoe UI"/>
+              </a:rPr>
+              <a:t>model.custom -&gt; ACR</a:t>
+            </a:r>
+          </a:p>
+        </p:txBody>
+      </p:sp>
+      <p:sp>
+        <p:nvSpPr>
+          <p:cNvPr id="15" name="TextBox 14"/>
+          <p:cNvSpPr txBox="1"/>
+          <p:nvPr/>
+        </p:nvSpPr>
+        <p:spPr>
+          <a:xfrm>
+            <a:off x="7726679" y="3017520"/>
+            <a:ext cx="3730752" cy="502920"/>
+          </a:xfrm>
+          <a:prstGeom prst="rect">
+            <a:avLst/>
+          </a:prstGeom>
+          <a:noFill/>
+        </p:spPr>
+        <p:txBody>
+          <a:bodyPr wrap="square" anchor="t" lIns="25400" rIns="25400" tIns="25400" bIns="25400">
+            <a:spAutoFit/>
+          </a:bodyPr>
+          <a:lstStyle/>
+          <a:p>
+            <a:pPr algn="l">
+              <a:lnSpc>
+                <a:spcPct val="102000"/>
+              </a:lnSpc>
+              <a:spcAft>
+                <a:spcPts val="400"/>
+              </a:spcAft>
+            </a:pPr>
+            <a:r>
+              <a:rPr sz="1050" b="0">
+                <a:solidFill>
+                  <a:srgbClr val="FFFFFF"/>
+                </a:solidFill>
+                <a:latin typeface="Segoe UI"/>
+              </a:rPr>
+              <a:t>Pulls the OCI model artifact you pushed with ORAS: registry / repository / tag.</a:t>
+            </a:r>
+          </a:p>
+        </p:txBody>
+      </p:sp>
+      <p:sp>
+        <p:nvSpPr>
+          <p:cNvPr id="16" name="Rounded Rectangle 15"/>
+          <p:cNvSpPr/>
+          <p:nvPr/>
+        </p:nvSpPr>
+        <p:spPr>
+          <a:xfrm>
+            <a:off x="7498079" y="3639312"/>
+            <a:ext cx="4114800" cy="914400"/>
+          </a:xfrm>
+          <a:prstGeom prst="roundRect">
+            <a:avLst/>
+          </a:prstGeom>
+          <a:solidFill>
+            <a:srgbClr val="3A2266"/>
+          </a:solidFill>
+          <a:ln w="15875">
+            <a:solidFill>
+              <a:srgbClr val="B9A3E3"/>
+            </a:solidFill>
+          </a:ln>
+          <a:effectLst/>
+        </p:spPr>
+        <p:style>
+          <a:lnRef idx="1">
+            <a:schemeClr val="accent1"/>
+          </a:lnRef>
+          <a:fillRef idx="3">
+            <a:schemeClr val="accent1"/>
+          </a:fillRef>
+          <a:effectRef idx="2">
+            <a:schemeClr val="accent1"/>
+          </a:effectRef>
+          <a:fontRef idx="minor">
+            <a:schemeClr val="lt1"/>
+          </a:fontRef>
+        </p:style>
+        <p:txBody>
+          <a:bodyPr rtlCol="0" anchor="ctr"/>
+          <a:lstStyle/>
+          <a:p>
+            <a:pPr algn="ctr"/>
+          </a:p>
+        </p:txBody>
+      </p:sp>
+      <p:sp>
+        <p:nvSpPr>
+          <p:cNvPr id="17" name="Rectangle 16"/>
+          <p:cNvSpPr/>
+          <p:nvPr/>
+        </p:nvSpPr>
+        <p:spPr>
+          <a:xfrm>
+            <a:off x="7498079" y="3639312"/>
+            <a:ext cx="91440" cy="914400"/>
+          </a:xfrm>
+          <a:prstGeom prst="rect">
+            <a:avLst/>
+          </a:prstGeom>
+          <a:solidFill>
+            <a:srgbClr val="B9A3E3"/>
+          </a:solidFill>
+          <a:ln>
+            <a:noFill/>
+          </a:ln>
+          <a:effectLst/>
+        </p:spPr>
+        <p:style>
+          <a:lnRef idx="1">
+            <a:schemeClr val="accent1"/>
+          </a:lnRef>
+          <a:fillRef idx="3">
+            <a:schemeClr val="accent1"/>
+          </a:fillRef>
+          <a:effectRef idx="2">
+            <a:schemeClr val="accent1"/>
+          </a:effectRef>
+          <a:fontRef idx="minor">
+            <a:schemeClr val="lt1"/>
+          </a:fontRef>
+        </p:style>
+        <p:txBody>
+          <a:bodyPr rtlCol="0" anchor="ctr"/>
+          <a:lstStyle/>
+          <a:p>
+            <a:pPr algn="ctr"/>
+          </a:p>
+        </p:txBody>
+      </p:sp>
+      <p:sp>
+        <p:nvSpPr>
+          <p:cNvPr id="18" name="TextBox 17"/>
+          <p:cNvSpPr txBox="1"/>
+          <p:nvPr/>
+        </p:nvSpPr>
+        <p:spPr>
+          <a:xfrm>
+            <a:off x="7726679" y="3730752"/>
+            <a:ext cx="3749040" cy="320040"/>
+          </a:xfrm>
+          <a:prstGeom prst="rect">
+            <a:avLst/>
+          </a:prstGeom>
+          <a:noFill/>
+        </p:spPr>
+        <p:txBody>
+          <a:bodyPr wrap="square" anchor="t" lIns="25400" rIns="25400" tIns="25400" bIns="25400">
+            <a:spAutoFit/>
+          </a:bodyPr>
+          <a:lstStyle/>
+          <a:p>
+            <a:pPr algn="l">
+              <a:spcAft>
+                <a:spcPts val="400"/>
+              </a:spcAft>
+            </a:pPr>
+            <a:r>
+              <a:rPr sz="1200" b="1">
+                <a:solidFill>
+                  <a:srgbClr val="B9A3E3"/>
+                </a:solidFill>
+                <a:latin typeface="Segoe UI"/>
+              </a:rPr>
+              <a:t>credentials.secretRef</a:t>
+            </a:r>
+          </a:p>
+        </p:txBody>
+      </p:sp>
+      <p:sp>
+        <p:nvSpPr>
+          <p:cNvPr id="19" name="TextBox 18"/>
+          <p:cNvSpPr txBox="1"/>
+          <p:nvPr/>
+        </p:nvSpPr>
+        <p:spPr>
+          <a:xfrm>
+            <a:off x="7726679" y="4023360"/>
+            <a:ext cx="3730752" cy="502920"/>
+          </a:xfrm>
+          <a:prstGeom prst="rect">
+            <a:avLst/>
+          </a:prstGeom>
+          <a:noFill/>
+        </p:spPr>
+        <p:txBody>
+          <a:bodyPr wrap="square" anchor="t" lIns="25400" rIns="25400" tIns="25400" bIns="25400">
+            <a:spAutoFit/>
+          </a:bodyPr>
+          <a:lstStyle/>
+          <a:p>
+            <a:pPr algn="l">
+              <a:lnSpc>
+                <a:spcPct val="102000"/>
+              </a:lnSpc>
+              <a:spcAft>
+                <a:spcPts val="400"/>
+              </a:spcAft>
+            </a:pPr>
+            <a:r>
+              <a:rPr sz="1050" b="0">
+                <a:solidFill>
+                  <a:srgbClr val="FFFFFF"/>
+                </a:solidFill>
+                <a:latin typeface="Segoe UI"/>
+              </a:rPr>
+              <a:t>K8s secret 'registry-credentials' (username/password) for the private ACR pull.</a:t>
+            </a:r>
+          </a:p>
+        </p:txBody>
+      </p:sp>
+      <p:sp>
+        <p:nvSpPr>
+          <p:cNvPr id="20" name="Rounded Rectangle 19"/>
+          <p:cNvSpPr/>
+          <p:nvPr/>
+        </p:nvSpPr>
+        <p:spPr>
+          <a:xfrm>
+            <a:off x="7498079" y="4645152"/>
+            <a:ext cx="4114800" cy="914400"/>
+          </a:xfrm>
+          <a:prstGeom prst="roundRect">
+            <a:avLst/>
+          </a:prstGeom>
+          <a:solidFill>
+            <a:srgbClr val="3A2266"/>
+          </a:solidFill>
+          <a:ln w="15875">
+            <a:solidFill>
+              <a:srgbClr val="FFB454"/>
+            </a:solidFill>
+          </a:ln>
+          <a:effectLst/>
+        </p:spPr>
+        <p:style>
+          <a:lnRef idx="1">
+            <a:schemeClr val="accent1"/>
+          </a:lnRef>
+          <a:fillRef idx="3">
+            <a:schemeClr val="accent1"/>
+          </a:fillRef>
+          <a:effectRef idx="2">
+            <a:schemeClr val="accent1"/>
+          </a:effectRef>
+          <a:fontRef idx="minor">
+            <a:schemeClr val="lt1"/>
+          </a:fontRef>
+        </p:style>
+        <p:txBody>
+          <a:bodyPr rtlCol="0" anchor="ctr"/>
+          <a:lstStyle/>
+          <a:p>
+            <a:pPr algn="ctr"/>
+          </a:p>
+        </p:txBody>
+      </p:sp>
+      <p:sp>
+        <p:nvSpPr>
+          <p:cNvPr id="21" name="Rectangle 20"/>
+          <p:cNvSpPr/>
+          <p:nvPr/>
+        </p:nvSpPr>
+        <p:spPr>
+          <a:xfrm>
+            <a:off x="7498079" y="4645152"/>
+            <a:ext cx="91440" cy="914400"/>
+          </a:xfrm>
+          <a:prstGeom prst="rect">
+            <a:avLst/>
+          </a:prstGeom>
+          <a:solidFill>
+            <a:srgbClr val="FFB454"/>
+          </a:solidFill>
+          <a:ln>
+            <a:noFill/>
+          </a:ln>
+          <a:effectLst/>
+        </p:spPr>
+        <p:style>
+          <a:lnRef idx="1">
+            <a:schemeClr val="accent1"/>
+          </a:lnRef>
+          <a:fillRef idx="3">
+            <a:schemeClr val="accent1"/>
+          </a:fillRef>
+          <a:effectRef idx="2">
+            <a:schemeClr val="accent1"/>
+          </a:effectRef>
+          <a:fontRef idx="minor">
+            <a:schemeClr val="lt1"/>
+          </a:fontRef>
+        </p:style>
+        <p:txBody>
+          <a:bodyPr rtlCol="0" anchor="ctr"/>
+          <a:lstStyle/>
+          <a:p>
+            <a:pPr algn="ctr"/>
+          </a:p>
+        </p:txBody>
+      </p:sp>
+      <p:sp>
+        <p:nvSpPr>
+          <p:cNvPr id="22" name="TextBox 21"/>
+          <p:cNvSpPr txBox="1"/>
+          <p:nvPr/>
+        </p:nvSpPr>
+        <p:spPr>
+          <a:xfrm>
+            <a:off x="7726679" y="4736592"/>
+            <a:ext cx="3749040" cy="320040"/>
+          </a:xfrm>
+          <a:prstGeom prst="rect">
+            <a:avLst/>
+          </a:prstGeom>
+          <a:noFill/>
+        </p:spPr>
+        <p:txBody>
+          <a:bodyPr wrap="square" anchor="t" lIns="25400" rIns="25400" tIns="25400" bIns="25400">
+            <a:spAutoFit/>
+          </a:bodyPr>
+          <a:lstStyle/>
+          <a:p>
+            <a:pPr algn="l">
+              <a:spcAft>
+                <a:spcPts val="400"/>
+              </a:spcAft>
+            </a:pPr>
+            <a:r>
+              <a:rPr sz="1200" b="1">
+                <a:solidFill>
+                  <a:srgbClr val="FFB454"/>
+                </a:solidFill>
+                <a:latin typeface="Segoe UI"/>
+              </a:rPr>
+              <a:t>endpoint.enabled: false</a:t>
+            </a:r>
+          </a:p>
+        </p:txBody>
+      </p:sp>
+      <p:sp>
+        <p:nvSpPr>
+          <p:cNvPr id="23" name="TextBox 22"/>
+          <p:cNvSpPr txBox="1"/>
+          <p:nvPr/>
+        </p:nvSpPr>
+        <p:spPr>
+          <a:xfrm>
+            <a:off x="7726679" y="5029200"/>
+            <a:ext cx="3730752" cy="502920"/>
+          </a:xfrm>
+          <a:prstGeom prst="rect">
+            <a:avLst/>
+          </a:prstGeom>
+          <a:noFill/>
+        </p:spPr>
+        <p:txBody>
+          <a:bodyPr wrap="square" anchor="t" lIns="25400" rIns="25400" tIns="25400" bIns="25400">
+            <a:spAutoFit/>
+          </a:bodyPr>
+          <a:lstStyle/>
+          <a:p>
+            <a:pPr algn="l">
+              <a:lnSpc>
+                <a:spcPct val="102000"/>
+              </a:lnSpc>
+              <a:spcAft>
+                <a:spcPts val="400"/>
+              </a:spcAft>
+            </a:pPr>
+            <a:r>
+              <a:rPr sz="1050" b="0">
+                <a:solidFill>
+                  <a:srgbClr val="FFFFFF"/>
+                </a:solidFill>
+                <a:latin typeface="Segoe UI"/>
+              </a:rPr>
+              <a:t>No external LoadBalancer on this cluster — the operator exposes a ClusterIP :5000 the UI calls in-cluster. Stays sovereign.</a:t>
+            </a:r>
+          </a:p>
+        </p:txBody>
+      </p:sp>
+      <p:sp>
+        <p:nvSpPr>
+          <p:cNvPr id="24" name="Rounded Rectangle 23"/>
+          <p:cNvSpPr/>
+          <p:nvPr/>
+        </p:nvSpPr>
+        <p:spPr>
+          <a:xfrm>
+            <a:off x="548640" y="5897880"/>
+            <a:ext cx="11091672" cy="457200"/>
+          </a:xfrm>
+          <a:prstGeom prst="roundRect">
+            <a:avLst/>
+          </a:prstGeom>
+          <a:solidFill>
+            <a:srgbClr val="1B0E33"/>
+          </a:solidFill>
+          <a:ln w="12700">
+            <a:solidFill>
+              <a:srgbClr val="7B4FC7"/>
+            </a:solidFill>
+          </a:ln>
+          <a:effectLst/>
+        </p:spPr>
+        <p:style>
+          <a:lnRef idx="1">
+            <a:schemeClr val="accent1"/>
+          </a:lnRef>
+          <a:fillRef idx="3">
+            <a:schemeClr val="accent1"/>
+          </a:fillRef>
+          <a:effectRef idx="2">
+            <a:schemeClr val="accent1"/>
+          </a:effectRef>
+          <a:fontRef idx="minor">
+            <a:schemeClr val="lt1"/>
+          </a:fontRef>
+        </p:style>
+        <p:txBody>
+          <a:bodyPr rtlCol="0" anchor="ctr"/>
+          <a:lstStyle/>
+          <a:p>
+            <a:pPr algn="ctr"/>
+          </a:p>
+        </p:txBody>
+      </p:sp>
+      <p:sp>
+        <p:nvSpPr>
+          <p:cNvPr id="25" name="TextBox 24"/>
+          <p:cNvSpPr txBox="1"/>
+          <p:nvPr/>
+        </p:nvSpPr>
+        <p:spPr>
+          <a:xfrm>
+            <a:off x="731520" y="5943600"/>
+            <a:ext cx="10789920" cy="365760"/>
+          </a:xfrm>
+          <a:prstGeom prst="rect">
+            <a:avLst/>
+          </a:prstGeom>
+          <a:noFill/>
+        </p:spPr>
+        <p:txBody>
+          <a:bodyPr wrap="square" anchor="ctr" lIns="25400" rIns="25400" tIns="25400" bIns="25400">
+            <a:spAutoFit/>
+          </a:bodyPr>
+          <a:lstStyle/>
+          <a:p>
+            <a:pPr algn="l">
+              <a:spcAft>
+                <a:spcPts val="400"/>
+              </a:spcAft>
+            </a:pPr>
+            <a:r>
+              <a:rPr sz="1150" b="1">
+                <a:solidFill>
+                  <a:srgbClr val="8CE09A"/>
+                </a:solidFill>
+                <a:latin typeface="Consolas"/>
+              </a:rPr>
+              <a:t>Verify:  </a:t>
+            </a:r>
+            <a:r>
+              <a:rPr sz="1150" b="0">
+                <a:solidFill>
+                  <a:srgbClr val="C8BDE6"/>
+                </a:solidFill>
+                <a:latin typeface="Consolas"/>
+              </a:rPr>
+              <a:t>kubectl get modeldeployment -n foundry-local-operator   •   kubectl get pods,jobs -n foundry-local-operator   -&gt;  Running</a:t>
+            </a:r>
+          </a:p>
+        </p:txBody>
+      </p:sp>
+    </p:spTree>
+  </p:cSld>
+  <p:clrMapOvr>
+    <a:masterClrMapping/>
+  </p:clrMapOvr>
+</p:sld>
+</file>
+
+<file path=ppt/slides/slide5.xml><?xml version="1.0" encoding="utf-8"?>
+<p:sld xmlns:a="http://schemas.openxmlformats.org/drawingml/2006/main" xmlns:p="http://schemas.openxmlformats.org/presentationml/2006/main" xmlns:r="http://schemas.openxmlformats.org/officeDocument/2006/relationships">
+  <p:cSld>
+    <p:bg>
+      <p:bgPr>
+        <a:solidFill>
+          <a:srgbClr val="2A124E"/>
+        </a:solidFill>
+        <a:effectLst/>
+      </p:bgPr>
+    </p:bg>
+    <p:spTree>
+      <p:nvGrpSpPr>
+        <p:cNvPr id="1" name=""/>
+        <p:cNvGrpSpPr/>
+        <p:nvPr/>
+      </p:nvGrpSpPr>
+      <p:grpSpPr/>
+      <p:sp>
+        <p:nvSpPr>
+          <p:cNvPr id="2" name="Rectangle 1"/>
+          <p:cNvSpPr/>
+          <p:nvPr/>
+        </p:nvSpPr>
+        <p:spPr>
+          <a:xfrm>
+            <a:off x="0" y="0"/>
+            <a:ext cx="12191695" cy="109728"/>
+          </a:xfrm>
+          <a:prstGeom prst="rect">
+            <a:avLst/>
+          </a:prstGeom>
+          <a:gradFill rotWithShape="1">
+            <a:gsLst>
+              <a:gs pos="0">
+                <a:srgbClr val="5B2D91"/>
+              </a:gs>
+              <a:gs pos="100000">
+                <a:srgbClr val="38E0C4"/>
+              </a:gs>
+            </a:gsLst>
+            <a:lin scaled="0" ang="0"/>
+          </a:gradFill>
+          <a:ln>
+            <a:noFill/>
+          </a:ln>
+          <a:effectLst/>
+        </p:spPr>
+        <p:style>
+          <a:lnRef idx="1">
+            <a:schemeClr val="accent1"/>
+          </a:lnRef>
+          <a:fillRef idx="3">
+            <a:schemeClr val="accent1"/>
+          </a:fillRef>
+          <a:effectRef idx="2">
+            <a:schemeClr val="accent1"/>
+          </a:effectRef>
+          <a:fontRef idx="minor">
+            <a:schemeClr val="lt1"/>
+          </a:fontRef>
+        </p:style>
+        <p:txBody>
+          <a:bodyPr rtlCol="0" anchor="ctr"/>
+          <a:lstStyle/>
+          <a:p>
+            <a:pPr algn="ctr"/>
+          </a:p>
+        </p:txBody>
+      </p:sp>
+      <p:sp>
+        <p:nvSpPr>
+          <p:cNvPr id="3" name="TextBox 2"/>
+          <p:cNvSpPr txBox="1"/>
+          <p:nvPr/>
+        </p:nvSpPr>
+        <p:spPr>
+          <a:xfrm>
+            <a:off x="548640" y="292608"/>
+            <a:ext cx="10972800" cy="320040"/>
+          </a:xfrm>
+          <a:prstGeom prst="rect">
+            <a:avLst/>
+          </a:prstGeom>
+          <a:noFill/>
+        </p:spPr>
+        <p:txBody>
+          <a:bodyPr wrap="square" anchor="t" lIns="25400" rIns="25400" tIns="25400" bIns="25400">
+            <a:spAutoFit/>
+          </a:bodyPr>
+          <a:lstStyle/>
+          <a:p>
+            <a:pPr algn="l">
+              <a:spcAft>
+                <a:spcPts val="400"/>
+              </a:spcAft>
+            </a:pPr>
+            <a:r>
+              <a:rPr sz="1200" b="1">
+                <a:solidFill>
+                  <a:srgbClr val="38E0C4"/>
+                </a:solidFill>
+                <a:latin typeface="Segoe UI"/>
+              </a:rPr>
+              <a:t>DEMO SCRIPT  •  ~8 MINUTES</a:t>
+            </a:r>
+          </a:p>
+        </p:txBody>
+      </p:sp>
+      <p:sp>
+        <p:nvSpPr>
+          <p:cNvPr id="4" name="TextBox 3"/>
+          <p:cNvSpPr txBox="1"/>
+          <p:nvPr/>
+        </p:nvSpPr>
+        <p:spPr>
+          <a:xfrm>
+            <a:off x="548640" y="603504"/>
+            <a:ext cx="11064240" cy="731520"/>
+          </a:xfrm>
+          <a:prstGeom prst="rect">
+            <a:avLst/>
+          </a:prstGeom>
+          <a:noFill/>
+        </p:spPr>
+        <p:txBody>
+          <a:bodyPr wrap="square" anchor="t" lIns="25400" rIns="25400" tIns="25400" bIns="25400">
+            <a:spAutoFit/>
+          </a:bodyPr>
+          <a:lstStyle/>
+          <a:p>
+            <a:pPr algn="l">
+              <a:spcAft>
+                <a:spcPts val="400"/>
+              </a:spcAft>
+            </a:pPr>
+            <a:r>
+              <a:rPr sz="2600" b="1">
+                <a:solidFill>
+                  <a:srgbClr val="FFFFFF"/>
+                </a:solidFill>
+                <a:latin typeface="Segoe UI"/>
+              </a:rPr>
+              <a:t>How to walk the room through it</a:t>
+            </a:r>
+          </a:p>
+        </p:txBody>
+      </p:sp>
+      <p:sp>
+        <p:nvSpPr>
+          <p:cNvPr id="5" name="TextBox 4"/>
+          <p:cNvSpPr txBox="1"/>
+          <p:nvPr/>
+        </p:nvSpPr>
+        <p:spPr>
+          <a:xfrm>
+            <a:off x="548640" y="1188720"/>
+            <a:ext cx="11064240" cy="411480"/>
+          </a:xfrm>
+          <a:prstGeom prst="rect">
+            <a:avLst/>
+          </a:prstGeom>
+          <a:noFill/>
+        </p:spPr>
+        <p:txBody>
+          <a:bodyPr wrap="square" anchor="t" lIns="25400" rIns="25400" tIns="25400" bIns="25400">
+            <a:spAutoFit/>
+          </a:bodyPr>
+          <a:lstStyle/>
+          <a:p>
+            <a:pPr algn="l">
+              <a:lnSpc>
+                <a:spcPct val="100000"/>
+              </a:lnSpc>
+              <a:spcAft>
+                <a:spcPts val="400"/>
+              </a:spcAft>
+            </a:pPr>
+            <a:r>
+              <a:rPr sz="1250" b="1">
+                <a:solidFill>
+                  <a:srgbClr val="38E0C4"/>
+                </a:solidFill>
+                <a:latin typeface="Segoe UI"/>
+              </a:rPr>
+              <a:t>Open:  </a:t>
+            </a:r>
+            <a:r>
+              <a:rPr sz="1250" b="0">
+                <a:solidFill>
+                  <a:srgbClr val="FFFFFF"/>
+                </a:solidFill>
+                <a:latin typeface="Segoe UI"/>
+              </a:rPr>
+              <a:t>“Same model, same data, same UI — I'll move it out of Azure and run it whole on Azure Local, then add a generative model. It all stays local.”</a:t>
+            </a:r>
+          </a:p>
+        </p:txBody>
+      </p:sp>
+      <p:sp>
+        <p:nvSpPr>
+          <p:cNvPr id="6" name="Rounded Rectangle 5"/>
+          <p:cNvSpPr/>
+          <p:nvPr/>
+        </p:nvSpPr>
+        <p:spPr>
+          <a:xfrm>
+            <a:off x="548640" y="1783080"/>
+            <a:ext cx="3657600" cy="3886200"/>
+          </a:xfrm>
+          <a:prstGeom prst="roundRect">
+            <a:avLst/>
+          </a:prstGeom>
+          <a:solidFill>
+            <a:srgbClr val="3A2266"/>
+          </a:solidFill>
+          <a:ln w="12700">
+            <a:solidFill>
+              <a:srgbClr val="6B4AA8"/>
+            </a:solidFill>
+          </a:ln>
+          <a:effectLst/>
+        </p:spPr>
+        <p:style>
+          <a:lnRef idx="1">
+            <a:schemeClr val="accent1"/>
+          </a:lnRef>
+          <a:fillRef idx="3">
+            <a:schemeClr val="accent1"/>
+          </a:fillRef>
+          <a:effectRef idx="2">
+            <a:schemeClr val="accent1"/>
+          </a:effectRef>
+          <a:fontRef idx="minor">
+            <a:schemeClr val="lt1"/>
+          </a:fontRef>
+        </p:style>
+        <p:txBody>
+          <a:bodyPr rtlCol="0" anchor="ctr"/>
+          <a:lstStyle/>
+          <a:p>
+            <a:pPr algn="ctr"/>
+          </a:p>
+        </p:txBody>
+      </p:sp>
+      <p:sp>
+        <p:nvSpPr>
+          <p:cNvPr id="7" name="Rounded Rectangle 6"/>
+          <p:cNvSpPr/>
+          <p:nvPr/>
+        </p:nvSpPr>
+        <p:spPr>
+          <a:xfrm>
+            <a:off x="548640" y="1783080"/>
+            <a:ext cx="3657600" cy="502920"/>
+          </a:xfrm>
+          <a:prstGeom prst="roundRect">
+            <a:avLst/>
+          </a:prstGeom>
+          <a:solidFill>
+            <a:srgbClr val="FFB454"/>
+          </a:solidFill>
+          <a:ln>
+            <a:noFill/>
+          </a:ln>
+          <a:effectLst/>
+        </p:spPr>
+        <p:style>
+          <a:lnRef idx="1">
+            <a:schemeClr val="accent1"/>
+          </a:lnRef>
+          <a:fillRef idx="3">
+            <a:schemeClr val="accent1"/>
+          </a:fillRef>
+          <a:effectRef idx="2">
+            <a:schemeClr val="accent1"/>
+          </a:effectRef>
+          <a:fontRef idx="minor">
+            <a:schemeClr val="lt1"/>
+          </a:fontRef>
+        </p:style>
+        <p:txBody>
+          <a:bodyPr rtlCol="0" anchor="ctr"/>
+          <a:lstStyle/>
+          <a:p>
+            <a:pPr algn="ctr"/>
+          </a:p>
+        </p:txBody>
+      </p:sp>
+      <p:sp>
+        <p:nvSpPr>
+          <p:cNvPr id="8" name="Rectangle 7"/>
+          <p:cNvSpPr/>
+          <p:nvPr/>
+        </p:nvSpPr>
+        <p:spPr>
+          <a:xfrm>
+            <a:off x="548640" y="2029968"/>
+            <a:ext cx="3657600" cy="256032"/>
+          </a:xfrm>
+          <a:prstGeom prst="rect">
+            <a:avLst/>
+          </a:prstGeom>
+          <a:solidFill>
+            <a:srgbClr val="FFB454"/>
+          </a:solidFill>
+          <a:ln>
+            <a:noFill/>
+          </a:ln>
+          <a:effectLst/>
+        </p:spPr>
+        <p:style>
+          <a:lnRef idx="1">
+            <a:schemeClr val="accent1"/>
+          </a:lnRef>
+          <a:fillRef idx="3">
+            <a:schemeClr val="accent1"/>
+          </a:fillRef>
+          <a:effectRef idx="2">
+            <a:schemeClr val="accent1"/>
+          </a:effectRef>
+          <a:fontRef idx="minor">
+            <a:schemeClr val="lt1"/>
+          </a:fontRef>
+        </p:style>
+        <p:txBody>
+          <a:bodyPr rtlCol="0" anchor="ctr"/>
+          <a:lstStyle/>
+          <a:p>
+            <a:pPr algn="ctr"/>
+          </a:p>
+        </p:txBody>
+      </p:sp>
+      <p:sp>
+        <p:nvSpPr>
+          <p:cNvPr id="9" name="TextBox 8"/>
+          <p:cNvSpPr txBox="1"/>
+          <p:nvPr/>
+        </p:nvSpPr>
+        <p:spPr>
+          <a:xfrm>
+            <a:off x="749808" y="1801368"/>
+            <a:ext cx="3291840" cy="457200"/>
+          </a:xfrm>
+          <a:prstGeom prst="rect">
+            <a:avLst/>
+          </a:prstGeom>
+          <a:noFill/>
+        </p:spPr>
+        <p:txBody>
+          <a:bodyPr wrap="square" anchor="ctr" lIns="25400" rIns="25400" tIns="25400" bIns="25400">
+            <a:spAutoFit/>
+          </a:bodyPr>
+          <a:lstStyle/>
+          <a:p>
+            <a:pPr algn="l">
+              <a:spcAft>
+                <a:spcPts val="400"/>
+              </a:spcAft>
+            </a:pPr>
+            <a:r>
+              <a:rPr sz="1350" b="1">
+                <a:solidFill>
+                  <a:srgbClr val="2A124E"/>
+                </a:solidFill>
+                <a:latin typeface="Segoe UI"/>
+              </a:rPr>
+              <a:t>ACT 1 — In Azure today</a:t>
+            </a:r>
+          </a:p>
+        </p:txBody>
+      </p:sp>
+      <p:sp>
+        <p:nvSpPr>
+          <p:cNvPr id="10" name="Rounded Rectangle 9"/>
+          <p:cNvSpPr/>
+          <p:nvPr/>
+        </p:nvSpPr>
+        <p:spPr>
+          <a:xfrm>
+            <a:off x="749808" y="2441448"/>
+            <a:ext cx="658368" cy="256032"/>
+          </a:xfrm>
+          <a:prstGeom prst="roundRect">
+            <a:avLst/>
+          </a:prstGeom>
+          <a:solidFill>
+            <a:srgbClr val="FFB454"/>
+          </a:solidFill>
+          <a:ln>
+            <a:noFill/>
+          </a:ln>
+          <a:effectLst/>
+        </p:spPr>
+        <p:style>
+          <a:lnRef idx="1">
+            <a:schemeClr val="accent1"/>
+          </a:lnRef>
+          <a:fillRef idx="3">
+            <a:schemeClr val="accent1"/>
+          </a:fillRef>
+          <a:effectRef idx="2">
+            <a:schemeClr val="accent1"/>
+          </a:effectRef>
+          <a:fontRef idx="minor">
+            <a:schemeClr val="lt1"/>
+          </a:fontRef>
+        </p:style>
+        <p:txBody>
+          <a:bodyPr rtlCol="0" anchor="ctr"/>
+          <a:lstStyle/>
+          <a:p>
+            <a:pPr algn="ctr"/>
+            <a:r>
+              <a:rPr sz="950" b="1">
+                <a:solidFill>
+                  <a:srgbClr val="2A124E"/>
+                </a:solidFill>
+                <a:latin typeface="Segoe UI"/>
+              </a:rPr>
+              <a:t>SAY</a:t>
+            </a:r>
+          </a:p>
+        </p:txBody>
+      </p:sp>
+      <p:sp>
+        <p:nvSpPr>
+          <p:cNvPr id="11" name="TextBox 10"/>
+          <p:cNvSpPr txBox="1"/>
+          <p:nvPr/>
+        </p:nvSpPr>
+        <p:spPr>
+          <a:xfrm>
+            <a:off x="749808" y="2734056"/>
+            <a:ext cx="3246120" cy="777240"/>
+          </a:xfrm>
+          <a:prstGeom prst="rect">
+            <a:avLst/>
+          </a:prstGeom>
+          <a:noFill/>
+        </p:spPr>
+        <p:txBody>
+          <a:bodyPr wrap="square" anchor="t" lIns="25400" rIns="25400" tIns="25400" bIns="25400">
+            <a:spAutoFit/>
+          </a:bodyPr>
+          <a:lstStyle/>
+          <a:p>
+            <a:pPr algn="l">
+              <a:lnSpc>
+                <a:spcPct val="103000"/>
+              </a:lnSpc>
+              <a:spcAft>
+                <a:spcPts val="400"/>
+              </a:spcAft>
+            </a:pPr>
+            <a:r>
+              <a:rPr sz="1100" b="0">
+                <a:solidFill>
+                  <a:srgbClr val="FFFFFF"/>
+                </a:solidFill>
+                <a:latin typeface="Segoe UI"/>
+              </a:rPr>
+              <a:t>“Standard Azure PaaS — the baseline we migrate away from.”</a:t>
+            </a:r>
+          </a:p>
+        </p:txBody>
+      </p:sp>
+      <p:sp>
+        <p:nvSpPr>
+          <p:cNvPr id="12" name="Rounded Rectangle 11"/>
+          <p:cNvSpPr/>
+          <p:nvPr/>
+        </p:nvSpPr>
+        <p:spPr>
+          <a:xfrm>
+            <a:off x="749808" y="3502152"/>
+            <a:ext cx="658368" cy="256032"/>
+          </a:xfrm>
+          <a:prstGeom prst="roundRect">
+            <a:avLst/>
+          </a:prstGeom>
+          <a:solidFill>
+            <a:srgbClr val="FFB454"/>
+          </a:solidFill>
+          <a:ln>
+            <a:noFill/>
+          </a:ln>
+          <a:effectLst/>
+        </p:spPr>
+        <p:style>
+          <a:lnRef idx="1">
+            <a:schemeClr val="accent1"/>
+          </a:lnRef>
+          <a:fillRef idx="3">
+            <a:schemeClr val="accent1"/>
+          </a:fillRef>
+          <a:effectRef idx="2">
+            <a:schemeClr val="accent1"/>
+          </a:effectRef>
+          <a:fontRef idx="minor">
+            <a:schemeClr val="lt1"/>
+          </a:fontRef>
+        </p:style>
+        <p:txBody>
+          <a:bodyPr rtlCol="0" anchor="ctr"/>
+          <a:lstStyle/>
+          <a:p>
+            <a:pPr algn="ctr"/>
+            <a:r>
+              <a:rPr sz="950" b="1">
+                <a:solidFill>
+                  <a:srgbClr val="2A124E"/>
+                </a:solidFill>
+                <a:latin typeface="Segoe UI"/>
+              </a:rPr>
+              <a:t>SHOW</a:t>
+            </a:r>
+          </a:p>
+        </p:txBody>
+      </p:sp>
+      <p:sp>
+        <p:nvSpPr>
+          <p:cNvPr id="13" name="TextBox 12"/>
+          <p:cNvSpPr txBox="1"/>
+          <p:nvPr/>
+        </p:nvSpPr>
+        <p:spPr>
+          <a:xfrm>
+            <a:off x="749808" y="3794760"/>
+            <a:ext cx="3246120" cy="777240"/>
+          </a:xfrm>
+          <a:prstGeom prst="rect">
+            <a:avLst/>
+          </a:prstGeom>
+          <a:noFill/>
+        </p:spPr>
+        <p:txBody>
+          <a:bodyPr wrap="square" anchor="t" lIns="25400" rIns="25400" tIns="25400" bIns="25400">
+            <a:spAutoFit/>
+          </a:bodyPr>
+          <a:lstStyle/>
+          <a:p>
+            <a:pPr algn="l">
+              <a:lnSpc>
+                <a:spcPct val="103000"/>
+              </a:lnSpc>
+              <a:spcAft>
+                <a:spcPts val="400"/>
+              </a:spcAft>
+            </a:pPr>
+            <a:r>
+              <a:rPr sz="1100" b="0">
+                <a:solidFill>
+                  <a:srgbClr val="FFFFFF"/>
+                </a:solidFill>
+                <a:latin typeface="Segoe UI"/>
+              </a:rPr>
+              <a:t>Tab A: public dashboard. Move slider -&gt; badge location = cloud, ~37 ms.</a:t>
+            </a:r>
+          </a:p>
+        </p:txBody>
+      </p:sp>
+      <p:sp>
+        <p:nvSpPr>
+          <p:cNvPr id="14" name="Rounded Rectangle 13"/>
+          <p:cNvSpPr/>
+          <p:nvPr/>
+        </p:nvSpPr>
+        <p:spPr>
+          <a:xfrm>
+            <a:off x="749808" y="4562856"/>
+            <a:ext cx="658368" cy="256032"/>
+          </a:xfrm>
+          <a:prstGeom prst="roundRect">
+            <a:avLst/>
+          </a:prstGeom>
+          <a:solidFill>
+            <a:srgbClr val="FFB454"/>
+          </a:solidFill>
+          <a:ln>
+            <a:noFill/>
+          </a:ln>
+          <a:effectLst/>
+        </p:spPr>
+        <p:style>
+          <a:lnRef idx="1">
+            <a:schemeClr val="accent1"/>
+          </a:lnRef>
+          <a:fillRef idx="3">
+            <a:schemeClr val="accent1"/>
+          </a:fillRef>
+          <a:effectRef idx="2">
+            <a:schemeClr val="accent1"/>
+          </a:effectRef>
+          <a:fontRef idx="minor">
+            <a:schemeClr val="lt1"/>
+          </a:fontRef>
+        </p:style>
+        <p:txBody>
+          <a:bodyPr rtlCol="0" anchor="ctr"/>
+          <a:lstStyle/>
+          <a:p>
+            <a:pPr algn="ctr"/>
+            <a:r>
+              <a:rPr sz="950" b="1">
+                <a:solidFill>
+                  <a:srgbClr val="2A124E"/>
+                </a:solidFill>
+                <a:latin typeface="Segoe UI"/>
+              </a:rPr>
+              <a:t>PROVE</a:t>
+            </a:r>
+          </a:p>
+        </p:txBody>
+      </p:sp>
+      <p:sp>
+        <p:nvSpPr>
+          <p:cNvPr id="15" name="TextBox 14"/>
+          <p:cNvSpPr txBox="1"/>
+          <p:nvPr/>
+        </p:nvSpPr>
+        <p:spPr>
+          <a:xfrm>
+            <a:off x="749808" y="4855464"/>
+            <a:ext cx="3246120" cy="777240"/>
+          </a:xfrm>
+          <a:prstGeom prst="rect">
+            <a:avLst/>
+          </a:prstGeom>
+          <a:noFill/>
+        </p:spPr>
+        <p:txBody>
+          <a:bodyPr wrap="square" anchor="t" lIns="25400" rIns="25400" tIns="25400" bIns="25400">
+            <a:spAutoFit/>
+          </a:bodyPr>
+          <a:lstStyle/>
+          <a:p>
+            <a:pPr algn="l">
+              <a:lnSpc>
+                <a:spcPct val="103000"/>
+              </a:lnSpc>
+              <a:spcAft>
+                <a:spcPts val="400"/>
+              </a:spcAft>
+            </a:pPr>
+            <a:r>
+              <a:rPr sz="1100" b="0">
+                <a:solidFill>
+                  <a:srgbClr val="FFFFFF"/>
+                </a:solidFill>
+                <a:latin typeface="Segoe UI"/>
+              </a:rPr>
+              <a:t>Portal RG sovereign-ai-daz: 2 Container Apps + ACR.  az containerapp list -o table</a:t>
+            </a:r>
+          </a:p>
+        </p:txBody>
+      </p:sp>
+      <p:sp>
+        <p:nvSpPr>
+          <p:cNvPr id="16" name="Rounded Rectangle 15"/>
+          <p:cNvSpPr/>
+          <p:nvPr/>
+        </p:nvSpPr>
+        <p:spPr>
+          <a:xfrm>
+            <a:off x="4434840" y="1783080"/>
+            <a:ext cx="3657600" cy="3886200"/>
+          </a:xfrm>
+          <a:prstGeom prst="roundRect">
+            <a:avLst/>
+          </a:prstGeom>
+          <a:solidFill>
+            <a:srgbClr val="3A2266"/>
+          </a:solidFill>
+          <a:ln w="12700">
+            <a:solidFill>
+              <a:srgbClr val="6B4AA8"/>
+            </a:solidFill>
+          </a:ln>
+          <a:effectLst/>
+        </p:spPr>
+        <p:style>
+          <a:lnRef idx="1">
+            <a:schemeClr val="accent1"/>
+          </a:lnRef>
+          <a:fillRef idx="3">
+            <a:schemeClr val="accent1"/>
+          </a:fillRef>
+          <a:effectRef idx="2">
+            <a:schemeClr val="accent1"/>
+          </a:effectRef>
+          <a:fontRef idx="minor">
+            <a:schemeClr val="lt1"/>
+          </a:fontRef>
+        </p:style>
+        <p:txBody>
+          <a:bodyPr rtlCol="0" anchor="ctr"/>
+          <a:lstStyle/>
+          <a:p>
+            <a:pPr algn="ctr"/>
+          </a:p>
+        </p:txBody>
+      </p:sp>
+      <p:sp>
+        <p:nvSpPr>
+          <p:cNvPr id="17" name="Rounded Rectangle 16"/>
+          <p:cNvSpPr/>
+          <p:nvPr/>
+        </p:nvSpPr>
+        <p:spPr>
+          <a:xfrm>
+            <a:off x="4434840" y="1783080"/>
+            <a:ext cx="3657600" cy="502920"/>
+          </a:xfrm>
+          <a:prstGeom prst="roundRect">
+            <a:avLst/>
+          </a:prstGeom>
+          <a:solidFill>
+            <a:srgbClr val="38E0C4"/>
+          </a:solidFill>
+          <a:ln>
+            <a:noFill/>
+          </a:ln>
+          <a:effectLst/>
+        </p:spPr>
+        <p:style>
+          <a:lnRef idx="1">
+            <a:schemeClr val="accent1"/>
+          </a:lnRef>
+          <a:fillRef idx="3">
+            <a:schemeClr val="accent1"/>
+          </a:fillRef>
+          <a:effectRef idx="2">
+            <a:schemeClr val="accent1"/>
+          </a:effectRef>
+          <a:fontRef idx="minor">
+            <a:schemeClr val="lt1"/>
+          </a:fontRef>
+        </p:style>
+        <p:txBody>
+          <a:bodyPr rtlCol="0" anchor="ctr"/>
+          <a:lstStyle/>
+          <a:p>
+            <a:pPr algn="ctr"/>
+          </a:p>
+        </p:txBody>
+      </p:sp>
+      <p:sp>
+        <p:nvSpPr>
+          <p:cNvPr id="18" name="Rectangle 17"/>
+          <p:cNvSpPr/>
+          <p:nvPr/>
+        </p:nvSpPr>
+        <p:spPr>
+          <a:xfrm>
+            <a:off x="4434840" y="2029968"/>
+            <a:ext cx="3657600" cy="256032"/>
+          </a:xfrm>
+          <a:prstGeom prst="rect">
+            <a:avLst/>
+          </a:prstGeom>
+          <a:solidFill>
+            <a:srgbClr val="38E0C4"/>
+          </a:solidFill>
+          <a:ln>
+            <a:noFill/>
+          </a:ln>
+          <a:effectLst/>
+        </p:spPr>
+        <p:style>
+          <a:lnRef idx="1">
+            <a:schemeClr val="accent1"/>
+          </a:lnRef>
+          <a:fillRef idx="3">
+            <a:schemeClr val="accent1"/>
+          </a:fillRef>
+          <a:effectRef idx="2">
+            <a:schemeClr val="accent1"/>
+          </a:effectRef>
+          <a:fontRef idx="minor">
+            <a:schemeClr val="lt1"/>
+          </a:fontRef>
+        </p:style>
+        <p:txBody>
+          <a:bodyPr rtlCol="0" anchor="ctr"/>
+          <a:lstStyle/>
+          <a:p>
+            <a:pPr algn="ctr"/>
+          </a:p>
+        </p:txBody>
+      </p:sp>
+      <p:sp>
+        <p:nvSpPr>
+          <p:cNvPr id="19" name="TextBox 18"/>
+          <p:cNvSpPr txBox="1"/>
+          <p:nvPr/>
+        </p:nvSpPr>
+        <p:spPr>
+          <a:xfrm>
+            <a:off x="4636008" y="1801368"/>
+            <a:ext cx="3291840" cy="457200"/>
+          </a:xfrm>
+          <a:prstGeom prst="rect">
+            <a:avLst/>
+          </a:prstGeom>
+          <a:noFill/>
+        </p:spPr>
+        <p:txBody>
+          <a:bodyPr wrap="square" anchor="ctr" lIns="25400" rIns="25400" tIns="25400" bIns="25400">
+            <a:spAutoFit/>
+          </a:bodyPr>
+          <a:lstStyle/>
+          <a:p>
+            <a:pPr algn="l">
+              <a:spcAft>
+                <a:spcPts val="400"/>
+              </a:spcAft>
+            </a:pPr>
+            <a:r>
+              <a:rPr sz="1350" b="1">
+                <a:solidFill>
+                  <a:srgbClr val="2A124E"/>
+                </a:solidFill>
+                <a:latin typeface="Segoe UI"/>
+              </a:rPr>
+              <a:t>ACT 2 — Migrate (HERO)</a:t>
+            </a:r>
+          </a:p>
+        </p:txBody>
+      </p:sp>
+      <p:sp>
+        <p:nvSpPr>
+          <p:cNvPr id="20" name="Rounded Rectangle 19"/>
+          <p:cNvSpPr/>
+          <p:nvPr/>
+        </p:nvSpPr>
+        <p:spPr>
+          <a:xfrm>
+            <a:off x="4636008" y="2441448"/>
+            <a:ext cx="658368" cy="256032"/>
+          </a:xfrm>
+          <a:prstGeom prst="roundRect">
+            <a:avLst/>
+          </a:prstGeom>
+          <a:solidFill>
+            <a:srgbClr val="38E0C4"/>
+          </a:solidFill>
+          <a:ln>
+            <a:noFill/>
+          </a:ln>
+          <a:effectLst/>
+        </p:spPr>
+        <p:style>
+          <a:lnRef idx="1">
+            <a:schemeClr val="accent1"/>
+          </a:lnRef>
+          <a:fillRef idx="3">
+            <a:schemeClr val="accent1"/>
+          </a:fillRef>
+          <a:effectRef idx="2">
+            <a:schemeClr val="accent1"/>
+          </a:effectRef>
+          <a:fontRef idx="minor">
+            <a:schemeClr val="lt1"/>
+          </a:fontRef>
+        </p:style>
+        <p:txBody>
+          <a:bodyPr rtlCol="0" anchor="ctr"/>
+          <a:lstStyle/>
+          <a:p>
+            <a:pPr algn="ctr"/>
+            <a:r>
+              <a:rPr sz="950" b="1">
+                <a:solidFill>
+                  <a:srgbClr val="2A124E"/>
+                </a:solidFill>
+                <a:latin typeface="Segoe UI"/>
+              </a:rPr>
+              <a:t>SAY</a:t>
+            </a:r>
+          </a:p>
+        </p:txBody>
+      </p:sp>
+      <p:sp>
+        <p:nvSpPr>
+          <p:cNvPr id="21" name="TextBox 20"/>
+          <p:cNvSpPr txBox="1"/>
+          <p:nvPr/>
+        </p:nvSpPr>
+        <p:spPr>
+          <a:xfrm>
+            <a:off x="4636008" y="2734056"/>
+            <a:ext cx="3246120" cy="777240"/>
+          </a:xfrm>
+          <a:prstGeom prst="rect">
+            <a:avLst/>
+          </a:prstGeom>
+          <a:noFill/>
+        </p:spPr>
+        <p:txBody>
+          <a:bodyPr wrap="square" anchor="t" lIns="25400" rIns="25400" tIns="25400" bIns="25400">
+            <a:spAutoFit/>
+          </a:bodyPr>
+          <a:lstStyle/>
+          <a:p>
+            <a:pPr algn="l">
+              <a:lnSpc>
+                <a:spcPct val="103000"/>
+              </a:lnSpc>
+              <a:spcAft>
+                <a:spcPts val="400"/>
+              </a:spcAft>
+            </a:pPr>
+            <a:r>
+              <a:rPr sz="1100" b="0">
+                <a:solidFill>
+                  <a:srgbClr val="FFFFFF"/>
+                </a:solidFill>
+                <a:latin typeface="Segoe UI"/>
+              </a:rPr>
+              <a:t>“Converting to ONNX is the customer's job; we own everything after.”</a:t>
+            </a:r>
+          </a:p>
+        </p:txBody>
+      </p:sp>
+      <p:sp>
+        <p:nvSpPr>
+          <p:cNvPr id="22" name="Rounded Rectangle 21"/>
+          <p:cNvSpPr/>
+          <p:nvPr/>
+        </p:nvSpPr>
+        <p:spPr>
+          <a:xfrm>
+            <a:off x="4636008" y="3502152"/>
+            <a:ext cx="658368" cy="256032"/>
+          </a:xfrm>
+          <a:prstGeom prst="roundRect">
+            <a:avLst/>
+          </a:prstGeom>
+          <a:solidFill>
+            <a:srgbClr val="38E0C4"/>
+          </a:solidFill>
+          <a:ln>
+            <a:noFill/>
+          </a:ln>
+          <a:effectLst/>
+        </p:spPr>
+        <p:style>
+          <a:lnRef idx="1">
+            <a:schemeClr val="accent1"/>
+          </a:lnRef>
+          <a:fillRef idx="3">
+            <a:schemeClr val="accent1"/>
+          </a:fillRef>
+          <a:effectRef idx="2">
+            <a:schemeClr val="accent1"/>
+          </a:effectRef>
+          <a:fontRef idx="minor">
+            <a:schemeClr val="lt1"/>
+          </a:fontRef>
+        </p:style>
+        <p:txBody>
+          <a:bodyPr rtlCol="0" anchor="ctr"/>
+          <a:lstStyle/>
+          <a:p>
+            <a:pPr algn="ctr"/>
+            <a:r>
+              <a:rPr sz="950" b="1">
+                <a:solidFill>
+                  <a:srgbClr val="2A124E"/>
+                </a:solidFill>
+                <a:latin typeface="Segoe UI"/>
+              </a:rPr>
+              <a:t>SHOW</a:t>
+            </a:r>
+          </a:p>
+        </p:txBody>
+      </p:sp>
+      <p:sp>
+        <p:nvSpPr>
+          <p:cNvPr id="23" name="TextBox 22"/>
+          <p:cNvSpPr txBox="1"/>
+          <p:nvPr/>
+        </p:nvSpPr>
+        <p:spPr>
+          <a:xfrm>
+            <a:off x="4636008" y="3794760"/>
+            <a:ext cx="3246120" cy="777240"/>
+          </a:xfrm>
+          <a:prstGeom prst="rect">
+            <a:avLst/>
+          </a:prstGeom>
+          <a:noFill/>
+        </p:spPr>
+        <p:txBody>
+          <a:bodyPr wrap="square" anchor="t" lIns="25400" rIns="25400" tIns="25400" bIns="25400">
+            <a:spAutoFit/>
+          </a:bodyPr>
+          <a:lstStyle/>
+          <a:p>
+            <a:pPr algn="l">
+              <a:lnSpc>
+                <a:spcPct val="103000"/>
+              </a:lnSpc>
+              <a:spcAft>
+                <a:spcPts val="400"/>
+              </a:spcAft>
+            </a:pPr>
+            <a:r>
+              <a:rPr sz="1100" b="0">
+                <a:solidFill>
+                  <a:srgbClr val="FFFFFF"/>
+                </a:solidFill>
+                <a:latin typeface="Segoe UI"/>
+              </a:rPr>
+              <a:t>package_and_push.sh -&gt; ORAS pushes ONNX to ACR. Tab B http://localhost:8080: badge edge, ~42 ms.</a:t>
+            </a:r>
+          </a:p>
+        </p:txBody>
+      </p:sp>
+      <p:sp>
+        <p:nvSpPr>
+          <p:cNvPr id="24" name="Rounded Rectangle 23"/>
+          <p:cNvSpPr/>
+          <p:nvPr/>
+        </p:nvSpPr>
+        <p:spPr>
+          <a:xfrm>
+            <a:off x="4636008" y="4562856"/>
+            <a:ext cx="658368" cy="256032"/>
+          </a:xfrm>
+          <a:prstGeom prst="roundRect">
+            <a:avLst/>
+          </a:prstGeom>
+          <a:solidFill>
+            <a:srgbClr val="38E0C4"/>
+          </a:solidFill>
+          <a:ln>
+            <a:noFill/>
+          </a:ln>
+          <a:effectLst/>
+        </p:spPr>
+        <p:style>
+          <a:lnRef idx="1">
+            <a:schemeClr val="accent1"/>
+          </a:lnRef>
+          <a:fillRef idx="3">
+            <a:schemeClr val="accent1"/>
+          </a:fillRef>
+          <a:effectRef idx="2">
+            <a:schemeClr val="accent1"/>
+          </a:effectRef>
+          <a:fontRef idx="minor">
+            <a:schemeClr val="lt1"/>
+          </a:fontRef>
+        </p:style>
+        <p:txBody>
+          <a:bodyPr rtlCol="0" anchor="ctr"/>
+          <a:lstStyle/>
+          <a:p>
+            <a:pPr algn="ctr"/>
+            <a:r>
+              <a:rPr sz="950" b="1">
+                <a:solidFill>
+                  <a:srgbClr val="2A124E"/>
+                </a:solidFill>
+                <a:latin typeface="Segoe UI"/>
+              </a:rPr>
+              <a:t>PROVE</a:t>
+            </a:r>
+          </a:p>
+        </p:txBody>
+      </p:sp>
+      <p:sp>
+        <p:nvSpPr>
+          <p:cNvPr id="25" name="TextBox 24"/>
+          <p:cNvSpPr txBox="1"/>
+          <p:nvPr/>
+        </p:nvSpPr>
+        <p:spPr>
+          <a:xfrm>
+            <a:off x="4636008" y="4855464"/>
+            <a:ext cx="3246120" cy="777240"/>
+          </a:xfrm>
+          <a:prstGeom prst="rect">
+            <a:avLst/>
+          </a:prstGeom>
+          <a:noFill/>
+        </p:spPr>
+        <p:txBody>
+          <a:bodyPr wrap="square" anchor="t" lIns="25400" rIns="25400" tIns="25400" bIns="25400">
+            <a:spAutoFit/>
+          </a:bodyPr>
+          <a:lstStyle/>
+          <a:p>
+            <a:pPr algn="l">
+              <a:lnSpc>
+                <a:spcPct val="103000"/>
+              </a:lnSpc>
+              <a:spcAft>
+                <a:spcPts val="400"/>
+              </a:spcAft>
+            </a:pPr>
+            <a:r>
+              <a:rPr sz="1100" b="0">
+                <a:solidFill>
+                  <a:srgbClr val="FFFFFF"/>
+                </a:solidFill>
+                <a:latin typeface="Segoe UI"/>
+              </a:rPr>
+              <a:t>kubectl get nodes / modeldeployments / pods -n foundry-local-operator. Same +50 bps = identical curve.</a:t>
+            </a:r>
+          </a:p>
+        </p:txBody>
+      </p:sp>
+      <p:sp>
+        <p:nvSpPr>
+          <p:cNvPr id="26" name="Rounded Rectangle 25"/>
+          <p:cNvSpPr/>
+          <p:nvPr/>
+        </p:nvSpPr>
+        <p:spPr>
+          <a:xfrm>
+            <a:off x="8321040" y="1783080"/>
+            <a:ext cx="3657600" cy="3886200"/>
+          </a:xfrm>
+          <a:prstGeom prst="roundRect">
+            <a:avLst/>
+          </a:prstGeom>
+          <a:solidFill>
+            <a:srgbClr val="3A2266"/>
+          </a:solidFill>
+          <a:ln w="12700">
+            <a:solidFill>
+              <a:srgbClr val="6B4AA8"/>
+            </a:solidFill>
+          </a:ln>
+          <a:effectLst/>
+        </p:spPr>
+        <p:style>
+          <a:lnRef idx="1">
+            <a:schemeClr val="accent1"/>
+          </a:lnRef>
+          <a:fillRef idx="3">
+            <a:schemeClr val="accent1"/>
+          </a:fillRef>
+          <a:effectRef idx="2">
+            <a:schemeClr val="accent1"/>
+          </a:effectRef>
+          <a:fontRef idx="minor">
+            <a:schemeClr val="lt1"/>
+          </a:fontRef>
+        </p:style>
+        <p:txBody>
+          <a:bodyPr rtlCol="0" anchor="ctr"/>
+          <a:lstStyle/>
+          <a:p>
+            <a:pPr algn="ctr"/>
+          </a:p>
+        </p:txBody>
+      </p:sp>
+      <p:sp>
+        <p:nvSpPr>
+          <p:cNvPr id="27" name="Rounded Rectangle 26"/>
+          <p:cNvSpPr/>
+          <p:nvPr/>
+        </p:nvSpPr>
+        <p:spPr>
+          <a:xfrm>
+            <a:off x="8321040" y="1783080"/>
+            <a:ext cx="3657600" cy="502920"/>
+          </a:xfrm>
+          <a:prstGeom prst="roundRect">
+            <a:avLst/>
+          </a:prstGeom>
+          <a:solidFill>
+            <a:srgbClr val="B9A3E3"/>
+          </a:solidFill>
+          <a:ln>
+            <a:noFill/>
+          </a:ln>
+          <a:effectLst/>
+        </p:spPr>
+        <p:style>
+          <a:lnRef idx="1">
+            <a:schemeClr val="accent1"/>
+          </a:lnRef>
+          <a:fillRef idx="3">
+            <a:schemeClr val="accent1"/>
+          </a:fillRef>
+          <a:effectRef idx="2">
+            <a:schemeClr val="accent1"/>
+          </a:effectRef>
+          <a:fontRef idx="minor">
+            <a:schemeClr val="lt1"/>
+          </a:fontRef>
+        </p:style>
+        <p:txBody>
+          <a:bodyPr rtlCol="0" anchor="ctr"/>
+          <a:lstStyle/>
+          <a:p>
+            <a:pPr algn="ctr"/>
+          </a:p>
+        </p:txBody>
+      </p:sp>
+      <p:sp>
+        <p:nvSpPr>
+          <p:cNvPr id="28" name="Rectangle 27"/>
+          <p:cNvSpPr/>
+          <p:nvPr/>
+        </p:nvSpPr>
+        <p:spPr>
+          <a:xfrm>
+            <a:off x="8321040" y="2029968"/>
+            <a:ext cx="3657600" cy="256032"/>
+          </a:xfrm>
+          <a:prstGeom prst="rect">
+            <a:avLst/>
+          </a:prstGeom>
+          <a:solidFill>
+            <a:srgbClr val="B9A3E3"/>
+          </a:solidFill>
+          <a:ln>
+            <a:noFill/>
+          </a:ln>
+          <a:effectLst/>
+        </p:spPr>
+        <p:style>
+          <a:lnRef idx="1">
+            <a:schemeClr val="accent1"/>
+          </a:lnRef>
+          <a:fillRef idx="3">
+            <a:schemeClr val="accent1"/>
+          </a:fillRef>
+          <a:effectRef idx="2">
+            <a:schemeClr val="accent1"/>
+          </a:effectRef>
+          <a:fontRef idx="minor">
+            <a:schemeClr val="lt1"/>
+          </a:fontRef>
+        </p:style>
+        <p:txBody>
+          <a:bodyPr rtlCol="0" anchor="ctr"/>
+          <a:lstStyle/>
+          <a:p>
+            <a:pPr algn="ctr"/>
+          </a:p>
+        </p:txBody>
+      </p:sp>
+      <p:sp>
+        <p:nvSpPr>
+          <p:cNvPr id="29" name="TextBox 28"/>
+          <p:cNvSpPr txBox="1"/>
+          <p:nvPr/>
+        </p:nvSpPr>
+        <p:spPr>
+          <a:xfrm>
+            <a:off x="8522208" y="1801368"/>
+            <a:ext cx="3291840" cy="457200"/>
+          </a:xfrm>
+          <a:prstGeom prst="rect">
+            <a:avLst/>
+          </a:prstGeom>
+          <a:noFill/>
+        </p:spPr>
+        <p:txBody>
+          <a:bodyPr wrap="square" anchor="ctr" lIns="25400" rIns="25400" tIns="25400" bIns="25400">
+            <a:spAutoFit/>
+          </a:bodyPr>
+          <a:lstStyle/>
+          <a:p>
+            <a:pPr algn="l">
+              <a:spcAft>
+                <a:spcPts val="400"/>
+              </a:spcAft>
+            </a:pPr>
+            <a:r>
+              <a:rPr sz="1350" b="1">
+                <a:solidFill>
+                  <a:srgbClr val="2A124E"/>
+                </a:solidFill>
+                <a:latin typeface="Segoe UI"/>
+              </a:rPr>
+              <a:t>ACT 3 — Add intelligence</a:t>
+            </a:r>
+          </a:p>
+        </p:txBody>
+      </p:sp>
+      <p:sp>
+        <p:nvSpPr>
+          <p:cNvPr id="30" name="Rounded Rectangle 29"/>
+          <p:cNvSpPr/>
+          <p:nvPr/>
+        </p:nvSpPr>
+        <p:spPr>
+          <a:xfrm>
+            <a:off x="8522208" y="2441448"/>
+            <a:ext cx="658368" cy="256032"/>
+          </a:xfrm>
+          <a:prstGeom prst="roundRect">
+            <a:avLst/>
+          </a:prstGeom>
+          <a:solidFill>
+            <a:srgbClr val="B9A3E3"/>
+          </a:solidFill>
+          <a:ln>
+            <a:noFill/>
+          </a:ln>
+          <a:effectLst/>
+        </p:spPr>
+        <p:style>
+          <a:lnRef idx="1">
+            <a:schemeClr val="accent1"/>
+          </a:lnRef>
+          <a:fillRef idx="3">
+            <a:schemeClr val="accent1"/>
+          </a:fillRef>
+          <a:effectRef idx="2">
+            <a:schemeClr val="accent1"/>
+          </a:effectRef>
+          <a:fontRef idx="minor">
+            <a:schemeClr val="lt1"/>
+          </a:fontRef>
+        </p:style>
+        <p:txBody>
+          <a:bodyPr rtlCol="0" anchor="ctr"/>
+          <a:lstStyle/>
+          <a:p>
+            <a:pPr algn="ctr"/>
+            <a:r>
+              <a:rPr sz="950" b="1">
+                <a:solidFill>
+                  <a:srgbClr val="2A124E"/>
+                </a:solidFill>
+                <a:latin typeface="Segoe UI"/>
+              </a:rPr>
+              <a:t>SAY</a:t>
+            </a:r>
+          </a:p>
+        </p:txBody>
+      </p:sp>
+      <p:sp>
+        <p:nvSpPr>
+          <p:cNvPr id="31" name="TextBox 30"/>
+          <p:cNvSpPr txBox="1"/>
+          <p:nvPr/>
+        </p:nvSpPr>
+        <p:spPr>
+          <a:xfrm>
+            <a:off x="8522208" y="2734056"/>
+            <a:ext cx="3246120" cy="777240"/>
+          </a:xfrm>
+          <a:prstGeom prst="rect">
+            <a:avLst/>
+          </a:prstGeom>
+          <a:noFill/>
+        </p:spPr>
+        <p:txBody>
+          <a:bodyPr wrap="square" anchor="t" lIns="25400" rIns="25400" tIns="25400" bIns="25400">
+            <a:spAutoFit/>
+          </a:bodyPr>
+          <a:lstStyle/>
+          <a:p>
+            <a:pPr algn="l">
+              <a:lnSpc>
+                <a:spcPct val="103000"/>
+              </a:lnSpc>
+              <a:spcAft>
+                <a:spcPts val="400"/>
+              </a:spcAft>
+            </a:pPr>
+            <a:r>
+              <a:rPr sz="1100" b="0">
+                <a:solidFill>
+                  <a:srgbClr val="FFFFFF"/>
+                </a:solidFill>
+                <a:latin typeface="Segoe UI"/>
+              </a:rPr>
+              <a:t>“Now a generative model from the catalog — Phi-4 — on the same CPU cluster.”</a:t>
+            </a:r>
+          </a:p>
+        </p:txBody>
+      </p:sp>
+      <p:sp>
+        <p:nvSpPr>
+          <p:cNvPr id="32" name="Rounded Rectangle 31"/>
+          <p:cNvSpPr/>
+          <p:nvPr/>
+        </p:nvSpPr>
+        <p:spPr>
+          <a:xfrm>
+            <a:off x="8522208" y="3502152"/>
+            <a:ext cx="658368" cy="256032"/>
+          </a:xfrm>
+          <a:prstGeom prst="roundRect">
+            <a:avLst/>
+          </a:prstGeom>
+          <a:solidFill>
+            <a:srgbClr val="B9A3E3"/>
+          </a:solidFill>
+          <a:ln>
+            <a:noFill/>
+          </a:ln>
+          <a:effectLst/>
+        </p:spPr>
+        <p:style>
+          <a:lnRef idx="1">
+            <a:schemeClr val="accent1"/>
+          </a:lnRef>
+          <a:fillRef idx="3">
+            <a:schemeClr val="accent1"/>
+          </a:fillRef>
+          <a:effectRef idx="2">
+            <a:schemeClr val="accent1"/>
+          </a:effectRef>
+          <a:fontRef idx="minor">
+            <a:schemeClr val="lt1"/>
+          </a:fontRef>
+        </p:style>
+        <p:txBody>
+          <a:bodyPr rtlCol="0" anchor="ctr"/>
+          <a:lstStyle/>
+          <a:p>
+            <a:pPr algn="ctr"/>
+            <a:r>
+              <a:rPr sz="950" b="1">
+                <a:solidFill>
+                  <a:srgbClr val="2A124E"/>
+                </a:solidFill>
+                <a:latin typeface="Segoe UI"/>
+              </a:rPr>
+              <a:t>SHOW</a:t>
+            </a:r>
+          </a:p>
+        </p:txBody>
+      </p:sp>
+      <p:sp>
+        <p:nvSpPr>
+          <p:cNvPr id="33" name="TextBox 32"/>
+          <p:cNvSpPr txBox="1"/>
+          <p:nvPr/>
+        </p:nvSpPr>
+        <p:spPr>
+          <a:xfrm>
+            <a:off x="8522208" y="3794760"/>
+            <a:ext cx="3246120" cy="777240"/>
+          </a:xfrm>
+          <a:prstGeom prst="rect">
+            <a:avLst/>
+          </a:prstGeom>
+          <a:noFill/>
+        </p:spPr>
+        <p:txBody>
+          <a:bodyPr wrap="square" anchor="t" lIns="25400" rIns="25400" tIns="25400" bIns="25400">
+            <a:spAutoFit/>
+          </a:bodyPr>
+          <a:lstStyle/>
+          <a:p>
+            <a:pPr algn="l">
+              <a:lnSpc>
+                <a:spcPct val="103000"/>
+              </a:lnSpc>
+              <a:spcAft>
+                <a:spcPts val="400"/>
+              </a:spcAft>
+            </a:pPr>
+            <a:r>
+              <a:rPr sz="1100" b="0">
+                <a:solidFill>
+                  <a:srgbClr val="FFFFFF"/>
+                </a:solidFill>
+                <a:latin typeface="Segoe UI"/>
+              </a:rPr>
+              <a:t>'Ask the AI analyst' -&gt; a suggestion. Plain-language reply, generated at the edge.</a:t>
+            </a:r>
+          </a:p>
+        </p:txBody>
+      </p:sp>
+      <p:sp>
+        <p:nvSpPr>
+          <p:cNvPr id="34" name="Rounded Rectangle 33"/>
+          <p:cNvSpPr/>
+          <p:nvPr/>
+        </p:nvSpPr>
+        <p:spPr>
+          <a:xfrm>
+            <a:off x="8522208" y="4562856"/>
+            <a:ext cx="658368" cy="256032"/>
+          </a:xfrm>
+          <a:prstGeom prst="roundRect">
+            <a:avLst/>
+          </a:prstGeom>
+          <a:solidFill>
+            <a:srgbClr val="B9A3E3"/>
+          </a:solidFill>
+          <a:ln>
+            <a:noFill/>
+          </a:ln>
+          <a:effectLst/>
+        </p:spPr>
+        <p:style>
+          <a:lnRef idx="1">
+            <a:schemeClr val="accent1"/>
+          </a:lnRef>
+          <a:fillRef idx="3">
+            <a:schemeClr val="accent1"/>
+          </a:fillRef>
+          <a:effectRef idx="2">
+            <a:schemeClr val="accent1"/>
+          </a:effectRef>
+          <a:fontRef idx="minor">
+            <a:schemeClr val="lt1"/>
+          </a:fontRef>
+        </p:style>
+        <p:txBody>
+          <a:bodyPr rtlCol="0" anchor="ctr"/>
+          <a:lstStyle/>
+          <a:p>
+            <a:pPr algn="ctr"/>
+            <a:r>
+              <a:rPr sz="950" b="1">
+                <a:solidFill>
+                  <a:srgbClr val="2A124E"/>
+                </a:solidFill>
+                <a:latin typeface="Segoe UI"/>
+              </a:rPr>
+              <a:t>PROVE</a:t>
+            </a:r>
+          </a:p>
+        </p:txBody>
+      </p:sp>
+      <p:sp>
+        <p:nvSpPr>
+          <p:cNvPr id="35" name="TextBox 34"/>
+          <p:cNvSpPr txBox="1"/>
+          <p:nvPr/>
+        </p:nvSpPr>
+        <p:spPr>
+          <a:xfrm>
+            <a:off x="8522208" y="4855464"/>
+            <a:ext cx="3246120" cy="777240"/>
+          </a:xfrm>
+          <a:prstGeom prst="rect">
+            <a:avLst/>
+          </a:prstGeom>
+          <a:noFill/>
+        </p:spPr>
+        <p:txBody>
+          <a:bodyPr wrap="square" anchor="t" lIns="25400" rIns="25400" tIns="25400" bIns="25400">
+            <a:spAutoFit/>
+          </a:bodyPr>
+          <a:lstStyle/>
+          <a:p>
+            <a:pPr algn="l">
+              <a:lnSpc>
+                <a:spcPct val="103000"/>
+              </a:lnSpc>
+              <a:spcAft>
+                <a:spcPts val="400"/>
+              </a:spcAft>
+            </a:pPr>
+            <a:r>
+              <a:rPr sz="1100" b="0">
+                <a:solidFill>
+                  <a:srgbClr val="FFFFFF"/>
+                </a:solidFill>
+                <a:latin typeface="Segoe UI"/>
+              </a:rPr>
+              <a:t>kubectl get modeldeployment phi-4-cpu (onnx-genai, Ready). Tip: warm up once (~40s cold).</a:t>
+            </a:r>
+          </a:p>
+        </p:txBody>
+      </p:sp>
+      <p:sp>
+        <p:nvSpPr>
+          <p:cNvPr id="36" name="TextBox 35"/>
+          <p:cNvSpPr txBox="1"/>
+          <p:nvPr/>
+        </p:nvSpPr>
+        <p:spPr>
+          <a:xfrm>
+            <a:off x="548640" y="6510528"/>
+            <a:ext cx="11064240" cy="274320"/>
+          </a:xfrm>
+          <a:prstGeom prst="rect">
+            <a:avLst/>
+          </a:prstGeom>
+          <a:noFill/>
+        </p:spPr>
+        <p:txBody>
+          <a:bodyPr wrap="square" anchor="t" lIns="25400" rIns="25400" tIns="25400" bIns="25400">
+            <a:spAutoFit/>
+          </a:bodyPr>
+          <a:lstStyle/>
+          <a:p>
+            <a:pPr algn="l">
+              <a:spcAft>
+                <a:spcPts val="400"/>
+              </a:spcAft>
+            </a:pPr>
+            <a:r>
+              <a:rPr sz="1050" b="0">
+                <a:solidFill>
+                  <a:srgbClr val="C8BDE6"/>
+                </a:solidFill>
+                <a:latin typeface="Segoe UI"/>
+              </a:rPr>
+              <a:t>Backup: dashboard has per-act fallbacks; keep the az connectedk8s proxy alive; pivot to kubectl to prove the edge workloads are real.</a:t>
             </a:r>
           </a:p>
         </p:txBody>
